--- a/curriculum/week-01/week1-topic-02-public-private-keys.pptx
+++ b/curriculum/week-01/week1-topic-02-public-private-keys.pptx
@@ -3270,8 +3270,8 @@
         </p:nvSpPr>
         <p:spPr>
           <a:xfrm>
-            <a:off x="822960" y="1188720"/>
-            <a:ext cx="5486400" cy="1188720"/>
+            <a:off x="822960" y="502920"/>
+            <a:ext cx="9144000" cy="365760"/>
           </a:xfrm>
           <a:prstGeom prst="rect">
             <a:avLst/>
@@ -3290,13 +3290,13 @@
               </a:lnSpc>
             </a:pPr>
             <a:r>
-              <a:rPr sz="10000" b="1" i="0">
-                <a:solidFill>
-                  <a:srgbClr val="FFFFFF"/>
-                </a:solidFill>
-                <a:latin typeface="Century Gothic"/>
-              </a:rPr>
-              <a:t>02</a:t>
+              <a:rPr sz="1300" b="1" i="0">
+                <a:solidFill>
+                  <a:srgbClr val="FFC53D"/>
+                </a:solidFill>
+                <a:latin typeface="Calibri"/>
+              </a:rPr>
+              <a:t>BlockchainCourse · Curriculum · Week 01 · Topic 02 of 04</a:t>
             </a:r>
           </a:p>
         </p:txBody>
@@ -3309,8 +3309,8 @@
         </p:nvSpPr>
         <p:spPr>
           <a:xfrm>
-            <a:off x="822960" y="2423160"/>
-            <a:ext cx="8961120" cy="1554480"/>
+            <a:off x="822960" y="1188720"/>
+            <a:ext cx="5486400" cy="1188720"/>
           </a:xfrm>
           <a:prstGeom prst="rect">
             <a:avLst/>
@@ -3325,17 +3325,17 @@
           <a:p>
             <a:pPr algn="l">
               <a:lnSpc>
-                <a:spcPct val="105000"/>
-              </a:lnSpc>
-            </a:pPr>
-            <a:r>
-              <a:rPr sz="4600" b="1" i="0">
+                <a:spcPct val="115000"/>
+              </a:lnSpc>
+            </a:pPr>
+            <a:r>
+              <a:rPr sz="10000" b="1" i="0">
                 <a:solidFill>
                   <a:srgbClr val="FFFFFF"/>
                 </a:solidFill>
                 <a:latin typeface="Century Gothic"/>
               </a:rPr>
-              <a:t>Public / Private Keys</a:t>
+              <a:t>02</a:t>
             </a:r>
           </a:p>
         </p:txBody>
@@ -3348,8 +3348,8 @@
         </p:nvSpPr>
         <p:spPr>
           <a:xfrm>
-            <a:off x="822960" y="4160520"/>
-            <a:ext cx="6858000" cy="1097280"/>
+            <a:off x="822960" y="2423160"/>
+            <a:ext cx="8961120" cy="1554480"/>
           </a:xfrm>
           <a:prstGeom prst="rect">
             <a:avLst/>
@@ -3364,17 +3364,17 @@
           <a:p>
             <a:pPr algn="l">
               <a:lnSpc>
-                <a:spcPct val="125000"/>
-              </a:lnSpc>
-            </a:pPr>
-            <a:r>
-              <a:rPr sz="1900" b="0" i="0">
+                <a:spcPct val="105000"/>
+              </a:lnSpc>
+            </a:pPr>
+            <a:r>
+              <a:rPr sz="4600" b="1" i="0">
                 <a:solidFill>
                   <a:srgbClr val="FFFFFF"/>
                 </a:solidFill>
-                <a:latin typeface="Calibri"/>
-              </a:rPr>
-              <a:t>Prove ownership without ever revealing the secret that proves it.</a:t>
+                <a:latin typeface="Century Gothic"/>
+              </a:rPr>
+              <a:t>Public / Private Keys</a:t>
             </a:r>
           </a:p>
         </p:txBody>
@@ -3387,8 +3387,8 @@
         </p:nvSpPr>
         <p:spPr>
           <a:xfrm>
-            <a:off x="822960" y="6446520"/>
-            <a:ext cx="8229600" cy="320040"/>
+            <a:off x="822960" y="4160520"/>
+            <a:ext cx="6858000" cy="1097280"/>
           </a:xfrm>
           <a:prstGeom prst="rect">
             <a:avLst/>
@@ -3403,6 +3403,277 @@
           <a:p>
             <a:pPr algn="l">
               <a:lnSpc>
+                <a:spcPct val="125000"/>
+              </a:lnSpc>
+            </a:pPr>
+            <a:r>
+              <a:rPr sz="1900" b="0" i="0">
+                <a:solidFill>
+                  <a:srgbClr val="FFFFFF"/>
+                </a:solidFill>
+                <a:latin typeface="Calibri"/>
+              </a:rPr>
+              <a:t>Prove ownership without ever revealing the secret that proves it.</a:t>
+            </a:r>
+          </a:p>
+        </p:txBody>
+      </p:sp>
+      <p:sp>
+        <p:nvSpPr>
+          <p:cNvPr id="10" name="Rounded Rectangle 9"/>
+          <p:cNvSpPr/>
+          <p:nvPr/>
+        </p:nvSpPr>
+        <p:spPr>
+          <a:xfrm>
+            <a:off x="822960" y="5669280"/>
+            <a:ext cx="1100937" cy="402336"/>
+          </a:xfrm>
+          <a:prstGeom prst="roundRect">
+            <a:avLst>
+              <a:gd name="adj" fmla="val 50000"/>
+            </a:avLst>
+          </a:prstGeom>
+          <a:solidFill>
+            <a:srgbClr val="FFFFFF">
+              <a:alpha val="14000"/>
+            </a:srgbClr>
+          </a:solidFill>
+          <a:ln w="9525">
+            <a:solidFill>
+              <a:srgbClr val="FFFFFF"/>
+            </a:solidFill>
+          </a:ln>
+          <a:effectLst/>
+        </p:spPr>
+        <p:style>
+          <a:lnRef idx="1">
+            <a:schemeClr val="accent1"/>
+          </a:lnRef>
+          <a:fillRef idx="3">
+            <a:schemeClr val="accent1"/>
+          </a:fillRef>
+          <a:effectRef idx="2">
+            <a:schemeClr val="accent1"/>
+          </a:effectRef>
+          <a:fontRef idx="minor">
+            <a:schemeClr val="lt1"/>
+          </a:fontRef>
+        </p:style>
+        <p:txBody>
+          <a:bodyPr rtlCol="0" anchor="ctr" lIns="109728" rIns="109728" tIns="18288" bIns="18288" wrap="none"/>
+          <a:lstStyle/>
+          <a:p>
+            <a:pPr algn="ctr"/>
+            <a:r>
+              <a:rPr sz="1100" b="0">
+                <a:solidFill>
+                  <a:srgbClr val="DDD9E8"/>
+                </a:solidFill>
+                <a:latin typeface="Calibri"/>
+              </a:rPr>
+              <a:t>01 · Hashing</a:t>
+            </a:r>
+          </a:p>
+        </p:txBody>
+      </p:sp>
+      <p:sp>
+        <p:nvSpPr>
+          <p:cNvPr id="11" name="Rounded Rectangle 10"/>
+          <p:cNvSpPr/>
+          <p:nvPr/>
+        </p:nvSpPr>
+        <p:spPr>
+          <a:xfrm>
+            <a:off x="2070201" y="5669280"/>
+            <a:ext cx="2022652" cy="402336"/>
+          </a:xfrm>
+          <a:prstGeom prst="roundRect">
+            <a:avLst>
+              <a:gd name="adj" fmla="val 50000"/>
+            </a:avLst>
+          </a:prstGeom>
+          <a:solidFill>
+            <a:srgbClr val="C67A1E"/>
+          </a:solidFill>
+          <a:ln>
+            <a:noFill/>
+          </a:ln>
+          <a:effectLst/>
+        </p:spPr>
+        <p:style>
+          <a:lnRef idx="1">
+            <a:schemeClr val="accent1"/>
+          </a:lnRef>
+          <a:fillRef idx="3">
+            <a:schemeClr val="accent1"/>
+          </a:fillRef>
+          <a:effectRef idx="2">
+            <a:schemeClr val="accent1"/>
+          </a:effectRef>
+          <a:fontRef idx="minor">
+            <a:schemeClr val="lt1"/>
+          </a:fontRef>
+        </p:style>
+        <p:txBody>
+          <a:bodyPr rtlCol="0" anchor="ctr" lIns="109728" rIns="109728" tIns="18288" bIns="18288" wrap="none"/>
+          <a:lstStyle/>
+          <a:p>
+            <a:pPr algn="ctr"/>
+            <a:r>
+              <a:rPr sz="1100" b="1">
+                <a:solidFill>
+                  <a:srgbClr val="FFFFFF"/>
+                </a:solidFill>
+                <a:latin typeface="Calibri"/>
+              </a:rPr>
+              <a:t>02 · Public / Private Keys</a:t>
+            </a:r>
+          </a:p>
+        </p:txBody>
+      </p:sp>
+      <p:sp>
+        <p:nvSpPr>
+          <p:cNvPr id="12" name="Rounded Rectangle 11"/>
+          <p:cNvSpPr/>
+          <p:nvPr/>
+        </p:nvSpPr>
+        <p:spPr>
+          <a:xfrm>
+            <a:off x="4239157" y="5669280"/>
+            <a:ext cx="1627632" cy="402336"/>
+          </a:xfrm>
+          <a:prstGeom prst="roundRect">
+            <a:avLst>
+              <a:gd name="adj" fmla="val 50000"/>
+            </a:avLst>
+          </a:prstGeom>
+          <a:solidFill>
+            <a:srgbClr val="FFFFFF">
+              <a:alpha val="14000"/>
+            </a:srgbClr>
+          </a:solidFill>
+          <a:ln w="9525">
+            <a:solidFill>
+              <a:srgbClr val="FFFFFF"/>
+            </a:solidFill>
+          </a:ln>
+          <a:effectLst/>
+        </p:spPr>
+        <p:style>
+          <a:lnRef idx="1">
+            <a:schemeClr val="accent1"/>
+          </a:lnRef>
+          <a:fillRef idx="3">
+            <a:schemeClr val="accent1"/>
+          </a:fillRef>
+          <a:effectRef idx="2">
+            <a:schemeClr val="accent1"/>
+          </a:effectRef>
+          <a:fontRef idx="minor">
+            <a:schemeClr val="lt1"/>
+          </a:fontRef>
+        </p:style>
+        <p:txBody>
+          <a:bodyPr rtlCol="0" anchor="ctr" lIns="109728" rIns="109728" tIns="18288" bIns="18288" wrap="none"/>
+          <a:lstStyle/>
+          <a:p>
+            <a:pPr algn="ctr"/>
+            <a:r>
+              <a:rPr sz="1100" b="0">
+                <a:solidFill>
+                  <a:srgbClr val="DDD9E8"/>
+                </a:solidFill>
+                <a:latin typeface="Calibri"/>
+              </a:rPr>
+              <a:t>03 · Blocks &amp; Chains</a:t>
+            </a:r>
+          </a:p>
+        </p:txBody>
+      </p:sp>
+      <p:sp>
+        <p:nvSpPr>
+          <p:cNvPr id="13" name="Rounded Rectangle 12"/>
+          <p:cNvSpPr/>
+          <p:nvPr/>
+        </p:nvSpPr>
+        <p:spPr>
+          <a:xfrm>
+            <a:off x="6013093" y="5669280"/>
+            <a:ext cx="1232611" cy="402336"/>
+          </a:xfrm>
+          <a:prstGeom prst="roundRect">
+            <a:avLst>
+              <a:gd name="adj" fmla="val 50000"/>
+            </a:avLst>
+          </a:prstGeom>
+          <a:solidFill>
+            <a:srgbClr val="FFFFFF">
+              <a:alpha val="14000"/>
+            </a:srgbClr>
+          </a:solidFill>
+          <a:ln w="9525">
+            <a:solidFill>
+              <a:srgbClr val="FFFFFF"/>
+            </a:solidFill>
+          </a:ln>
+          <a:effectLst/>
+        </p:spPr>
+        <p:style>
+          <a:lnRef idx="1">
+            <a:schemeClr val="accent1"/>
+          </a:lnRef>
+          <a:fillRef idx="3">
+            <a:schemeClr val="accent1"/>
+          </a:fillRef>
+          <a:effectRef idx="2">
+            <a:schemeClr val="accent1"/>
+          </a:effectRef>
+          <a:fontRef idx="minor">
+            <a:schemeClr val="lt1"/>
+          </a:fontRef>
+        </p:style>
+        <p:txBody>
+          <a:bodyPr rtlCol="0" anchor="ctr" lIns="109728" rIns="109728" tIns="18288" bIns="18288" wrap="none"/>
+          <a:lstStyle/>
+          <a:p>
+            <a:pPr algn="ctr"/>
+            <a:r>
+              <a:rPr sz="1100" b="0">
+                <a:solidFill>
+                  <a:srgbClr val="DDD9E8"/>
+                </a:solidFill>
+                <a:latin typeface="Calibri"/>
+              </a:rPr>
+              <a:t>04 · Consensus</a:t>
+            </a:r>
+          </a:p>
+        </p:txBody>
+      </p:sp>
+      <p:sp>
+        <p:nvSpPr>
+          <p:cNvPr id="14" name="TextBox 13"/>
+          <p:cNvSpPr txBox="1"/>
+          <p:nvPr/>
+        </p:nvSpPr>
+        <p:spPr>
+          <a:xfrm>
+            <a:off x="822960" y="6446520"/>
+            <a:ext cx="8229600" cy="320040"/>
+          </a:xfrm>
+          <a:prstGeom prst="rect">
+            <a:avLst/>
+          </a:prstGeom>
+          <a:noFill/>
+        </p:spPr>
+        <p:txBody>
+          <a:bodyPr wrap="square" anchor="t" lIns="0" rIns="0" tIns="0" bIns="0">
+            <a:spAutoFit/>
+          </a:bodyPr>
+          <a:lstStyle/>
+          <a:p>
+            <a:pPr algn="l">
+              <a:lnSpc>
                 <a:spcPct val="115000"/>
               </a:lnSpc>
             </a:pPr>
@@ -3420,7 +3691,7 @@
       </p:sp>
       <p:sp>
         <p:nvSpPr>
-          <p:cNvPr id="10" name="TextBox 9"/>
+          <p:cNvPr id="15" name="TextBox 14"/>
           <p:cNvSpPr txBox="1"/>
           <p:nvPr/>
         </p:nvSpPr>

--- a/curriculum/week-01/week1-topic-02-public-private-keys.pptx
+++ b/curriculum/week-01/week1-topic-02-public-private-keys.pptx
@@ -20,6 +20,9 @@
     <p:sldId id="268" r:id="rId19"/>
     <p:sldId id="269" r:id="rId20"/>
     <p:sldId id="270" r:id="rId21"/>
+    <p:sldId id="271" r:id="rId22"/>
+    <p:sldId id="272" r:id="rId23"/>
+    <p:sldId id="273" r:id="rId24"/>
   </p:sldIdLst>
   <p:sldSz cx="12191695" cy="6858000" type="screen4x3"/>
   <p:notesSz cx="6858000" cy="9144000"/>
@@ -3146,51 +3149,162 @@
           </a:p>
         </p:txBody>
       </p:sp>
-      <p:pic>
-        <p:nvPicPr>
-          <p:cNvPr id="3" name="Picture 2" descr="_cover_02.jpg"/>
-          <p:cNvPicPr>
-            <a:picLocks noChangeAspect="1"/>
-          </p:cNvPicPr>
-          <p:nvPr/>
-        </p:nvPicPr>
-        <p:blipFill>
-          <a:blip r:embed="rId2"/>
-          <a:stretch>
-            <a:fillRect/>
-          </a:stretch>
-        </p:blipFill>
-        <p:spPr>
-          <a:xfrm>
-            <a:off x="0" y="0"/>
-            <a:ext cx="12191695" cy="6858000"/>
-          </a:xfrm>
-          <a:prstGeom prst="rect">
-            <a:avLst/>
-          </a:prstGeom>
-        </p:spPr>
-      </p:pic>
-      <p:sp>
-        <p:nvSpPr>
-          <p:cNvPr id="4" name="Rectangle 3"/>
+      <p:sp>
+        <p:nvSpPr>
+          <p:cNvPr id="3" name="TextBox 2"/>
+          <p:cNvSpPr txBox="1"/>
+          <p:nvPr/>
+        </p:nvSpPr>
+        <p:spPr>
+          <a:xfrm>
+            <a:off x="822960" y="822960"/>
+            <a:ext cx="10058400" cy="365760"/>
+          </a:xfrm>
+          <a:prstGeom prst="rect">
+            <a:avLst/>
+          </a:prstGeom>
+          <a:noFill/>
+        </p:spPr>
+        <p:txBody>
+          <a:bodyPr wrap="square" anchor="t" lIns="0" rIns="0" tIns="0" bIns="0">
+            <a:spAutoFit/>
+          </a:bodyPr>
+          <a:lstStyle/>
+          <a:p>
+            <a:pPr algn="l">
+              <a:lnSpc>
+                <a:spcPct val="115000"/>
+              </a:lnSpc>
+            </a:pPr>
+            <a:r>
+              <a:rPr sz="1300" b="1" i="0">
+                <a:solidFill>
+                  <a:srgbClr val="FFC53D"/>
+                </a:solidFill>
+                <a:latin typeface="Calibri"/>
+              </a:rPr>
+              <a:t>BLOCKCHAINCOURSE</a:t>
+            </a:r>
+          </a:p>
+        </p:txBody>
+      </p:sp>
+      <p:sp>
+        <p:nvSpPr>
+          <p:cNvPr id="4" name="TextBox 3"/>
+          <p:cNvSpPr txBox="1"/>
+          <p:nvPr/>
+        </p:nvSpPr>
+        <p:spPr>
+          <a:xfrm>
+            <a:off x="822960" y="1371600"/>
+            <a:ext cx="9144000" cy="1600200"/>
+          </a:xfrm>
+          <a:prstGeom prst="rect">
+            <a:avLst/>
+          </a:prstGeom>
+          <a:noFill/>
+        </p:spPr>
+        <p:txBody>
+          <a:bodyPr wrap="square" anchor="t" lIns="0" rIns="0" tIns="0" bIns="0">
+            <a:spAutoFit/>
+          </a:bodyPr>
+          <a:lstStyle/>
+          <a:p>
+            <a:pPr algn="l">
+              <a:lnSpc>
+                <a:spcPct val="105000"/>
+              </a:lnSpc>
+            </a:pPr>
+            <a:r>
+              <a:rPr sz="4200" b="1" i="0">
+                <a:solidFill>
+                  <a:srgbClr val="FFFFFF"/>
+                </a:solidFill>
+                <a:latin typeface="Century Gothic"/>
+              </a:rPr>
+              <a:t>Practical Engineering</a:t>
+            </a:r>
+          </a:p>
+          <a:p>
+            <a:pPr algn="l">
+              <a:lnSpc>
+                <a:spcPct val="105000"/>
+              </a:lnSpc>
+            </a:pPr>
+            <a:r>
+              <a:rPr sz="4200" b="1" i="0">
+                <a:solidFill>
+                  <a:srgbClr val="FFFFFF"/>
+                </a:solidFill>
+                <a:latin typeface="Century Gothic"/>
+              </a:rPr>
+              <a:t>Over Hype</a:t>
+            </a:r>
+          </a:p>
+        </p:txBody>
+      </p:sp>
+      <p:sp>
+        <p:nvSpPr>
+          <p:cNvPr id="5" name="TextBox 4"/>
+          <p:cNvSpPr txBox="1"/>
+          <p:nvPr/>
+        </p:nvSpPr>
+        <p:spPr>
+          <a:xfrm>
+            <a:off x="822960" y="3246120"/>
+            <a:ext cx="8961120" cy="1463040"/>
+          </a:xfrm>
+          <a:prstGeom prst="rect">
+            <a:avLst/>
+          </a:prstGeom>
+          <a:noFill/>
+        </p:spPr>
+        <p:txBody>
+          <a:bodyPr wrap="square" anchor="t" lIns="0" rIns="0" tIns="0" bIns="0">
+            <a:spAutoFit/>
+          </a:bodyPr>
+          <a:lstStyle/>
+          <a:p>
+            <a:pPr algn="l">
+              <a:lnSpc>
+                <a:spcPct val="140000"/>
+              </a:lnSpc>
+            </a:pPr>
+            <a:r>
+              <a:rPr sz="1650" b="0" i="0">
+                <a:solidFill>
+                  <a:srgbClr val="D8D3E8"/>
+                </a:solidFill>
+                <a:latin typeface="Calibri"/>
+              </a:rPr>
+              <a:t>Most newcomers memorize buzzwords or copy-paste Solidity templates they can't explain. This course is built differently: understand EVM execution, state transitions, and security trade-offs — before you ever touch a framework.</a:t>
+            </a:r>
+          </a:p>
+        </p:txBody>
+      </p:sp>
+      <p:sp>
+        <p:nvSpPr>
+          <p:cNvPr id="6" name="Rounded Rectangle 5"/>
           <p:cNvSpPr/>
           <p:nvPr/>
         </p:nvSpPr>
         <p:spPr>
           <a:xfrm>
-            <a:off x="0" y="0"/>
-            <a:ext cx="12191695" cy="6858000"/>
-          </a:xfrm>
-          <a:prstGeom prst="rect">
-            <a:avLst/>
+            <a:off x="822960" y="4892040"/>
+            <a:ext cx="822960" cy="384048"/>
+          </a:xfrm>
+          <a:prstGeom prst="roundRect">
+            <a:avLst>
+              <a:gd name="adj" fmla="val 50000"/>
+            </a:avLst>
           </a:prstGeom>
           <a:solidFill>
-            <a:srgbClr val="1C1730">
-              <a:alpha val="45000"/>
-            </a:srgbClr>
+            <a:srgbClr val="FFF9EB"/>
           </a:solidFill>
-          <a:ln>
-            <a:noFill/>
+          <a:ln w="12700">
+            <a:solidFill>
+              <a:srgbClr val="FFC53D"/>
+            </a:solidFill>
           </a:ln>
           <a:effectLst/>
         </p:spPr>
@@ -3209,34 +3323,45 @@
           </a:fontRef>
         </p:style>
         <p:txBody>
-          <a:bodyPr rtlCol="0" anchor="ctr"/>
+          <a:bodyPr rtlCol="0" anchor="ctr" lIns="109728" rIns="109728" tIns="18288" bIns="18288" wrap="none"/>
           <a:lstStyle/>
           <a:p>
             <a:pPr algn="ctr"/>
-          </a:p>
-        </p:txBody>
-      </p:sp>
-      <p:sp>
-        <p:nvSpPr>
-          <p:cNvPr id="5" name="Rectangle 4"/>
+            <a:r>
+              <a:rPr sz="1200" b="1">
+                <a:solidFill>
+                  <a:srgbClr val="FFC53D"/>
+                </a:solidFill>
+                <a:latin typeface="Calibri"/>
+              </a:rPr>
+              <a:t>2 Halves</a:t>
+            </a:r>
+          </a:p>
+        </p:txBody>
+      </p:sp>
+      <p:sp>
+        <p:nvSpPr>
+          <p:cNvPr id="7" name="Rounded Rectangle 6"/>
           <p:cNvSpPr/>
           <p:nvPr/>
         </p:nvSpPr>
         <p:spPr>
           <a:xfrm>
-            <a:off x="0" y="0"/>
-            <a:ext cx="12191695" cy="6858000"/>
-          </a:xfrm>
-          <a:prstGeom prst="rect">
-            <a:avLst/>
+            <a:off x="1783080" y="4892040"/>
+            <a:ext cx="745236" cy="384048"/>
+          </a:xfrm>
+          <a:prstGeom prst="roundRect">
+            <a:avLst>
+              <a:gd name="adj" fmla="val 50000"/>
+            </a:avLst>
           </a:prstGeom>
           <a:solidFill>
-            <a:srgbClr val="C67A1E">
-              <a:alpha val="35000"/>
-            </a:srgbClr>
+            <a:srgbClr val="FFF9EB"/>
           </a:solidFill>
-          <a:ln>
-            <a:noFill/>
+          <a:ln w="12700">
+            <a:solidFill>
+              <a:srgbClr val="FFC53D"/>
+            </a:solidFill>
           </a:ln>
           <a:effectLst/>
         </p:spPr>
@@ -3255,179 +3380,32 @@
           </a:fontRef>
         </p:style>
         <p:txBody>
-          <a:bodyPr rtlCol="0" anchor="ctr"/>
+          <a:bodyPr rtlCol="0" anchor="ctr" lIns="109728" rIns="109728" tIns="18288" bIns="18288" wrap="none"/>
           <a:lstStyle/>
           <a:p>
             <a:pPr algn="ctr"/>
-          </a:p>
-        </p:txBody>
-      </p:sp>
-      <p:sp>
-        <p:nvSpPr>
-          <p:cNvPr id="6" name="TextBox 5"/>
-          <p:cNvSpPr txBox="1"/>
-          <p:nvPr/>
-        </p:nvSpPr>
-        <p:spPr>
-          <a:xfrm>
-            <a:off x="822960" y="502920"/>
-            <a:ext cx="9144000" cy="365760"/>
-          </a:xfrm>
-          <a:prstGeom prst="rect">
-            <a:avLst/>
-          </a:prstGeom>
-          <a:noFill/>
-        </p:spPr>
-        <p:txBody>
-          <a:bodyPr wrap="square" anchor="t" lIns="0" rIns="0" tIns="0" bIns="0">
-            <a:spAutoFit/>
-          </a:bodyPr>
-          <a:lstStyle/>
-          <a:p>
-            <a:pPr algn="l">
-              <a:lnSpc>
-                <a:spcPct val="115000"/>
-              </a:lnSpc>
-            </a:pPr>
-            <a:r>
-              <a:rPr sz="1300" b="1" i="0">
+            <a:r>
+              <a:rPr sz="1200" b="1">
                 <a:solidFill>
                   <a:srgbClr val="FFC53D"/>
                 </a:solidFill>
                 <a:latin typeface="Calibri"/>
               </a:rPr>
-              <a:t>BlockchainCourse · Curriculum · Week 01 · Topic 02 of 04</a:t>
-            </a:r>
-          </a:p>
-        </p:txBody>
-      </p:sp>
-      <p:sp>
-        <p:nvSpPr>
-          <p:cNvPr id="7" name="TextBox 6"/>
-          <p:cNvSpPr txBox="1"/>
-          <p:nvPr/>
-        </p:nvSpPr>
-        <p:spPr>
-          <a:xfrm>
-            <a:off x="822960" y="1188720"/>
-            <a:ext cx="5486400" cy="1188720"/>
-          </a:xfrm>
-          <a:prstGeom prst="rect">
-            <a:avLst/>
-          </a:prstGeom>
-          <a:noFill/>
-        </p:spPr>
-        <p:txBody>
-          <a:bodyPr wrap="square" anchor="t" lIns="0" rIns="0" tIns="0" bIns="0">
-            <a:spAutoFit/>
-          </a:bodyPr>
-          <a:lstStyle/>
-          <a:p>
-            <a:pPr algn="l">
-              <a:lnSpc>
-                <a:spcPct val="115000"/>
-              </a:lnSpc>
-            </a:pPr>
-            <a:r>
-              <a:rPr sz="10000" b="1" i="0">
-                <a:solidFill>
-                  <a:srgbClr val="FFFFFF"/>
-                </a:solidFill>
-                <a:latin typeface="Century Gothic"/>
-              </a:rPr>
-              <a:t>02</a:t>
-            </a:r>
-          </a:p>
-        </p:txBody>
-      </p:sp>
-      <p:sp>
-        <p:nvSpPr>
-          <p:cNvPr id="8" name="TextBox 7"/>
-          <p:cNvSpPr txBox="1"/>
-          <p:nvPr/>
-        </p:nvSpPr>
-        <p:spPr>
-          <a:xfrm>
-            <a:off x="822960" y="2423160"/>
-            <a:ext cx="8961120" cy="1554480"/>
-          </a:xfrm>
-          <a:prstGeom prst="rect">
-            <a:avLst/>
-          </a:prstGeom>
-          <a:noFill/>
-        </p:spPr>
-        <p:txBody>
-          <a:bodyPr wrap="square" anchor="t" lIns="0" rIns="0" tIns="0" bIns="0">
-            <a:spAutoFit/>
-          </a:bodyPr>
-          <a:lstStyle/>
-          <a:p>
-            <a:pPr algn="l">
-              <a:lnSpc>
-                <a:spcPct val="105000"/>
-              </a:lnSpc>
-            </a:pPr>
-            <a:r>
-              <a:rPr sz="4600" b="1" i="0">
-                <a:solidFill>
-                  <a:srgbClr val="FFFFFF"/>
-                </a:solidFill>
-                <a:latin typeface="Century Gothic"/>
-              </a:rPr>
-              <a:t>Public / Private Keys</a:t>
-            </a:r>
-          </a:p>
-        </p:txBody>
-      </p:sp>
-      <p:sp>
-        <p:nvSpPr>
-          <p:cNvPr id="9" name="TextBox 8"/>
-          <p:cNvSpPr txBox="1"/>
-          <p:nvPr/>
-        </p:nvSpPr>
-        <p:spPr>
-          <a:xfrm>
-            <a:off x="822960" y="4160520"/>
-            <a:ext cx="6858000" cy="1097280"/>
-          </a:xfrm>
-          <a:prstGeom prst="rect">
-            <a:avLst/>
-          </a:prstGeom>
-          <a:noFill/>
-        </p:spPr>
-        <p:txBody>
-          <a:bodyPr wrap="square" anchor="t" lIns="0" rIns="0" tIns="0" bIns="0">
-            <a:spAutoFit/>
-          </a:bodyPr>
-          <a:lstStyle/>
-          <a:p>
-            <a:pPr algn="l">
-              <a:lnSpc>
-                <a:spcPct val="125000"/>
-              </a:lnSpc>
-            </a:pPr>
-            <a:r>
-              <a:rPr sz="1900" b="0" i="0">
-                <a:solidFill>
-                  <a:srgbClr val="FFFFFF"/>
-                </a:solidFill>
-                <a:latin typeface="Calibri"/>
-              </a:rPr>
-              <a:t>Prove ownership without ever revealing the secret that proves it.</a:t>
-            </a:r>
-          </a:p>
-        </p:txBody>
-      </p:sp>
-      <p:sp>
-        <p:nvSpPr>
-          <p:cNvPr id="10" name="Rounded Rectangle 9"/>
+              <a:t>8 Weeks</a:t>
+            </a:r>
+          </a:p>
+        </p:txBody>
+      </p:sp>
+      <p:sp>
+        <p:nvSpPr>
+          <p:cNvPr id="8" name="Rounded Rectangle 7"/>
           <p:cNvSpPr/>
           <p:nvPr/>
         </p:nvSpPr>
         <p:spPr>
           <a:xfrm>
-            <a:off x="822960" y="5669280"/>
-            <a:ext cx="1100937" cy="402336"/>
+            <a:off x="2665476" y="4892040"/>
+            <a:ext cx="2144268" cy="384048"/>
           </a:xfrm>
           <a:prstGeom prst="roundRect">
             <a:avLst>
@@ -3435,13 +3413,11 @@
             </a:avLst>
           </a:prstGeom>
           <a:solidFill>
-            <a:srgbClr val="FFFFFF">
-              <a:alpha val="14000"/>
-            </a:srgbClr>
+            <a:srgbClr val="FFF9EB"/>
           </a:solidFill>
-          <a:ln w="9525">
+          <a:ln w="12700">
             <a:solidFill>
-              <a:srgbClr val="FFFFFF"/>
+              <a:srgbClr val="FFC53D"/>
             </a:solidFill>
           </a:ln>
           <a:effectLst/>
@@ -3466,27 +3442,27 @@
           <a:p>
             <a:pPr algn="ctr"/>
             <a:r>
-              <a:rPr sz="1100" b="0">
-                <a:solidFill>
-                  <a:srgbClr val="DDD9E8"/>
+              <a:rPr sz="1200" b="1">
+                <a:solidFill>
+                  <a:srgbClr val="FFC53D"/>
                 </a:solidFill>
                 <a:latin typeface="Calibri"/>
               </a:rPr>
-              <a:t>01 · Hashing</a:t>
-            </a:r>
-          </a:p>
-        </p:txBody>
-      </p:sp>
-      <p:sp>
-        <p:nvSpPr>
-          <p:cNvPr id="11" name="Rounded Rectangle 10"/>
+              <a:t>Hackathon-Ready by Week 4</a:t>
+            </a:r>
+          </a:p>
+        </p:txBody>
+      </p:sp>
+      <p:sp>
+        <p:nvSpPr>
+          <p:cNvPr id="9" name="Rounded Rectangle 8"/>
           <p:cNvSpPr/>
           <p:nvPr/>
         </p:nvSpPr>
         <p:spPr>
           <a:xfrm>
-            <a:off x="2070201" y="5669280"/>
-            <a:ext cx="2022652" cy="402336"/>
+            <a:off x="4946904" y="4892040"/>
+            <a:ext cx="1988820" cy="384048"/>
           </a:xfrm>
           <a:prstGeom prst="roundRect">
             <a:avLst>
@@ -3494,10 +3470,12 @@
             </a:avLst>
           </a:prstGeom>
           <a:solidFill>
-            <a:srgbClr val="C67A1E"/>
+            <a:srgbClr val="FFF9EB"/>
           </a:solidFill>
-          <a:ln>
-            <a:noFill/>
+          <a:ln w="12700">
+            <a:solidFill>
+              <a:srgbClr val="FFC53D"/>
+            </a:solidFill>
           </a:ln>
           <a:effectLst/>
         </p:spPr>
@@ -3521,177 +3499,20 @@
           <a:p>
             <a:pPr algn="ctr"/>
             <a:r>
-              <a:rPr sz="1100" b="1">
-                <a:solidFill>
-                  <a:srgbClr val="FFFFFF"/>
+              <a:rPr sz="1200" b="1">
+                <a:solidFill>
+                  <a:srgbClr val="FFC53D"/>
                 </a:solidFill>
                 <a:latin typeface="Calibri"/>
               </a:rPr>
-              <a:t>02 · Public / Private Keys</a:t>
-            </a:r>
-          </a:p>
-        </p:txBody>
-      </p:sp>
-      <p:sp>
-        <p:nvSpPr>
-          <p:cNvPr id="12" name="Rounded Rectangle 11"/>
-          <p:cNvSpPr/>
-          <p:nvPr/>
-        </p:nvSpPr>
-        <p:spPr>
-          <a:xfrm>
-            <a:off x="4239157" y="5669280"/>
-            <a:ext cx="1627632" cy="402336"/>
-          </a:xfrm>
-          <a:prstGeom prst="roundRect">
-            <a:avLst>
-              <a:gd name="adj" fmla="val 50000"/>
-            </a:avLst>
-          </a:prstGeom>
-          <a:solidFill>
-            <a:srgbClr val="FFFFFF">
-              <a:alpha val="14000"/>
-            </a:srgbClr>
-          </a:solidFill>
-          <a:ln w="9525">
-            <a:solidFill>
-              <a:srgbClr val="FFFFFF"/>
-            </a:solidFill>
-          </a:ln>
-          <a:effectLst/>
-        </p:spPr>
-        <p:style>
-          <a:lnRef idx="1">
-            <a:schemeClr val="accent1"/>
-          </a:lnRef>
-          <a:fillRef idx="3">
-            <a:schemeClr val="accent1"/>
-          </a:fillRef>
-          <a:effectRef idx="2">
-            <a:schemeClr val="accent1"/>
-          </a:effectRef>
-          <a:fontRef idx="minor">
-            <a:schemeClr val="lt1"/>
-          </a:fontRef>
-        </p:style>
-        <p:txBody>
-          <a:bodyPr rtlCol="0" anchor="ctr" lIns="109728" rIns="109728" tIns="18288" bIns="18288" wrap="none"/>
-          <a:lstStyle/>
-          <a:p>
-            <a:pPr algn="ctr"/>
-            <a:r>
-              <a:rPr sz="1100" b="0">
-                <a:solidFill>
-                  <a:srgbClr val="DDD9E8"/>
-                </a:solidFill>
-                <a:latin typeface="Calibri"/>
-              </a:rPr>
-              <a:t>03 · Blocks &amp; Chains</a:t>
-            </a:r>
-          </a:p>
-        </p:txBody>
-      </p:sp>
-      <p:sp>
-        <p:nvSpPr>
-          <p:cNvPr id="13" name="Rounded Rectangle 12"/>
-          <p:cNvSpPr/>
-          <p:nvPr/>
-        </p:nvSpPr>
-        <p:spPr>
-          <a:xfrm>
-            <a:off x="6013093" y="5669280"/>
-            <a:ext cx="1232611" cy="402336"/>
-          </a:xfrm>
-          <a:prstGeom prst="roundRect">
-            <a:avLst>
-              <a:gd name="adj" fmla="val 50000"/>
-            </a:avLst>
-          </a:prstGeom>
-          <a:solidFill>
-            <a:srgbClr val="FFFFFF">
-              <a:alpha val="14000"/>
-            </a:srgbClr>
-          </a:solidFill>
-          <a:ln w="9525">
-            <a:solidFill>
-              <a:srgbClr val="FFFFFF"/>
-            </a:solidFill>
-          </a:ln>
-          <a:effectLst/>
-        </p:spPr>
-        <p:style>
-          <a:lnRef idx="1">
-            <a:schemeClr val="accent1"/>
-          </a:lnRef>
-          <a:fillRef idx="3">
-            <a:schemeClr val="accent1"/>
-          </a:fillRef>
-          <a:effectRef idx="2">
-            <a:schemeClr val="accent1"/>
-          </a:effectRef>
-          <a:fontRef idx="minor">
-            <a:schemeClr val="lt1"/>
-          </a:fontRef>
-        </p:style>
-        <p:txBody>
-          <a:bodyPr rtlCol="0" anchor="ctr" lIns="109728" rIns="109728" tIns="18288" bIns="18288" wrap="none"/>
-          <a:lstStyle/>
-          <a:p>
-            <a:pPr algn="ctr"/>
-            <a:r>
-              <a:rPr sz="1100" b="0">
-                <a:solidFill>
-                  <a:srgbClr val="DDD9E8"/>
-                </a:solidFill>
-                <a:latin typeface="Calibri"/>
-              </a:rPr>
-              <a:t>04 · Consensus</a:t>
-            </a:r>
-          </a:p>
-        </p:txBody>
-      </p:sp>
-      <p:sp>
-        <p:nvSpPr>
-          <p:cNvPr id="14" name="TextBox 13"/>
-          <p:cNvSpPr txBox="1"/>
-          <p:nvPr/>
-        </p:nvSpPr>
-        <p:spPr>
-          <a:xfrm>
-            <a:off x="822960" y="6446520"/>
-            <a:ext cx="8229600" cy="320040"/>
-          </a:xfrm>
-          <a:prstGeom prst="rect">
-            <a:avLst/>
-          </a:prstGeom>
-          <a:noFill/>
-        </p:spPr>
-        <p:txBody>
-          <a:bodyPr wrap="square" anchor="t" lIns="0" rIns="0" tIns="0" bIns="0">
-            <a:spAutoFit/>
-          </a:bodyPr>
-          <a:lstStyle/>
-          <a:p>
-            <a:pPr algn="l">
-              <a:lnSpc>
-                <a:spcPct val="115000"/>
-              </a:lnSpc>
-            </a:pPr>
-            <a:r>
-              <a:rPr sz="1000" b="0" i="0">
-                <a:solidFill>
-                  <a:srgbClr val="E9E6F2"/>
-                </a:solidFill>
-                <a:latin typeface="Calibri"/>
-              </a:rPr>
-              <a:t>Photo: Shillings1005 / Wikimedia Commons, CC BY-SA 4.0</a:t>
-            </a:r>
-          </a:p>
-        </p:txBody>
-      </p:sp>
-      <p:sp>
-        <p:nvSpPr>
-          <p:cNvPr id="15" name="TextBox 14"/>
+              <a:t>Understand How It Works</a:t>
+            </a:r>
+          </a:p>
+        </p:txBody>
+      </p:sp>
+      <p:sp>
+        <p:nvSpPr>
+          <p:cNvPr id="10" name="TextBox 9"/>
           <p:cNvSpPr txBox="1"/>
           <p:nvPr/>
         </p:nvSpPr>
@@ -3723,7 +3544,7 @@
                 </a:solidFill>
                 <a:latin typeface="Consolas"/>
               </a:rPr>
-              <a:t>01 / 15</a:t>
+              <a:t>01 / 18</a:t>
             </a:r>
           </a:p>
         </p:txBody>
@@ -3824,7 +3645,7 @@
                 </a:solidFill>
                 <a:latin typeface="Calibri"/>
               </a:rPr>
-              <a:t>REAL-WORLD USES</a:t>
+              <a:t>TOPIC 02 — PUBLIC / PRIVATE KEYS</a:t>
             </a:r>
           </a:p>
         </p:txBody>
@@ -3837,7 +3658,46 @@
         </p:nvSpPr>
         <p:spPr>
           <a:xfrm>
-            <a:off x="822960" y="1051560"/>
+            <a:off x="8503920" y="640080"/>
+            <a:ext cx="2834640" cy="365760"/>
+          </a:xfrm>
+          <a:prstGeom prst="rect">
+            <a:avLst/>
+          </a:prstGeom>
+          <a:noFill/>
+        </p:spPr>
+        <p:txBody>
+          <a:bodyPr wrap="square" anchor="t" lIns="0" rIns="0" tIns="0" bIns="0">
+            <a:spAutoFit/>
+          </a:bodyPr>
+          <a:lstStyle/>
+          <a:p>
+            <a:pPr algn="r">
+              <a:lnSpc>
+                <a:spcPct val="115000"/>
+              </a:lnSpc>
+            </a:pPr>
+            <a:r>
+              <a:rPr sz="1200" b="1" i="0">
+                <a:solidFill>
+                  <a:srgbClr val="5C576E"/>
+                </a:solidFill>
+                <a:latin typeface="Calibri"/>
+              </a:rPr>
+              <a:t>KEY IDEA 4 / 4</a:t>
+            </a:r>
+          </a:p>
+        </p:txBody>
+      </p:sp>
+      <p:sp>
+        <p:nvSpPr>
+          <p:cNvPr id="5" name="TextBox 4"/>
+          <p:cNvSpPr txBox="1"/>
+          <p:nvPr/>
+        </p:nvSpPr>
+        <p:spPr>
+          <a:xfrm>
+            <a:off x="822960" y="1097280"/>
             <a:ext cx="9601200" cy="1005840"/>
           </a:xfrm>
           <a:prstGeom prst="rect">
@@ -3863,34 +3723,71 @@
                 </a:solidFill>
                 <a:latin typeface="Century Gothic"/>
               </a:rPr>
-              <a:t>Not Just Blockchain</a:t>
-            </a:r>
-          </a:p>
-        </p:txBody>
-      </p:sp>
-      <p:sp>
-        <p:nvSpPr>
-          <p:cNvPr id="5" name="Rounded Rectangle 4"/>
+              <a:t>Address</a:t>
+            </a:r>
+          </a:p>
+        </p:txBody>
+      </p:sp>
+      <p:sp>
+        <p:nvSpPr>
+          <p:cNvPr id="6" name="TextBox 5"/>
+          <p:cNvSpPr txBox="1"/>
+          <p:nvPr/>
+        </p:nvSpPr>
+        <p:spPr>
+          <a:xfrm>
+            <a:off x="822960" y="2148840"/>
+            <a:ext cx="9875520" cy="2011680"/>
+          </a:xfrm>
+          <a:prstGeom prst="rect">
+            <a:avLst/>
+          </a:prstGeom>
+          <a:noFill/>
+        </p:spPr>
+        <p:txBody>
+          <a:bodyPr wrap="square" anchor="t" lIns="0" rIns="0" tIns="0" bIns="0">
+            <a:spAutoFit/>
+          </a:bodyPr>
+          <a:lstStyle/>
+          <a:p>
+            <a:pPr algn="l">
+              <a:lnSpc>
+                <a:spcPct val="150000"/>
+              </a:lnSpc>
+            </a:pPr>
+            <a:r>
+              <a:rPr sz="1650" b="0" i="0">
+                <a:solidFill>
+                  <a:srgbClr val="1C1730"/>
+                </a:solidFill>
+                <a:latin typeface="Calibri"/>
+              </a:rPr>
+              <a:t>Your wallet address is a hash of your public key — one more one-way step, layered on top, for extra safety margin. This directly connects back to Topic 01: your address is literally a hash.</a:t>
+            </a:r>
+          </a:p>
+        </p:txBody>
+      </p:sp>
+      <p:sp>
+        <p:nvSpPr>
+          <p:cNvPr id="7" name="Rounded Rectangle 6"/>
           <p:cNvSpPr/>
           <p:nvPr/>
         </p:nvSpPr>
         <p:spPr>
           <a:xfrm>
-            <a:off x="822960" y="2011680"/>
-            <a:ext cx="3322320" cy="1508760"/>
+            <a:off x="822960" y="4434840"/>
+            <a:ext cx="10515600" cy="1280160"/>
           </a:xfrm>
           <a:prstGeom prst="roundRect">
             <a:avLst>
-              <a:gd name="adj" fmla="val 9000"/>
+              <a:gd name="adj" fmla="val 6000"/>
             </a:avLst>
           </a:prstGeom>
           <a:solidFill>
-            <a:srgbClr val="FFFFFF"/>
+            <a:srgbClr val="F9F1E8"/>
           </a:solidFill>
-          <a:ln w="12700">
-            <a:solidFill>
-              <a:srgbClr val="DED9EA"/>
-            </a:solidFill>
+          <a:ln>
+            <a:noFill/>
           </a:ln>
           <a:effectLst/>
         </p:spPr>
@@ -3918,14 +3815,14 @@
       </p:sp>
       <p:sp>
         <p:nvSpPr>
-          <p:cNvPr id="6" name="TextBox 5"/>
-          <p:cNvSpPr txBox="1"/>
-          <p:nvPr/>
-        </p:nvSpPr>
-        <p:spPr>
-          <a:xfrm>
-            <a:off x="1078992" y="2267712"/>
-            <a:ext cx="2810256" cy="457200"/>
+          <p:cNvPr id="8" name="TextBox 7"/>
+          <p:cNvSpPr txBox="1"/>
+          <p:nvPr/>
+        </p:nvSpPr>
+        <p:spPr>
+          <a:xfrm>
+            <a:off x="1143000" y="4617720"/>
+            <a:ext cx="9875520" cy="320040"/>
           </a:xfrm>
           <a:prstGeom prst="rect">
             <a:avLst/>
@@ -3944,27 +3841,27 @@
               </a:lnSpc>
             </a:pPr>
             <a:r>
-              <a:rPr sz="1450" b="1" i="0">
+              <a:rPr sz="1100" b="1" i="0">
                 <a:solidFill>
                   <a:srgbClr val="C67A1E"/>
                 </a:solidFill>
-                <a:latin typeface="Century Gothic"/>
-              </a:rPr>
-              <a:t>HTTPS / TLS</a:t>
-            </a:r>
-          </a:p>
-        </p:txBody>
-      </p:sp>
-      <p:sp>
-        <p:nvSpPr>
-          <p:cNvPr id="7" name="TextBox 6"/>
-          <p:cNvSpPr txBox="1"/>
-          <p:nvPr/>
-        </p:nvSpPr>
-        <p:spPr>
-          <a:xfrm>
-            <a:off x="1078992" y="2724912"/>
-            <a:ext cx="2810256" cy="658368"/>
+                <a:latin typeface="Calibri"/>
+              </a:rPr>
+              <a:t>EXAMPLE</a:t>
+            </a:r>
+          </a:p>
+        </p:txBody>
+      </p:sp>
+      <p:sp>
+        <p:nvSpPr>
+          <p:cNvPr id="9" name="TextBox 8"/>
+          <p:cNvSpPr txBox="1"/>
+          <p:nvPr/>
+        </p:nvSpPr>
+        <p:spPr>
+          <a:xfrm>
+            <a:off x="1143000" y="4956048"/>
+            <a:ext cx="9875520" cy="640080"/>
           </a:xfrm>
           <a:prstGeom prst="rect">
             <a:avLst/>
@@ -3979,104 +3876,17 @@
           <a:p>
             <a:pPr algn="l">
               <a:lnSpc>
-                <a:spcPct val="128000"/>
-              </a:lnSpc>
-            </a:pPr>
-            <a:r>
-              <a:rPr sz="1150" b="0" i="0">
+                <a:spcPct val="130000"/>
+              </a:lnSpc>
+            </a:pPr>
+            <a:r>
+              <a:rPr sz="1400" b="0" i="0">
                 <a:solidFill>
                   <a:srgbClr val="1C1730"/>
                 </a:solidFill>
-                <a:latin typeface="Calibri"/>
-              </a:rPr>
-              <a:t>The padlock in your browser — a server proving it owns its certificate's private key.</a:t>
-            </a:r>
-          </a:p>
-        </p:txBody>
-      </p:sp>
-      <p:sp>
-        <p:nvSpPr>
-          <p:cNvPr id="8" name="Rounded Rectangle 7"/>
-          <p:cNvSpPr/>
-          <p:nvPr/>
-        </p:nvSpPr>
-        <p:spPr>
-          <a:xfrm>
-            <a:off x="4419600" y="2011680"/>
-            <a:ext cx="3322320" cy="1508760"/>
-          </a:xfrm>
-          <a:prstGeom prst="roundRect">
-            <a:avLst>
-              <a:gd name="adj" fmla="val 9000"/>
-            </a:avLst>
-          </a:prstGeom>
-          <a:solidFill>
-            <a:srgbClr val="FFFFFF"/>
-          </a:solidFill>
-          <a:ln w="12700">
-            <a:solidFill>
-              <a:srgbClr val="DED9EA"/>
-            </a:solidFill>
-          </a:ln>
-          <a:effectLst/>
-        </p:spPr>
-        <p:style>
-          <a:lnRef idx="1">
-            <a:schemeClr val="accent1"/>
-          </a:lnRef>
-          <a:fillRef idx="3">
-            <a:schemeClr val="accent1"/>
-          </a:fillRef>
-          <a:effectRef idx="2">
-            <a:schemeClr val="accent1"/>
-          </a:effectRef>
-          <a:fontRef idx="minor">
-            <a:schemeClr val="lt1"/>
-          </a:fontRef>
-        </p:style>
-        <p:txBody>
-          <a:bodyPr rtlCol="0" anchor="ctr"/>
-          <a:lstStyle/>
-          <a:p>
-            <a:pPr algn="ctr"/>
-          </a:p>
-        </p:txBody>
-      </p:sp>
-      <p:sp>
-        <p:nvSpPr>
-          <p:cNvPr id="9" name="TextBox 8"/>
-          <p:cNvSpPr txBox="1"/>
-          <p:nvPr/>
-        </p:nvSpPr>
-        <p:spPr>
-          <a:xfrm>
-            <a:off x="4675632" y="2267712"/>
-            <a:ext cx="2810256" cy="457200"/>
-          </a:xfrm>
-          <a:prstGeom prst="rect">
-            <a:avLst/>
-          </a:prstGeom>
-          <a:noFill/>
-        </p:spPr>
-        <p:txBody>
-          <a:bodyPr wrap="square" anchor="t" lIns="0" rIns="0" tIns="0" bIns="0">
-            <a:spAutoFit/>
-          </a:bodyPr>
-          <a:lstStyle/>
-          <a:p>
-            <a:pPr algn="l">
-              <a:lnSpc>
-                <a:spcPct val="115000"/>
-              </a:lnSpc>
-            </a:pPr>
-            <a:r>
-              <a:rPr sz="1450" b="1" i="0">
-                <a:solidFill>
-                  <a:srgbClr val="C67A1E"/>
-                </a:solidFill>
-                <a:latin typeface="Century Gothic"/>
-              </a:rPr>
-              <a:t>SSH Keys</a:t>
+                <a:latin typeface="Consolas"/>
+              </a:rPr>
+              <a:t>Private key → Public key → hash() → Address (0x...)</a:t>
             </a:r>
           </a:p>
         </p:txBody>
@@ -4084,423 +3894,6 @@
       <p:sp>
         <p:nvSpPr>
           <p:cNvPr id="10" name="TextBox 9"/>
-          <p:cNvSpPr txBox="1"/>
-          <p:nvPr/>
-        </p:nvSpPr>
-        <p:spPr>
-          <a:xfrm>
-            <a:off x="4675632" y="2724912"/>
-            <a:ext cx="2810256" cy="658368"/>
-          </a:xfrm>
-          <a:prstGeom prst="rect">
-            <a:avLst/>
-          </a:prstGeom>
-          <a:noFill/>
-        </p:spPr>
-        <p:txBody>
-          <a:bodyPr wrap="square" anchor="t" lIns="0" rIns="0" tIns="0" bIns="0">
-            <a:spAutoFit/>
-          </a:bodyPr>
-          <a:lstStyle/>
-          <a:p>
-            <a:pPr algn="l">
-              <a:lnSpc>
-                <a:spcPct val="128000"/>
-              </a:lnSpc>
-            </a:pPr>
-            <a:r>
-              <a:rPr sz="1150" b="0" i="0">
-                <a:solidFill>
-                  <a:srgbClr val="1C1730"/>
-                </a:solidFill>
-                <a:latin typeface="Calibri"/>
-              </a:rPr>
-              <a:t>Logging into GitHub or a server without a password, using this exact mechanism.</a:t>
-            </a:r>
-          </a:p>
-        </p:txBody>
-      </p:sp>
-      <p:sp>
-        <p:nvSpPr>
-          <p:cNvPr id="11" name="Rounded Rectangle 10"/>
-          <p:cNvSpPr/>
-          <p:nvPr/>
-        </p:nvSpPr>
-        <p:spPr>
-          <a:xfrm>
-            <a:off x="8016240" y="2011680"/>
-            <a:ext cx="3322320" cy="1508760"/>
-          </a:xfrm>
-          <a:prstGeom prst="roundRect">
-            <a:avLst>
-              <a:gd name="adj" fmla="val 9000"/>
-            </a:avLst>
-          </a:prstGeom>
-          <a:solidFill>
-            <a:srgbClr val="FFFFFF"/>
-          </a:solidFill>
-          <a:ln w="12700">
-            <a:solidFill>
-              <a:srgbClr val="DED9EA"/>
-            </a:solidFill>
-          </a:ln>
-          <a:effectLst/>
-        </p:spPr>
-        <p:style>
-          <a:lnRef idx="1">
-            <a:schemeClr val="accent1"/>
-          </a:lnRef>
-          <a:fillRef idx="3">
-            <a:schemeClr val="accent1"/>
-          </a:fillRef>
-          <a:effectRef idx="2">
-            <a:schemeClr val="accent1"/>
-          </a:effectRef>
-          <a:fontRef idx="minor">
-            <a:schemeClr val="lt1"/>
-          </a:fontRef>
-        </p:style>
-        <p:txBody>
-          <a:bodyPr rtlCol="0" anchor="ctr"/>
-          <a:lstStyle/>
-          <a:p>
-            <a:pPr algn="ctr"/>
-          </a:p>
-        </p:txBody>
-      </p:sp>
-      <p:sp>
-        <p:nvSpPr>
-          <p:cNvPr id="12" name="TextBox 11"/>
-          <p:cNvSpPr txBox="1"/>
-          <p:nvPr/>
-        </p:nvSpPr>
-        <p:spPr>
-          <a:xfrm>
-            <a:off x="8272272" y="2267712"/>
-            <a:ext cx="2810256" cy="457200"/>
-          </a:xfrm>
-          <a:prstGeom prst="rect">
-            <a:avLst/>
-          </a:prstGeom>
-          <a:noFill/>
-        </p:spPr>
-        <p:txBody>
-          <a:bodyPr wrap="square" anchor="t" lIns="0" rIns="0" tIns="0" bIns="0">
-            <a:spAutoFit/>
-          </a:bodyPr>
-          <a:lstStyle/>
-          <a:p>
-            <a:pPr algn="l">
-              <a:lnSpc>
-                <a:spcPct val="115000"/>
-              </a:lnSpc>
-            </a:pPr>
-            <a:r>
-              <a:rPr sz="1450" b="1" i="0">
-                <a:solidFill>
-                  <a:srgbClr val="C67A1E"/>
-                </a:solidFill>
-                <a:latin typeface="Century Gothic"/>
-              </a:rPr>
-              <a:t>Code Signing</a:t>
-            </a:r>
-          </a:p>
-        </p:txBody>
-      </p:sp>
-      <p:sp>
-        <p:nvSpPr>
-          <p:cNvPr id="13" name="TextBox 12"/>
-          <p:cNvSpPr txBox="1"/>
-          <p:nvPr/>
-        </p:nvSpPr>
-        <p:spPr>
-          <a:xfrm>
-            <a:off x="8272272" y="2724912"/>
-            <a:ext cx="2810256" cy="658368"/>
-          </a:xfrm>
-          <a:prstGeom prst="rect">
-            <a:avLst/>
-          </a:prstGeom>
-          <a:noFill/>
-        </p:spPr>
-        <p:txBody>
-          <a:bodyPr wrap="square" anchor="t" lIns="0" rIns="0" tIns="0" bIns="0">
-            <a:spAutoFit/>
-          </a:bodyPr>
-          <a:lstStyle/>
-          <a:p>
-            <a:pPr algn="l">
-              <a:lnSpc>
-                <a:spcPct val="128000"/>
-              </a:lnSpc>
-            </a:pPr>
-            <a:r>
-              <a:rPr sz="1150" b="0" i="0">
-                <a:solidFill>
-                  <a:srgbClr val="1C1730"/>
-                </a:solidFill>
-                <a:latin typeface="Calibri"/>
-              </a:rPr>
-              <a:t>Your OS verifies an update genuinely came from Apple or Google, not an attacker.</a:t>
-            </a:r>
-          </a:p>
-        </p:txBody>
-      </p:sp>
-      <p:sp>
-        <p:nvSpPr>
-          <p:cNvPr id="14" name="Rounded Rectangle 13"/>
-          <p:cNvSpPr/>
-          <p:nvPr/>
-        </p:nvSpPr>
-        <p:spPr>
-          <a:xfrm>
-            <a:off x="822960" y="3749040"/>
-            <a:ext cx="3322320" cy="1508760"/>
-          </a:xfrm>
-          <a:prstGeom prst="roundRect">
-            <a:avLst>
-              <a:gd name="adj" fmla="val 9000"/>
-            </a:avLst>
-          </a:prstGeom>
-          <a:solidFill>
-            <a:srgbClr val="FFFFFF"/>
-          </a:solidFill>
-          <a:ln w="12700">
-            <a:solidFill>
-              <a:srgbClr val="DED9EA"/>
-            </a:solidFill>
-          </a:ln>
-          <a:effectLst/>
-        </p:spPr>
-        <p:style>
-          <a:lnRef idx="1">
-            <a:schemeClr val="accent1"/>
-          </a:lnRef>
-          <a:fillRef idx="3">
-            <a:schemeClr val="accent1"/>
-          </a:fillRef>
-          <a:effectRef idx="2">
-            <a:schemeClr val="accent1"/>
-          </a:effectRef>
-          <a:fontRef idx="minor">
-            <a:schemeClr val="lt1"/>
-          </a:fontRef>
-        </p:style>
-        <p:txBody>
-          <a:bodyPr rtlCol="0" anchor="ctr"/>
-          <a:lstStyle/>
-          <a:p>
-            <a:pPr algn="ctr"/>
-          </a:p>
-        </p:txBody>
-      </p:sp>
-      <p:sp>
-        <p:nvSpPr>
-          <p:cNvPr id="15" name="TextBox 14"/>
-          <p:cNvSpPr txBox="1"/>
-          <p:nvPr/>
-        </p:nvSpPr>
-        <p:spPr>
-          <a:xfrm>
-            <a:off x="1078992" y="4005072"/>
-            <a:ext cx="2810256" cy="457200"/>
-          </a:xfrm>
-          <a:prstGeom prst="rect">
-            <a:avLst/>
-          </a:prstGeom>
-          <a:noFill/>
-        </p:spPr>
-        <p:txBody>
-          <a:bodyPr wrap="square" anchor="t" lIns="0" rIns="0" tIns="0" bIns="0">
-            <a:spAutoFit/>
-          </a:bodyPr>
-          <a:lstStyle/>
-          <a:p>
-            <a:pPr algn="l">
-              <a:lnSpc>
-                <a:spcPct val="115000"/>
-              </a:lnSpc>
-            </a:pPr>
-            <a:r>
-              <a:rPr sz="1450" b="1" i="0">
-                <a:solidFill>
-                  <a:srgbClr val="C67A1E"/>
-                </a:solidFill>
-                <a:latin typeface="Century Gothic"/>
-              </a:rPr>
-              <a:t>Signed Git Commits</a:t>
-            </a:r>
-          </a:p>
-        </p:txBody>
-      </p:sp>
-      <p:sp>
-        <p:nvSpPr>
-          <p:cNvPr id="16" name="TextBox 15"/>
-          <p:cNvSpPr txBox="1"/>
-          <p:nvPr/>
-        </p:nvSpPr>
-        <p:spPr>
-          <a:xfrm>
-            <a:off x="1078992" y="4462272"/>
-            <a:ext cx="2810256" cy="658368"/>
-          </a:xfrm>
-          <a:prstGeom prst="rect">
-            <a:avLst/>
-          </a:prstGeom>
-          <a:noFill/>
-        </p:spPr>
-        <p:txBody>
-          <a:bodyPr wrap="square" anchor="t" lIns="0" rIns="0" tIns="0" bIns="0">
-            <a:spAutoFit/>
-          </a:bodyPr>
-          <a:lstStyle/>
-          <a:p>
-            <a:pPr algn="l">
-              <a:lnSpc>
-                <a:spcPct val="128000"/>
-              </a:lnSpc>
-            </a:pPr>
-            <a:r>
-              <a:rPr sz="1150" b="0" i="0">
-                <a:solidFill>
-                  <a:srgbClr val="1C1730"/>
-                </a:solidFill>
-                <a:latin typeface="Calibri"/>
-              </a:rPr>
-              <a:t>git commit -S — proving a commit really came from you.</a:t>
-            </a:r>
-          </a:p>
-        </p:txBody>
-      </p:sp>
-      <p:sp>
-        <p:nvSpPr>
-          <p:cNvPr id="17" name="Rounded Rectangle 16"/>
-          <p:cNvSpPr/>
-          <p:nvPr/>
-        </p:nvSpPr>
-        <p:spPr>
-          <a:xfrm>
-            <a:off x="4419600" y="3749040"/>
-            <a:ext cx="3322320" cy="1508760"/>
-          </a:xfrm>
-          <a:prstGeom prst="roundRect">
-            <a:avLst>
-              <a:gd name="adj" fmla="val 9000"/>
-            </a:avLst>
-          </a:prstGeom>
-          <a:solidFill>
-            <a:srgbClr val="FFFFFF"/>
-          </a:solidFill>
-          <a:ln w="12700">
-            <a:solidFill>
-              <a:srgbClr val="DED9EA"/>
-            </a:solidFill>
-          </a:ln>
-          <a:effectLst/>
-        </p:spPr>
-        <p:style>
-          <a:lnRef idx="1">
-            <a:schemeClr val="accent1"/>
-          </a:lnRef>
-          <a:fillRef idx="3">
-            <a:schemeClr val="accent1"/>
-          </a:fillRef>
-          <a:effectRef idx="2">
-            <a:schemeClr val="accent1"/>
-          </a:effectRef>
-          <a:fontRef idx="minor">
-            <a:schemeClr val="lt1"/>
-          </a:fontRef>
-        </p:style>
-        <p:txBody>
-          <a:bodyPr rtlCol="0" anchor="ctr"/>
-          <a:lstStyle/>
-          <a:p>
-            <a:pPr algn="ctr"/>
-          </a:p>
-        </p:txBody>
-      </p:sp>
-      <p:sp>
-        <p:nvSpPr>
-          <p:cNvPr id="18" name="TextBox 17"/>
-          <p:cNvSpPr txBox="1"/>
-          <p:nvPr/>
-        </p:nvSpPr>
-        <p:spPr>
-          <a:xfrm>
-            <a:off x="4675632" y="4005072"/>
-            <a:ext cx="2810256" cy="457200"/>
-          </a:xfrm>
-          <a:prstGeom prst="rect">
-            <a:avLst/>
-          </a:prstGeom>
-          <a:noFill/>
-        </p:spPr>
-        <p:txBody>
-          <a:bodyPr wrap="square" anchor="t" lIns="0" rIns="0" tIns="0" bIns="0">
-            <a:spAutoFit/>
-          </a:bodyPr>
-          <a:lstStyle/>
-          <a:p>
-            <a:pPr algn="l">
-              <a:lnSpc>
-                <a:spcPct val="115000"/>
-              </a:lnSpc>
-            </a:pPr>
-            <a:r>
-              <a:rPr sz="1450" b="1" i="0">
-                <a:solidFill>
-                  <a:srgbClr val="C67A1E"/>
-                </a:solidFill>
-                <a:latin typeface="Century Gothic"/>
-              </a:rPr>
-              <a:t>PGP Email</a:t>
-            </a:r>
-          </a:p>
-        </p:txBody>
-      </p:sp>
-      <p:sp>
-        <p:nvSpPr>
-          <p:cNvPr id="19" name="TextBox 18"/>
-          <p:cNvSpPr txBox="1"/>
-          <p:nvPr/>
-        </p:nvSpPr>
-        <p:spPr>
-          <a:xfrm>
-            <a:off x="4675632" y="4462272"/>
-            <a:ext cx="2810256" cy="658368"/>
-          </a:xfrm>
-          <a:prstGeom prst="rect">
-            <a:avLst/>
-          </a:prstGeom>
-          <a:noFill/>
-        </p:spPr>
-        <p:txBody>
-          <a:bodyPr wrap="square" anchor="t" lIns="0" rIns="0" tIns="0" bIns="0">
-            <a:spAutoFit/>
-          </a:bodyPr>
-          <a:lstStyle/>
-          <a:p>
-            <a:pPr algn="l">
-              <a:lnSpc>
-                <a:spcPct val="128000"/>
-              </a:lnSpc>
-            </a:pPr>
-            <a:r>
-              <a:rPr sz="1150" b="0" i="0">
-                <a:solidFill>
-                  <a:srgbClr val="1C1730"/>
-                </a:solidFill>
-                <a:latin typeface="Calibri"/>
-              </a:rPr>
-              <a:t>Encrypting a message so only the intended recipient's private key can read it.</a:t>
-            </a:r>
-          </a:p>
-        </p:txBody>
-      </p:sp>
-      <p:sp>
-        <p:nvSpPr>
-          <p:cNvPr id="20" name="TextBox 19"/>
           <p:cNvSpPr txBox="1"/>
           <p:nvPr/>
         </p:nvSpPr>
@@ -4532,7 +3925,7 @@
                 </a:solidFill>
                 <a:latin typeface="Consolas"/>
               </a:rPr>
-              <a:t>10 / 15</a:t>
+              <a:t>10 / 18</a:t>
             </a:r>
           </a:p>
         </p:txBody>
@@ -4633,7 +4026,7 @@
                 </a:solidFill>
                 <a:latin typeface="Calibri"/>
               </a:rPr>
-              <a:t>FLAGSHIP CASE STUDY</a:t>
+              <a:t>WORKED EXAMPLE — PART 1</a:t>
             </a:r>
           </a:p>
         </p:txBody>
@@ -4646,7 +4039,7 @@
         </p:nvSpPr>
         <p:spPr>
           <a:xfrm>
-            <a:off x="822960" y="1097280"/>
+            <a:off x="822960" y="1051560"/>
             <a:ext cx="10332720" cy="1005840"/>
           </a:xfrm>
           <a:prstGeom prst="rect">
@@ -4666,13 +4059,13 @@
               </a:lnSpc>
             </a:pPr>
             <a:r>
-              <a:rPr sz="3000" b="1" i="0">
+              <a:rPr sz="2700" b="1" i="0">
                 <a:solidFill>
                   <a:srgbClr val="1C1730"/>
                 </a:solidFill>
                 <a:latin typeface="Century Gothic"/>
               </a:rPr>
-              <a:t>Encryption vs. Signing — A Distinction Worth Getting Right</a:t>
+              <a:t>A Real secp256k1 Keypair, Generated With openssl</a:t>
             </a:r>
           </a:p>
         </p:txBody>
@@ -4685,16 +4078,16 @@
         </p:nvSpPr>
         <p:spPr>
           <a:xfrm>
-            <a:off x="822960" y="2423160"/>
-            <a:ext cx="10515600" cy="3749039"/>
+            <a:off x="822960" y="1965960"/>
+            <a:ext cx="10515600" cy="3840480"/>
           </a:xfrm>
           <a:prstGeom prst="roundRect">
             <a:avLst>
-              <a:gd name="adj" fmla="val 4000"/>
+              <a:gd name="adj" fmla="val 4500"/>
             </a:avLst>
           </a:prstGeom>
           <a:solidFill>
-            <a:srgbClr val="C67A1E"/>
+            <a:srgbClr val="141026"/>
           </a:solidFill>
           <a:ln>
             <a:noFill/>
@@ -4725,14 +4118,146 @@
       </p:sp>
       <p:sp>
         <p:nvSpPr>
-          <p:cNvPr id="6" name="TextBox 5"/>
-          <p:cNvSpPr txBox="1"/>
-          <p:nvPr/>
-        </p:nvSpPr>
-        <p:spPr>
-          <a:xfrm>
-            <a:off x="1280160" y="2743200"/>
-            <a:ext cx="9601200" cy="3200400"/>
+          <p:cNvPr id="6" name="Oval 5"/>
+          <p:cNvSpPr/>
+          <p:nvPr/>
+        </p:nvSpPr>
+        <p:spPr>
+          <a:xfrm>
+            <a:off x="1024128" y="2130552"/>
+            <a:ext cx="109728" cy="109728"/>
+          </a:xfrm>
+          <a:prstGeom prst="ellipse">
+            <a:avLst/>
+          </a:prstGeom>
+          <a:solidFill>
+            <a:srgbClr val="FF6459"/>
+          </a:solidFill>
+          <a:ln>
+            <a:noFill/>
+          </a:ln>
+          <a:effectLst/>
+        </p:spPr>
+        <p:style>
+          <a:lnRef idx="1">
+            <a:schemeClr val="accent1"/>
+          </a:lnRef>
+          <a:fillRef idx="3">
+            <a:schemeClr val="accent1"/>
+          </a:fillRef>
+          <a:effectRef idx="2">
+            <a:schemeClr val="accent1"/>
+          </a:effectRef>
+          <a:fontRef idx="minor">
+            <a:schemeClr val="lt1"/>
+          </a:fontRef>
+        </p:style>
+        <p:txBody>
+          <a:bodyPr rtlCol="0" anchor="ctr"/>
+          <a:lstStyle/>
+          <a:p>
+            <a:pPr algn="ctr"/>
+          </a:p>
+        </p:txBody>
+      </p:sp>
+      <p:sp>
+        <p:nvSpPr>
+          <p:cNvPr id="7" name="Oval 6"/>
+          <p:cNvSpPr/>
+          <p:nvPr/>
+        </p:nvSpPr>
+        <p:spPr>
+          <a:xfrm>
+            <a:off x="1225296" y="2130552"/>
+            <a:ext cx="109728" cy="109728"/>
+          </a:xfrm>
+          <a:prstGeom prst="ellipse">
+            <a:avLst/>
+          </a:prstGeom>
+          <a:solidFill>
+            <a:srgbClr val="FFC02E"/>
+          </a:solidFill>
+          <a:ln>
+            <a:noFill/>
+          </a:ln>
+          <a:effectLst/>
+        </p:spPr>
+        <p:style>
+          <a:lnRef idx="1">
+            <a:schemeClr val="accent1"/>
+          </a:lnRef>
+          <a:fillRef idx="3">
+            <a:schemeClr val="accent1"/>
+          </a:fillRef>
+          <a:effectRef idx="2">
+            <a:schemeClr val="accent1"/>
+          </a:effectRef>
+          <a:fontRef idx="minor">
+            <a:schemeClr val="lt1"/>
+          </a:fontRef>
+        </p:style>
+        <p:txBody>
+          <a:bodyPr rtlCol="0" anchor="ctr"/>
+          <a:lstStyle/>
+          <a:p>
+            <a:pPr algn="ctr"/>
+          </a:p>
+        </p:txBody>
+      </p:sp>
+      <p:sp>
+        <p:nvSpPr>
+          <p:cNvPr id="8" name="Oval 7"/>
+          <p:cNvSpPr/>
+          <p:nvPr/>
+        </p:nvSpPr>
+        <p:spPr>
+          <a:xfrm>
+            <a:off x="1426464" y="2130552"/>
+            <a:ext cx="109728" cy="109728"/>
+          </a:xfrm>
+          <a:prstGeom prst="ellipse">
+            <a:avLst/>
+          </a:prstGeom>
+          <a:solidFill>
+            <a:srgbClr val="28C93F"/>
+          </a:solidFill>
+          <a:ln>
+            <a:noFill/>
+          </a:ln>
+          <a:effectLst/>
+        </p:spPr>
+        <p:style>
+          <a:lnRef idx="1">
+            <a:schemeClr val="accent1"/>
+          </a:lnRef>
+          <a:fillRef idx="3">
+            <a:schemeClr val="accent1"/>
+          </a:fillRef>
+          <a:effectRef idx="2">
+            <a:schemeClr val="accent1"/>
+          </a:effectRef>
+          <a:fontRef idx="minor">
+            <a:schemeClr val="lt1"/>
+          </a:fontRef>
+        </p:style>
+        <p:txBody>
+          <a:bodyPr rtlCol="0" anchor="ctr"/>
+          <a:lstStyle/>
+          <a:p>
+            <a:pPr algn="ctr"/>
+          </a:p>
+        </p:txBody>
+      </p:sp>
+      <p:sp>
+        <p:nvSpPr>
+          <p:cNvPr id="9" name="TextBox 8"/>
+          <p:cNvSpPr txBox="1"/>
+          <p:nvPr/>
+        </p:nvSpPr>
+        <p:spPr>
+          <a:xfrm>
+            <a:off x="1078992" y="2350008"/>
+            <a:ext cx="10003536" cy="3273552"/>
           </a:xfrm>
           <a:prstGeom prst="rect">
             <a:avLst/>
@@ -4747,24 +4272,193 @@
           <a:p>
             <a:pPr algn="l">
               <a:lnSpc>
-                <a:spcPct val="155000"/>
-              </a:lnSpc>
-            </a:pPr>
-            <a:r>
-              <a:rPr sz="1600" b="0" i="0">
-                <a:solidFill>
-                  <a:srgbClr val="FFFFFF"/>
+                <a:spcPct val="135000"/>
+              </a:lnSpc>
+            </a:pPr>
+            <a:r>
+              <a:rPr sz="1350" b="1">
+                <a:solidFill>
+                  <a:srgbClr val="9C93C9"/>
+                </a:solidFill>
+                <a:latin typeface="Consolas"/>
+              </a:rPr>
+              <a:t>$ </a:t>
+            </a:r>
+            <a:r>
+              <a:rPr sz="1350" b="0">
+                <a:solidFill>
+                  <a:srgbClr val="EDE9F7"/>
+                </a:solidFill>
+                <a:latin typeface="Consolas"/>
+              </a:rPr>
+              <a:t>openssl ecparam -name secp256k1 -genkey -noout -out priv.pem</a:t>
+            </a:r>
+          </a:p>
+          <a:p>
+            <a:pPr algn="l">
+              <a:lnSpc>
+                <a:spcPct val="135000"/>
+              </a:lnSpc>
+            </a:pPr>
+            <a:r>
+              <a:rPr sz="1350" b="1">
+                <a:solidFill>
+                  <a:srgbClr val="9C93C9"/>
+                </a:solidFill>
+                <a:latin typeface="Consolas"/>
+              </a:rPr>
+              <a:t>$ </a:t>
+            </a:r>
+            <a:r>
+              <a:rPr sz="1350" b="0">
+                <a:solidFill>
+                  <a:srgbClr val="EDE9F7"/>
+                </a:solidFill>
+                <a:latin typeface="Consolas"/>
+              </a:rPr>
+              <a:t>openssl ec -in priv.pem -pubout -out pub.pem</a:t>
+            </a:r>
+          </a:p>
+          <a:p>
+            <a:pPr algn="l">
+              <a:lnSpc>
+                <a:spcPct val="135000"/>
+              </a:lnSpc>
+            </a:pPr>
+            <a:r>
+              <a:rPr sz="1350" b="0">
+                <a:solidFill>
+                  <a:srgbClr val="EDE9F7"/>
+                </a:solidFill>
+                <a:latin typeface="Consolas"/>
+              </a:rPr>
+              <a:t/>
+            </a:r>
+          </a:p>
+          <a:p>
+            <a:pPr algn="l">
+              <a:lnSpc>
+                <a:spcPct val="135000"/>
+              </a:lnSpc>
+            </a:pPr>
+            <a:r>
+              <a:rPr sz="1350" b="0">
+                <a:solidFill>
+                  <a:srgbClr val="8B84AD"/>
+                </a:solidFill>
+                <a:latin typeface="Consolas"/>
+              </a:rPr>
+              <a:t># private key (excerpt):</a:t>
+            </a:r>
+          </a:p>
+          <a:p>
+            <a:pPr algn="l">
+              <a:lnSpc>
+                <a:spcPct val="135000"/>
+              </a:lnSpc>
+            </a:pPr>
+            <a:r>
+              <a:rPr sz="1350" b="0">
+                <a:solidFill>
+                  <a:srgbClr val="7FE0C4"/>
+                </a:solidFill>
+                <a:latin typeface="Consolas"/>
+              </a:rPr>
+              <a:t>MHQCAQEEIHoNT3gUJYe9tBv7ZZoRYRGGIGkvCFmX60mY...</a:t>
+            </a:r>
+          </a:p>
+          <a:p>
+            <a:pPr algn="l">
+              <a:lnSpc>
+                <a:spcPct val="135000"/>
+              </a:lnSpc>
+            </a:pPr>
+            <a:r>
+              <a:rPr sz="1350" b="0">
+                <a:solidFill>
+                  <a:srgbClr val="EDE9F7"/>
+                </a:solidFill>
+                <a:latin typeface="Consolas"/>
+              </a:rPr>
+              <a:t/>
+            </a:r>
+          </a:p>
+          <a:p>
+            <a:pPr algn="l">
+              <a:lnSpc>
+                <a:spcPct val="135000"/>
+              </a:lnSpc>
+            </a:pPr>
+            <a:r>
+              <a:rPr sz="1350" b="0">
+                <a:solidFill>
+                  <a:srgbClr val="8B84AD"/>
+                </a:solidFill>
+                <a:latin typeface="Consolas"/>
+              </a:rPr>
+              <a:t># public key, derived one-way (excerpt):</a:t>
+            </a:r>
+          </a:p>
+          <a:p>
+            <a:pPr algn="l">
+              <a:lnSpc>
+                <a:spcPct val="135000"/>
+              </a:lnSpc>
+            </a:pPr>
+            <a:r>
+              <a:rPr sz="1350" b="0">
+                <a:solidFill>
+                  <a:srgbClr val="7FE0C4"/>
+                </a:solidFill>
+                <a:latin typeface="Consolas"/>
+              </a:rPr>
+              <a:t>MFYwEAYHKoZIzj0CAQYFK4EEAAoDQgAEjO0NYj4xwIE6...</a:t>
+            </a:r>
+          </a:p>
+        </p:txBody>
+      </p:sp>
+      <p:sp>
+        <p:nvSpPr>
+          <p:cNvPr id="10" name="TextBox 9"/>
+          <p:cNvSpPr txBox="1"/>
+          <p:nvPr/>
+        </p:nvSpPr>
+        <p:spPr>
+          <a:xfrm>
+            <a:off x="822960" y="6446520"/>
+            <a:ext cx="10058400" cy="320040"/>
+          </a:xfrm>
+          <a:prstGeom prst="rect">
+            <a:avLst/>
+          </a:prstGeom>
+          <a:noFill/>
+        </p:spPr>
+        <p:txBody>
+          <a:bodyPr wrap="square" anchor="t" lIns="0" rIns="0" tIns="0" bIns="0">
+            <a:spAutoFit/>
+          </a:bodyPr>
+          <a:lstStyle/>
+          <a:p>
+            <a:pPr algn="l">
+              <a:lnSpc>
+                <a:spcPct val="115000"/>
+              </a:lnSpc>
+            </a:pPr>
+            <a:r>
+              <a:rPr sz="1050" b="0" i="0">
+                <a:solidFill>
+                  <a:srgbClr val="5C576E"/>
                 </a:solidFill>
                 <a:latin typeface="Calibri"/>
               </a:rPr>
-              <a:t>Two different jobs: encryption (public key locks, private key unlocks — for confidentiality) vs. signing (private key signs, public key verifies — for authenticity). Blockchain wallets use almost entirely signing. Your transaction is never secret — “send 0.1 ETH to X” is fully readable on a block explorer. What's proven is WHO authorized it, not WHAT it says.</a:t>
-            </a:r>
-          </a:p>
-        </p:txBody>
-      </p:sp>
-      <p:sp>
-        <p:nvSpPr>
-          <p:cNvPr id="7" name="TextBox 6"/>
+              <a:t>secp256k1 is the exact curve Ethereum and Bitcoin wallets actually use — not a simplified stand-in.</a:t>
+            </a:r>
+          </a:p>
+        </p:txBody>
+      </p:sp>
+      <p:sp>
+        <p:nvSpPr>
+          <p:cNvPr id="11" name="TextBox 10"/>
           <p:cNvSpPr txBox="1"/>
           <p:nvPr/>
         </p:nvSpPr>
@@ -4796,7 +4490,7 @@
                 </a:solidFill>
                 <a:latin typeface="Consolas"/>
               </a:rPr>
-              <a:t>11 / 15</a:t>
+              <a:t>11 / 18</a:t>
             </a:r>
           </a:p>
         </p:txBody>
@@ -4897,7 +4591,7 @@
                 </a:solidFill>
                 <a:latin typeface="Calibri"/>
               </a:rPr>
-              <a:t>REAL-LIFE ANALOGY</a:t>
+              <a:t>WORKED EXAMPLE — PART 2</a:t>
             </a:r>
           </a:p>
         </p:txBody>
@@ -4910,7 +4604,7 @@
         </p:nvSpPr>
         <p:spPr>
           <a:xfrm>
-            <a:off x="822960" y="1097280"/>
+            <a:off x="822960" y="1051560"/>
             <a:ext cx="10332720" cy="1005840"/>
           </a:xfrm>
           <a:prstGeom prst="rect">
@@ -4930,33 +4624,35 @@
               </a:lnSpc>
             </a:pPr>
             <a:r>
-              <a:rPr sz="3000" b="1" i="0">
+              <a:rPr sz="2700" b="1" i="0">
                 <a:solidFill>
                   <a:srgbClr val="1C1730"/>
                 </a:solidFill>
                 <a:latin typeface="Century Gothic"/>
               </a:rPr>
-              <a:t>A Signet Ring And A Reference Card</a:t>
-            </a:r>
-          </a:p>
-        </p:txBody>
-      </p:sp>
-      <p:sp>
-        <p:nvSpPr>
-          <p:cNvPr id="5" name="Rectangle 4"/>
+              <a:t>Sign A Message, Verify It, Then Tamper With It</a:t>
+            </a:r>
+          </a:p>
+        </p:txBody>
+      </p:sp>
+      <p:sp>
+        <p:nvSpPr>
+          <p:cNvPr id="5" name="Rounded Rectangle 4"/>
           <p:cNvSpPr/>
           <p:nvPr/>
         </p:nvSpPr>
         <p:spPr>
           <a:xfrm>
-            <a:off x="822960" y="2286000"/>
-            <a:ext cx="91440" cy="3657600"/>
-          </a:xfrm>
-          <a:prstGeom prst="rect">
-            <a:avLst/>
+            <a:off x="822960" y="1965960"/>
+            <a:ext cx="10515600" cy="3840480"/>
+          </a:xfrm>
+          <a:prstGeom prst="roundRect">
+            <a:avLst>
+              <a:gd name="adj" fmla="val 4500"/>
+            </a:avLst>
           </a:prstGeom>
           <a:solidFill>
-            <a:srgbClr val="C67A1E"/>
+            <a:srgbClr val="141026"/>
           </a:solidFill>
           <a:ln>
             <a:noFill/>
@@ -4987,14 +4683,146 @@
       </p:sp>
       <p:sp>
         <p:nvSpPr>
-          <p:cNvPr id="6" name="TextBox 5"/>
-          <p:cNvSpPr txBox="1"/>
-          <p:nvPr/>
-        </p:nvSpPr>
-        <p:spPr>
-          <a:xfrm>
-            <a:off x="1280160" y="2377440"/>
-            <a:ext cx="9784080" cy="3566160"/>
+          <p:cNvPr id="6" name="Oval 5"/>
+          <p:cNvSpPr/>
+          <p:nvPr/>
+        </p:nvSpPr>
+        <p:spPr>
+          <a:xfrm>
+            <a:off x="1024128" y="2130552"/>
+            <a:ext cx="109728" cy="109728"/>
+          </a:xfrm>
+          <a:prstGeom prst="ellipse">
+            <a:avLst/>
+          </a:prstGeom>
+          <a:solidFill>
+            <a:srgbClr val="FF6459"/>
+          </a:solidFill>
+          <a:ln>
+            <a:noFill/>
+          </a:ln>
+          <a:effectLst/>
+        </p:spPr>
+        <p:style>
+          <a:lnRef idx="1">
+            <a:schemeClr val="accent1"/>
+          </a:lnRef>
+          <a:fillRef idx="3">
+            <a:schemeClr val="accent1"/>
+          </a:fillRef>
+          <a:effectRef idx="2">
+            <a:schemeClr val="accent1"/>
+          </a:effectRef>
+          <a:fontRef idx="minor">
+            <a:schemeClr val="lt1"/>
+          </a:fontRef>
+        </p:style>
+        <p:txBody>
+          <a:bodyPr rtlCol="0" anchor="ctr"/>
+          <a:lstStyle/>
+          <a:p>
+            <a:pPr algn="ctr"/>
+          </a:p>
+        </p:txBody>
+      </p:sp>
+      <p:sp>
+        <p:nvSpPr>
+          <p:cNvPr id="7" name="Oval 6"/>
+          <p:cNvSpPr/>
+          <p:nvPr/>
+        </p:nvSpPr>
+        <p:spPr>
+          <a:xfrm>
+            <a:off x="1225296" y="2130552"/>
+            <a:ext cx="109728" cy="109728"/>
+          </a:xfrm>
+          <a:prstGeom prst="ellipse">
+            <a:avLst/>
+          </a:prstGeom>
+          <a:solidFill>
+            <a:srgbClr val="FFC02E"/>
+          </a:solidFill>
+          <a:ln>
+            <a:noFill/>
+          </a:ln>
+          <a:effectLst/>
+        </p:spPr>
+        <p:style>
+          <a:lnRef idx="1">
+            <a:schemeClr val="accent1"/>
+          </a:lnRef>
+          <a:fillRef idx="3">
+            <a:schemeClr val="accent1"/>
+          </a:fillRef>
+          <a:effectRef idx="2">
+            <a:schemeClr val="accent1"/>
+          </a:effectRef>
+          <a:fontRef idx="minor">
+            <a:schemeClr val="lt1"/>
+          </a:fontRef>
+        </p:style>
+        <p:txBody>
+          <a:bodyPr rtlCol="0" anchor="ctr"/>
+          <a:lstStyle/>
+          <a:p>
+            <a:pPr algn="ctr"/>
+          </a:p>
+        </p:txBody>
+      </p:sp>
+      <p:sp>
+        <p:nvSpPr>
+          <p:cNvPr id="8" name="Oval 7"/>
+          <p:cNvSpPr/>
+          <p:nvPr/>
+        </p:nvSpPr>
+        <p:spPr>
+          <a:xfrm>
+            <a:off x="1426464" y="2130552"/>
+            <a:ext cx="109728" cy="109728"/>
+          </a:xfrm>
+          <a:prstGeom prst="ellipse">
+            <a:avLst/>
+          </a:prstGeom>
+          <a:solidFill>
+            <a:srgbClr val="28C93F"/>
+          </a:solidFill>
+          <a:ln>
+            <a:noFill/>
+          </a:ln>
+          <a:effectLst/>
+        </p:spPr>
+        <p:style>
+          <a:lnRef idx="1">
+            <a:schemeClr val="accent1"/>
+          </a:lnRef>
+          <a:fillRef idx="3">
+            <a:schemeClr val="accent1"/>
+          </a:fillRef>
+          <a:effectRef idx="2">
+            <a:schemeClr val="accent1"/>
+          </a:effectRef>
+          <a:fontRef idx="minor">
+            <a:schemeClr val="lt1"/>
+          </a:fontRef>
+        </p:style>
+        <p:txBody>
+          <a:bodyPr rtlCol="0" anchor="ctr"/>
+          <a:lstStyle/>
+          <a:p>
+            <a:pPr algn="ctr"/>
+          </a:p>
+        </p:txBody>
+      </p:sp>
+      <p:sp>
+        <p:nvSpPr>
+          <p:cNvPr id="9" name="TextBox 8"/>
+          <p:cNvSpPr txBox="1"/>
+          <p:nvPr/>
+        </p:nvSpPr>
+        <p:spPr>
+          <a:xfrm>
+            <a:off x="1078992" y="2350008"/>
+            <a:ext cx="10003536" cy="3273552"/>
           </a:xfrm>
           <a:prstGeom prst="rect">
             <a:avLst/>
@@ -5009,24 +4837,193 @@
           <a:p>
             <a:pPr algn="l">
               <a:lnSpc>
-                <a:spcPct val="160000"/>
-              </a:lnSpc>
-            </a:pPr>
-            <a:r>
-              <a:rPr sz="1800" b="0" i="0">
-                <a:solidFill>
-                  <a:srgbClr val="1C1730"/>
+                <a:spcPct val="135000"/>
+              </a:lnSpc>
+            </a:pPr>
+            <a:r>
+              <a:rPr sz="1350" b="1">
+                <a:solidFill>
+                  <a:srgbClr val="9C93C9"/>
+                </a:solidFill>
+                <a:latin typeface="Consolas"/>
+              </a:rPr>
+              <a:t>$ </a:t>
+            </a:r>
+            <a:r>
+              <a:rPr sz="1350" b="0">
+                <a:solidFill>
+                  <a:srgbClr val="EDE9F7"/>
+                </a:solidFill>
+                <a:latin typeface="Consolas"/>
+              </a:rPr>
+              <a:t>openssl dgst -sha256 -verify pub.pem \</a:t>
+            </a:r>
+          </a:p>
+          <a:p>
+            <a:pPr algn="l">
+              <a:lnSpc>
+                <a:spcPct val="135000"/>
+              </a:lnSpc>
+            </a:pPr>
+            <a:r>
+              <a:rPr sz="1350" b="0">
+                <a:solidFill>
+                  <a:srgbClr val="EDE9F7"/>
+                </a:solidFill>
+                <a:latin typeface="Consolas"/>
+              </a:rPr>
+              <a:t>    -signature sig.bin message.txt</a:t>
+            </a:r>
+          </a:p>
+          <a:p>
+            <a:pPr algn="l">
+              <a:lnSpc>
+                <a:spcPct val="135000"/>
+              </a:lnSpc>
+            </a:pPr>
+            <a:r>
+              <a:rPr sz="1350" b="0">
+                <a:solidFill>
+                  <a:srgbClr val="7FE0C4"/>
+                </a:solidFill>
+                <a:latin typeface="Consolas"/>
+              </a:rPr>
+              <a:t>Verified OK</a:t>
+            </a:r>
+          </a:p>
+          <a:p>
+            <a:pPr algn="l">
+              <a:lnSpc>
+                <a:spcPct val="135000"/>
+              </a:lnSpc>
+            </a:pPr>
+            <a:r>
+              <a:rPr sz="1350" b="0">
+                <a:solidFill>
+                  <a:srgbClr val="EDE9F7"/>
+                </a:solidFill>
+                <a:latin typeface="Consolas"/>
+              </a:rPr>
+              <a:t/>
+            </a:r>
+          </a:p>
+          <a:p>
+            <a:pPr algn="l">
+              <a:lnSpc>
+                <a:spcPct val="135000"/>
+              </a:lnSpc>
+            </a:pPr>
+            <a:r>
+              <a:rPr sz="1350" b="0">
+                <a:solidFill>
+                  <a:srgbClr val="8B84AD"/>
+                </a:solidFill>
+                <a:latin typeface="Consolas"/>
+              </a:rPr>
+              <a:t># same signature, but the message text was changed:</a:t>
+            </a:r>
+          </a:p>
+          <a:p>
+            <a:pPr algn="l">
+              <a:lnSpc>
+                <a:spcPct val="135000"/>
+              </a:lnSpc>
+            </a:pPr>
+            <a:r>
+              <a:rPr sz="1350" b="1">
+                <a:solidFill>
+                  <a:srgbClr val="9C93C9"/>
+                </a:solidFill>
+                <a:latin typeface="Consolas"/>
+              </a:rPr>
+              <a:t>$ </a:t>
+            </a:r>
+            <a:r>
+              <a:rPr sz="1350" b="0">
+                <a:solidFill>
+                  <a:srgbClr val="EDE9F7"/>
+                </a:solidFill>
+                <a:latin typeface="Consolas"/>
+              </a:rPr>
+              <a:t>openssl dgst -sha256 -verify pub.pem \</a:t>
+            </a:r>
+          </a:p>
+          <a:p>
+            <a:pPr algn="l">
+              <a:lnSpc>
+                <a:spcPct val="135000"/>
+              </a:lnSpc>
+            </a:pPr>
+            <a:r>
+              <a:rPr sz="1350" b="0">
+                <a:solidFill>
+                  <a:srgbClr val="EDE9F7"/>
+                </a:solidFill>
+                <a:latin typeface="Consolas"/>
+              </a:rPr>
+              <a:t>    -signature sig.bin tampered.txt</a:t>
+            </a:r>
+          </a:p>
+          <a:p>
+            <a:pPr algn="l">
+              <a:lnSpc>
+                <a:spcPct val="135000"/>
+              </a:lnSpc>
+            </a:pPr>
+            <a:r>
+              <a:rPr sz="1350" b="0">
+                <a:solidFill>
+                  <a:srgbClr val="FF8E7D"/>
+                </a:solidFill>
+                <a:latin typeface="Consolas"/>
+              </a:rPr>
+              <a:t>Verification failure</a:t>
+            </a:r>
+          </a:p>
+        </p:txBody>
+      </p:sp>
+      <p:sp>
+        <p:nvSpPr>
+          <p:cNvPr id="10" name="TextBox 9"/>
+          <p:cNvSpPr txBox="1"/>
+          <p:nvPr/>
+        </p:nvSpPr>
+        <p:spPr>
+          <a:xfrm>
+            <a:off x="822960" y="6446520"/>
+            <a:ext cx="10058400" cy="320040"/>
+          </a:xfrm>
+          <a:prstGeom prst="rect">
+            <a:avLst/>
+          </a:prstGeom>
+          <a:noFill/>
+        </p:spPr>
+        <p:txBody>
+          <a:bodyPr wrap="square" anchor="t" lIns="0" rIns="0" tIns="0" bIns="0">
+            <a:spAutoFit/>
+          </a:bodyPr>
+          <a:lstStyle/>
+          <a:p>
+            <a:pPr algn="l">
+              <a:lnSpc>
+                <a:spcPct val="115000"/>
+              </a:lnSpc>
+            </a:pPr>
+            <a:r>
+              <a:rPr sz="1050" b="0" i="0">
+                <a:solidFill>
+                  <a:srgbClr val="5C576E"/>
                 </a:solidFill>
                 <a:latin typeface="Calibri"/>
               </a:rPr>
-              <a:t>Your private key is a unique, impossible-to-forge signature stamp — a wax-seal signet ring only you own. Your public key is a reference card everyone holds, showing exactly what your genuine seal impression looks like. Anyone can compare a seal against the card; nobody can forge the ring's impression from the card alone.</a:t>
-            </a:r>
-          </a:p>
-        </p:txBody>
-      </p:sp>
-      <p:sp>
-        <p:nvSpPr>
-          <p:cNvPr id="7" name="TextBox 6"/>
+              <a:t>An attacker can't change "1 ETH" to "100 ETH" without invalidating the signature — and can't forge a new one.</a:t>
+            </a:r>
+          </a:p>
+        </p:txBody>
+      </p:sp>
+      <p:sp>
+        <p:nvSpPr>
+          <p:cNvPr id="11" name="TextBox 10"/>
           <p:cNvSpPr txBox="1"/>
           <p:nvPr/>
         </p:nvSpPr>
@@ -5058,7 +5055,7 @@
                 </a:solidFill>
                 <a:latin typeface="Consolas"/>
               </a:rPr>
-              <a:t>12 / 15</a:t>
+              <a:t>12 / 18</a:t>
             </a:r>
           </a:p>
         </p:txBody>
@@ -5159,7 +5156,7 @@
                 </a:solidFill>
                 <a:latin typeface="Calibri"/>
               </a:rPr>
-              <a:t>COMMON MISCONCEPTIONS</a:t>
+              <a:t>REAL-WORLD USES</a:t>
             </a:r>
           </a:p>
         </p:txBody>
@@ -5192,13 +5189,13 @@
               </a:lnSpc>
             </a:pPr>
             <a:r>
-              <a:rPr sz="3000" b="1" i="0">
+              <a:rPr sz="3200" b="1" i="0">
                 <a:solidFill>
                   <a:srgbClr val="1C1730"/>
                 </a:solidFill>
                 <a:latin typeface="Century Gothic"/>
               </a:rPr>
-              <a:t>Where People Get Tripped Up</a:t>
+              <a:t>Not Just Blockchain</a:t>
             </a:r>
           </a:p>
         </p:txBody>
@@ -5211,19 +5208,21 @@
         </p:nvSpPr>
         <p:spPr>
           <a:xfrm>
-            <a:off x="822960" y="2057400"/>
-            <a:ext cx="10515600" cy="1874519"/>
+            <a:off x="822960" y="2011680"/>
+            <a:ext cx="3322320" cy="1508760"/>
           </a:xfrm>
           <a:prstGeom prst="roundRect">
             <a:avLst>
-              <a:gd name="adj" fmla="val 5000"/>
+              <a:gd name="adj" fmla="val 9000"/>
             </a:avLst>
           </a:prstGeom>
           <a:solidFill>
             <a:srgbClr val="FFFFFF"/>
           </a:solidFill>
-          <a:ln>
-            <a:noFill/>
+          <a:ln w="12700">
+            <a:solidFill>
+              <a:srgbClr val="DED9EA"/>
+            </a:solidFill>
           </a:ln>
           <a:effectLst/>
         </p:spPr>
@@ -5251,23 +5250,105 @@
       </p:sp>
       <p:sp>
         <p:nvSpPr>
-          <p:cNvPr id="6" name="Rectangle 5"/>
+          <p:cNvPr id="6" name="TextBox 5"/>
+          <p:cNvSpPr txBox="1"/>
+          <p:nvPr/>
+        </p:nvSpPr>
+        <p:spPr>
+          <a:xfrm>
+            <a:off x="1078992" y="2267712"/>
+            <a:ext cx="2810256" cy="457200"/>
+          </a:xfrm>
+          <a:prstGeom prst="rect">
+            <a:avLst/>
+          </a:prstGeom>
+          <a:noFill/>
+        </p:spPr>
+        <p:txBody>
+          <a:bodyPr wrap="square" anchor="t" lIns="0" rIns="0" tIns="0" bIns="0">
+            <a:spAutoFit/>
+          </a:bodyPr>
+          <a:lstStyle/>
+          <a:p>
+            <a:pPr algn="l">
+              <a:lnSpc>
+                <a:spcPct val="115000"/>
+              </a:lnSpc>
+            </a:pPr>
+            <a:r>
+              <a:rPr sz="1450" b="1" i="0">
+                <a:solidFill>
+                  <a:srgbClr val="C67A1E"/>
+                </a:solidFill>
+                <a:latin typeface="Century Gothic"/>
+              </a:rPr>
+              <a:t>HTTPS / TLS</a:t>
+            </a:r>
+          </a:p>
+        </p:txBody>
+      </p:sp>
+      <p:sp>
+        <p:nvSpPr>
+          <p:cNvPr id="7" name="TextBox 6"/>
+          <p:cNvSpPr txBox="1"/>
+          <p:nvPr/>
+        </p:nvSpPr>
+        <p:spPr>
+          <a:xfrm>
+            <a:off x="1078992" y="2724912"/>
+            <a:ext cx="2810256" cy="658368"/>
+          </a:xfrm>
+          <a:prstGeom prst="rect">
+            <a:avLst/>
+          </a:prstGeom>
+          <a:noFill/>
+        </p:spPr>
+        <p:txBody>
+          <a:bodyPr wrap="square" anchor="t" lIns="0" rIns="0" tIns="0" bIns="0">
+            <a:spAutoFit/>
+          </a:bodyPr>
+          <a:lstStyle/>
+          <a:p>
+            <a:pPr algn="l">
+              <a:lnSpc>
+                <a:spcPct val="128000"/>
+              </a:lnSpc>
+            </a:pPr>
+            <a:r>
+              <a:rPr sz="1150" b="0" i="0">
+                <a:solidFill>
+                  <a:srgbClr val="1C1730"/>
+                </a:solidFill>
+                <a:latin typeface="Calibri"/>
+              </a:rPr>
+              <a:t>The padlock in your browser — a server proving it owns its certificate's private key.</a:t>
+            </a:r>
+          </a:p>
+        </p:txBody>
+      </p:sp>
+      <p:sp>
+        <p:nvSpPr>
+          <p:cNvPr id="8" name="Rounded Rectangle 7"/>
           <p:cNvSpPr/>
           <p:nvPr/>
         </p:nvSpPr>
         <p:spPr>
           <a:xfrm>
-            <a:off x="822960" y="2057400"/>
-            <a:ext cx="82296" cy="1874519"/>
-          </a:xfrm>
-          <a:prstGeom prst="rect">
-            <a:avLst/>
+            <a:off x="4419600" y="2011680"/>
+            <a:ext cx="3322320" cy="1508760"/>
+          </a:xfrm>
+          <a:prstGeom prst="roundRect">
+            <a:avLst>
+              <a:gd name="adj" fmla="val 9000"/>
+            </a:avLst>
           </a:prstGeom>
           <a:solidFill>
-            <a:srgbClr val="C67A1E"/>
+            <a:srgbClr val="FFFFFF"/>
           </a:solidFill>
-          <a:ln>
-            <a:noFill/>
+          <a:ln w="12700">
+            <a:solidFill>
+              <a:srgbClr val="DED9EA"/>
+            </a:solidFill>
           </a:ln>
           <a:effectLst/>
         </p:spPr>
@@ -5295,14 +5376,14 @@
       </p:sp>
       <p:sp>
         <p:nvSpPr>
-          <p:cNvPr id="7" name="TextBox 6"/>
-          <p:cNvSpPr txBox="1"/>
-          <p:nvPr/>
-        </p:nvSpPr>
-        <p:spPr>
-          <a:xfrm>
-            <a:off x="1188720" y="2258568"/>
-            <a:ext cx="9784080" cy="457200"/>
+          <p:cNvPr id="9" name="TextBox 8"/>
+          <p:cNvSpPr txBox="1"/>
+          <p:nvPr/>
+        </p:nvSpPr>
+        <p:spPr>
+          <a:xfrm>
+            <a:off x="4675632" y="2267712"/>
+            <a:ext cx="2810256" cy="457200"/>
           </a:xfrm>
           <a:prstGeom prst="rect">
             <a:avLst/>
@@ -5321,27 +5402,27 @@
               </a:lnSpc>
             </a:pPr>
             <a:r>
-              <a:rPr sz="1700" b="1" i="0">
+              <a:rPr sz="1450" b="1" i="0">
                 <a:solidFill>
                   <a:srgbClr val="C67A1E"/>
                 </a:solidFill>
                 <a:latin typeface="Century Gothic"/>
               </a:rPr>
-              <a:t>“My wallet address IS my public key.”</a:t>
-            </a:r>
-          </a:p>
-        </p:txBody>
-      </p:sp>
-      <p:sp>
-        <p:nvSpPr>
-          <p:cNvPr id="8" name="TextBox 7"/>
-          <p:cNvSpPr txBox="1"/>
-          <p:nvPr/>
-        </p:nvSpPr>
-        <p:spPr>
-          <a:xfrm>
-            <a:off x="1188720" y="2743200"/>
-            <a:ext cx="9784080" cy="1097280"/>
+              <a:t>SSH Keys</a:t>
+            </a:r>
+          </a:p>
+        </p:txBody>
+      </p:sp>
+      <p:sp>
+        <p:nvSpPr>
+          <p:cNvPr id="10" name="TextBox 9"/>
+          <p:cNvSpPr txBox="1"/>
+          <p:nvPr/>
+        </p:nvSpPr>
+        <p:spPr>
+          <a:xfrm>
+            <a:off x="4675632" y="2724912"/>
+            <a:ext cx="2810256" cy="658368"/>
           </a:xfrm>
           <a:prstGeom prst="rect">
             <a:avLst/>
@@ -5356,42 +5437,44 @@
           <a:p>
             <a:pPr algn="l">
               <a:lnSpc>
-                <a:spcPct val="135000"/>
-              </a:lnSpc>
-            </a:pPr>
-            <a:r>
-              <a:rPr sz="1300" b="0" i="0">
-                <a:solidFill>
-                  <a:srgbClr val="5C576E"/>
+                <a:spcPct val="128000"/>
+              </a:lnSpc>
+            </a:pPr>
+            <a:r>
+              <a:rPr sz="1150" b="0" i="0">
+                <a:solidFill>
+                  <a:srgbClr val="1C1730"/>
                 </a:solidFill>
                 <a:latin typeface="Calibri"/>
               </a:rPr>
-              <a:t>Not quite — your address is a hash of your public key. The full chain is public key → hash → address, one more one-way step layered on top.</a:t>
-            </a:r>
-          </a:p>
-        </p:txBody>
-      </p:sp>
-      <p:sp>
-        <p:nvSpPr>
-          <p:cNvPr id="9" name="Rounded Rectangle 8"/>
+              <a:t>Logging into GitHub or a server without a password, using this exact mechanism.</a:t>
+            </a:r>
+          </a:p>
+        </p:txBody>
+      </p:sp>
+      <p:sp>
+        <p:nvSpPr>
+          <p:cNvPr id="11" name="Rounded Rectangle 10"/>
           <p:cNvSpPr/>
           <p:nvPr/>
         </p:nvSpPr>
         <p:spPr>
           <a:xfrm>
-            <a:off x="822960" y="4160520"/>
-            <a:ext cx="10515600" cy="1874519"/>
+            <a:off x="8016240" y="2011680"/>
+            <a:ext cx="3322320" cy="1508760"/>
           </a:xfrm>
           <a:prstGeom prst="roundRect">
             <a:avLst>
-              <a:gd name="adj" fmla="val 5000"/>
+              <a:gd name="adj" fmla="val 9000"/>
             </a:avLst>
           </a:prstGeom>
           <a:solidFill>
             <a:srgbClr val="FFFFFF"/>
           </a:solidFill>
-          <a:ln>
-            <a:noFill/>
+          <a:ln w="12700">
+            <a:solidFill>
+              <a:srgbClr val="DED9EA"/>
+            </a:solidFill>
           </a:ln>
           <a:effectLst/>
         </p:spPr>
@@ -5419,23 +5502,105 @@
       </p:sp>
       <p:sp>
         <p:nvSpPr>
-          <p:cNvPr id="10" name="Rectangle 9"/>
+          <p:cNvPr id="12" name="TextBox 11"/>
+          <p:cNvSpPr txBox="1"/>
+          <p:nvPr/>
+        </p:nvSpPr>
+        <p:spPr>
+          <a:xfrm>
+            <a:off x="8272272" y="2267712"/>
+            <a:ext cx="2810256" cy="457200"/>
+          </a:xfrm>
+          <a:prstGeom prst="rect">
+            <a:avLst/>
+          </a:prstGeom>
+          <a:noFill/>
+        </p:spPr>
+        <p:txBody>
+          <a:bodyPr wrap="square" anchor="t" lIns="0" rIns="0" tIns="0" bIns="0">
+            <a:spAutoFit/>
+          </a:bodyPr>
+          <a:lstStyle/>
+          <a:p>
+            <a:pPr algn="l">
+              <a:lnSpc>
+                <a:spcPct val="115000"/>
+              </a:lnSpc>
+            </a:pPr>
+            <a:r>
+              <a:rPr sz="1450" b="1" i="0">
+                <a:solidFill>
+                  <a:srgbClr val="C67A1E"/>
+                </a:solidFill>
+                <a:latin typeface="Century Gothic"/>
+              </a:rPr>
+              <a:t>Code Signing</a:t>
+            </a:r>
+          </a:p>
+        </p:txBody>
+      </p:sp>
+      <p:sp>
+        <p:nvSpPr>
+          <p:cNvPr id="13" name="TextBox 12"/>
+          <p:cNvSpPr txBox="1"/>
+          <p:nvPr/>
+        </p:nvSpPr>
+        <p:spPr>
+          <a:xfrm>
+            <a:off x="8272272" y="2724912"/>
+            <a:ext cx="2810256" cy="658368"/>
+          </a:xfrm>
+          <a:prstGeom prst="rect">
+            <a:avLst/>
+          </a:prstGeom>
+          <a:noFill/>
+        </p:spPr>
+        <p:txBody>
+          <a:bodyPr wrap="square" anchor="t" lIns="0" rIns="0" tIns="0" bIns="0">
+            <a:spAutoFit/>
+          </a:bodyPr>
+          <a:lstStyle/>
+          <a:p>
+            <a:pPr algn="l">
+              <a:lnSpc>
+                <a:spcPct val="128000"/>
+              </a:lnSpc>
+            </a:pPr>
+            <a:r>
+              <a:rPr sz="1150" b="0" i="0">
+                <a:solidFill>
+                  <a:srgbClr val="1C1730"/>
+                </a:solidFill>
+                <a:latin typeface="Calibri"/>
+              </a:rPr>
+              <a:t>Your OS verifies an update genuinely came from Apple or Google, not an attacker.</a:t>
+            </a:r>
+          </a:p>
+        </p:txBody>
+      </p:sp>
+      <p:sp>
+        <p:nvSpPr>
+          <p:cNvPr id="14" name="Rounded Rectangle 13"/>
           <p:cNvSpPr/>
           <p:nvPr/>
         </p:nvSpPr>
         <p:spPr>
           <a:xfrm>
-            <a:off x="822960" y="4160520"/>
-            <a:ext cx="82296" cy="1874519"/>
-          </a:xfrm>
-          <a:prstGeom prst="rect">
-            <a:avLst/>
+            <a:off x="822960" y="3749040"/>
+            <a:ext cx="3322320" cy="1508760"/>
+          </a:xfrm>
+          <a:prstGeom prst="roundRect">
+            <a:avLst>
+              <a:gd name="adj" fmla="val 9000"/>
+            </a:avLst>
           </a:prstGeom>
           <a:solidFill>
-            <a:srgbClr val="C67A1E"/>
+            <a:srgbClr val="FFFFFF"/>
           </a:solidFill>
-          <a:ln>
-            <a:noFill/>
+          <a:ln w="12700">
+            <a:solidFill>
+              <a:srgbClr val="DED9EA"/>
+            </a:solidFill>
           </a:ln>
           <a:effectLst/>
         </p:spPr>
@@ -5463,14 +5628,14 @@
       </p:sp>
       <p:sp>
         <p:nvSpPr>
-          <p:cNvPr id="11" name="TextBox 10"/>
-          <p:cNvSpPr txBox="1"/>
-          <p:nvPr/>
-        </p:nvSpPr>
-        <p:spPr>
-          <a:xfrm>
-            <a:off x="1188720" y="4361688"/>
-            <a:ext cx="9784080" cy="457200"/>
+          <p:cNvPr id="15" name="TextBox 14"/>
+          <p:cNvSpPr txBox="1"/>
+          <p:nvPr/>
+        </p:nvSpPr>
+        <p:spPr>
+          <a:xfrm>
+            <a:off x="1078992" y="4005072"/>
+            <a:ext cx="2810256" cy="457200"/>
           </a:xfrm>
           <a:prstGeom prst="rect">
             <a:avLst/>
@@ -5489,27 +5654,27 @@
               </a:lnSpc>
             </a:pPr>
             <a:r>
-              <a:rPr sz="1700" b="1" i="0">
+              <a:rPr sz="1450" b="1" i="0">
                 <a:solidFill>
                   <a:srgbClr val="C67A1E"/>
                 </a:solidFill>
                 <a:latin typeface="Century Gothic"/>
               </a:rPr>
-              <a:t>“If I lose my private key, I can reset it like a password.”</a:t>
-            </a:r>
-          </a:p>
-        </p:txBody>
-      </p:sp>
-      <p:sp>
-        <p:nvSpPr>
-          <p:cNvPr id="12" name="TextBox 11"/>
-          <p:cNvSpPr txBox="1"/>
-          <p:nvPr/>
-        </p:nvSpPr>
-        <p:spPr>
-          <a:xfrm>
-            <a:off x="1188720" y="4846320"/>
-            <a:ext cx="9784080" cy="1097280"/>
+              <a:t>Signed Git Commits</a:t>
+            </a:r>
+          </a:p>
+        </p:txBody>
+      </p:sp>
+      <p:sp>
+        <p:nvSpPr>
+          <p:cNvPr id="16" name="TextBox 15"/>
+          <p:cNvSpPr txBox="1"/>
+          <p:nvPr/>
+        </p:nvSpPr>
+        <p:spPr>
+          <a:xfrm>
+            <a:off x="1078992" y="4462272"/>
+            <a:ext cx="2810256" cy="658368"/>
           </a:xfrm>
           <a:prstGeom prst="rect">
             <a:avLst/>
@@ -5524,24 +5689,150 @@
           <a:p>
             <a:pPr algn="l">
               <a:lnSpc>
-                <a:spcPct val="135000"/>
-              </a:lnSpc>
-            </a:pPr>
-            <a:r>
-              <a:rPr sz="1300" b="0" i="0">
-                <a:solidFill>
-                  <a:srgbClr val="5C576E"/>
+                <a:spcPct val="128000"/>
+              </a:lnSpc>
+            </a:pPr>
+            <a:r>
+              <a:rPr sz="1150" b="0" i="0">
+                <a:solidFill>
+                  <a:srgbClr val="1C1730"/>
                 </a:solidFill>
                 <a:latin typeface="Calibri"/>
               </a:rPr>
-              <a:t>There is no reset. No recovery mechanism is built into the protocol — only a backup phrase, if you saved one in advance.</a:t>
-            </a:r>
-          </a:p>
-        </p:txBody>
-      </p:sp>
-      <p:sp>
-        <p:nvSpPr>
-          <p:cNvPr id="13" name="TextBox 12"/>
+              <a:t>git commit -S — proving a commit really came from you.</a:t>
+            </a:r>
+          </a:p>
+        </p:txBody>
+      </p:sp>
+      <p:sp>
+        <p:nvSpPr>
+          <p:cNvPr id="17" name="Rounded Rectangle 16"/>
+          <p:cNvSpPr/>
+          <p:nvPr/>
+        </p:nvSpPr>
+        <p:spPr>
+          <a:xfrm>
+            <a:off x="4419600" y="3749040"/>
+            <a:ext cx="3322320" cy="1508760"/>
+          </a:xfrm>
+          <a:prstGeom prst="roundRect">
+            <a:avLst>
+              <a:gd name="adj" fmla="val 9000"/>
+            </a:avLst>
+          </a:prstGeom>
+          <a:solidFill>
+            <a:srgbClr val="FFFFFF"/>
+          </a:solidFill>
+          <a:ln w="12700">
+            <a:solidFill>
+              <a:srgbClr val="DED9EA"/>
+            </a:solidFill>
+          </a:ln>
+          <a:effectLst/>
+        </p:spPr>
+        <p:style>
+          <a:lnRef idx="1">
+            <a:schemeClr val="accent1"/>
+          </a:lnRef>
+          <a:fillRef idx="3">
+            <a:schemeClr val="accent1"/>
+          </a:fillRef>
+          <a:effectRef idx="2">
+            <a:schemeClr val="accent1"/>
+          </a:effectRef>
+          <a:fontRef idx="minor">
+            <a:schemeClr val="lt1"/>
+          </a:fontRef>
+        </p:style>
+        <p:txBody>
+          <a:bodyPr rtlCol="0" anchor="ctr"/>
+          <a:lstStyle/>
+          <a:p>
+            <a:pPr algn="ctr"/>
+          </a:p>
+        </p:txBody>
+      </p:sp>
+      <p:sp>
+        <p:nvSpPr>
+          <p:cNvPr id="18" name="TextBox 17"/>
+          <p:cNvSpPr txBox="1"/>
+          <p:nvPr/>
+        </p:nvSpPr>
+        <p:spPr>
+          <a:xfrm>
+            <a:off x="4675632" y="4005072"/>
+            <a:ext cx="2810256" cy="457200"/>
+          </a:xfrm>
+          <a:prstGeom prst="rect">
+            <a:avLst/>
+          </a:prstGeom>
+          <a:noFill/>
+        </p:spPr>
+        <p:txBody>
+          <a:bodyPr wrap="square" anchor="t" lIns="0" rIns="0" tIns="0" bIns="0">
+            <a:spAutoFit/>
+          </a:bodyPr>
+          <a:lstStyle/>
+          <a:p>
+            <a:pPr algn="l">
+              <a:lnSpc>
+                <a:spcPct val="115000"/>
+              </a:lnSpc>
+            </a:pPr>
+            <a:r>
+              <a:rPr sz="1450" b="1" i="0">
+                <a:solidFill>
+                  <a:srgbClr val="C67A1E"/>
+                </a:solidFill>
+                <a:latin typeface="Century Gothic"/>
+              </a:rPr>
+              <a:t>PGP Email</a:t>
+            </a:r>
+          </a:p>
+        </p:txBody>
+      </p:sp>
+      <p:sp>
+        <p:nvSpPr>
+          <p:cNvPr id="19" name="TextBox 18"/>
+          <p:cNvSpPr txBox="1"/>
+          <p:nvPr/>
+        </p:nvSpPr>
+        <p:spPr>
+          <a:xfrm>
+            <a:off x="4675632" y="4462272"/>
+            <a:ext cx="2810256" cy="658368"/>
+          </a:xfrm>
+          <a:prstGeom prst="rect">
+            <a:avLst/>
+          </a:prstGeom>
+          <a:noFill/>
+        </p:spPr>
+        <p:txBody>
+          <a:bodyPr wrap="square" anchor="t" lIns="0" rIns="0" tIns="0" bIns="0">
+            <a:spAutoFit/>
+          </a:bodyPr>
+          <a:lstStyle/>
+          <a:p>
+            <a:pPr algn="l">
+              <a:lnSpc>
+                <a:spcPct val="128000"/>
+              </a:lnSpc>
+            </a:pPr>
+            <a:r>
+              <a:rPr sz="1150" b="0" i="0">
+                <a:solidFill>
+                  <a:srgbClr val="1C1730"/>
+                </a:solidFill>
+                <a:latin typeface="Calibri"/>
+              </a:rPr>
+              <a:t>Encrypting a message so only the intended recipient's private key can read it.</a:t>
+            </a:r>
+          </a:p>
+        </p:txBody>
+      </p:sp>
+      <p:sp>
+        <p:nvSpPr>
+          <p:cNvPr id="20" name="TextBox 19"/>
           <p:cNvSpPr txBox="1"/>
           <p:nvPr/>
         </p:nvSpPr>
@@ -5573,7 +5864,7 @@
                 </a:solidFill>
                 <a:latin typeface="Consolas"/>
               </a:rPr>
-              <a:t>13 / 15</a:t>
+              <a:t>13 / 18</a:t>
             </a:r>
           </a:p>
         </p:txBody>
@@ -5674,7 +5965,7 @@
                 </a:solidFill>
                 <a:latin typeface="Calibri"/>
               </a:rPr>
-              <a:t>HANDS-ON PRACTICE</a:t>
+              <a:t>FLAGSHIP CASE STUDY</a:t>
             </a:r>
           </a:p>
         </p:txBody>
@@ -5687,8 +5978,8 @@
         </p:nvSpPr>
         <p:spPr>
           <a:xfrm>
-            <a:off x="822960" y="1051560"/>
-            <a:ext cx="9601200" cy="1005840"/>
+            <a:off x="822960" y="1097280"/>
+            <a:ext cx="10332720" cy="1005840"/>
           </a:xfrm>
           <a:prstGeom prst="rect">
             <a:avLst/>
@@ -5707,30 +5998,32 @@
               </a:lnSpc>
             </a:pPr>
             <a:r>
-              <a:rPr sz="3200" b="1" i="0">
+              <a:rPr sz="3000" b="1" i="0">
                 <a:solidFill>
                   <a:srgbClr val="1C1730"/>
                 </a:solidFill>
                 <a:latin typeface="Century Gothic"/>
               </a:rPr>
-              <a:t>Do This Now</a:t>
-            </a:r>
-          </a:p>
-        </p:txBody>
-      </p:sp>
-      <p:sp>
-        <p:nvSpPr>
-          <p:cNvPr id="5" name="Oval 4"/>
+              <a:t>Encryption vs. Signing — A Distinction Worth Getting Right</a:t>
+            </a:r>
+          </a:p>
+        </p:txBody>
+      </p:sp>
+      <p:sp>
+        <p:nvSpPr>
+          <p:cNvPr id="5" name="Rounded Rectangle 4"/>
           <p:cNvSpPr/>
           <p:nvPr/>
         </p:nvSpPr>
         <p:spPr>
           <a:xfrm>
-            <a:off x="822960" y="2148840"/>
-            <a:ext cx="502920" cy="502920"/>
-          </a:xfrm>
-          <a:prstGeom prst="ellipse">
-            <a:avLst/>
+            <a:off x="822960" y="2423160"/>
+            <a:ext cx="10515600" cy="3749039"/>
+          </a:xfrm>
+          <a:prstGeom prst="roundRect">
+            <a:avLst>
+              <a:gd name="adj" fmla="val 4000"/>
+            </a:avLst>
           </a:prstGeom>
           <a:solidFill>
             <a:srgbClr val="C67A1E"/>
@@ -5755,340 +6048,55 @@
           </a:fontRef>
         </p:style>
         <p:txBody>
-          <a:bodyPr rtlCol="0" anchor="ctr" wrap="none"/>
+          <a:bodyPr rtlCol="0" anchor="ctr"/>
           <a:lstStyle/>
           <a:p>
             <a:pPr algn="ctr"/>
-            <a:r>
-              <a:rPr sz="1500" b="1">
+          </a:p>
+        </p:txBody>
+      </p:sp>
+      <p:sp>
+        <p:nvSpPr>
+          <p:cNvPr id="6" name="TextBox 5"/>
+          <p:cNvSpPr txBox="1"/>
+          <p:nvPr/>
+        </p:nvSpPr>
+        <p:spPr>
+          <a:xfrm>
+            <a:off x="1280160" y="2743200"/>
+            <a:ext cx="9601200" cy="3200400"/>
+          </a:xfrm>
+          <a:prstGeom prst="rect">
+            <a:avLst/>
+          </a:prstGeom>
+          <a:noFill/>
+        </p:spPr>
+        <p:txBody>
+          <a:bodyPr wrap="square" anchor="t" lIns="0" rIns="0" tIns="0" bIns="0">
+            <a:spAutoFit/>
+          </a:bodyPr>
+          <a:lstStyle/>
+          <a:p>
+            <a:pPr algn="l">
+              <a:lnSpc>
+                <a:spcPct val="155000"/>
+              </a:lnSpc>
+            </a:pPr>
+            <a:r>
+              <a:rPr sz="1600" b="0" i="0">
                 <a:solidFill>
                   <a:srgbClr val="FFFFFF"/>
                 </a:solidFill>
-                <a:latin typeface="Century Gothic"/>
-              </a:rPr>
-              <a:t>1</a:t>
-            </a:r>
-          </a:p>
-        </p:txBody>
-      </p:sp>
-      <p:sp>
-        <p:nvSpPr>
-          <p:cNvPr id="6" name="TextBox 5"/>
-          <p:cNvSpPr txBox="1"/>
-          <p:nvPr/>
-        </p:nvSpPr>
-        <p:spPr>
-          <a:xfrm>
-            <a:off x="1600200" y="2203704"/>
-            <a:ext cx="9509760" cy="822960"/>
-          </a:xfrm>
-          <a:prstGeom prst="rect">
-            <a:avLst/>
-          </a:prstGeom>
-          <a:noFill/>
-        </p:spPr>
-        <p:txBody>
-          <a:bodyPr wrap="square" anchor="t" lIns="0" rIns="0" tIns="0" bIns="0">
-            <a:spAutoFit/>
-          </a:bodyPr>
-          <a:lstStyle/>
-          <a:p>
-            <a:pPr algn="l">
-              <a:lnSpc>
-                <a:spcPct val="130000"/>
-              </a:lnSpc>
-            </a:pPr>
-            <a:r>
-              <a:rPr sz="1500" b="0" i="0">
-                <a:solidFill>
-                  <a:srgbClr val="1C1730"/>
-                </a:solidFill>
                 <a:latin typeface="Calibri"/>
               </a:rPr>
-              <a:t>Generate a real keypair with openssl and sign a message of your own choosing.</a:t>
-            </a:r>
-          </a:p>
-        </p:txBody>
-      </p:sp>
-      <p:sp>
-        <p:nvSpPr>
-          <p:cNvPr id="7" name="Oval 6"/>
-          <p:cNvSpPr/>
-          <p:nvPr/>
-        </p:nvSpPr>
-        <p:spPr>
-          <a:xfrm>
-            <a:off x="822960" y="3108960"/>
-            <a:ext cx="502920" cy="502920"/>
-          </a:xfrm>
-          <a:prstGeom prst="ellipse">
-            <a:avLst/>
-          </a:prstGeom>
-          <a:solidFill>
-            <a:srgbClr val="C67A1E"/>
-          </a:solidFill>
-          <a:ln>
-            <a:noFill/>
-          </a:ln>
-          <a:effectLst/>
-        </p:spPr>
-        <p:style>
-          <a:lnRef idx="1">
-            <a:schemeClr val="accent1"/>
-          </a:lnRef>
-          <a:fillRef idx="3">
-            <a:schemeClr val="accent1"/>
-          </a:fillRef>
-          <a:effectRef idx="2">
-            <a:schemeClr val="accent1"/>
-          </a:effectRef>
-          <a:fontRef idx="minor">
-            <a:schemeClr val="lt1"/>
-          </a:fontRef>
-        </p:style>
-        <p:txBody>
-          <a:bodyPr rtlCol="0" anchor="ctr" wrap="none"/>
-          <a:lstStyle/>
-          <a:p>
-            <a:pPr algn="ctr"/>
-            <a:r>
-              <a:rPr sz="1500" b="1">
-                <a:solidFill>
-                  <a:srgbClr val="FFFFFF"/>
-                </a:solidFill>
-                <a:latin typeface="Century Gothic"/>
-              </a:rPr>
-              <a:t>2</a:t>
-            </a:r>
-          </a:p>
-        </p:txBody>
-      </p:sp>
-      <p:sp>
-        <p:nvSpPr>
-          <p:cNvPr id="8" name="TextBox 7"/>
-          <p:cNvSpPr txBox="1"/>
-          <p:nvPr/>
-        </p:nvSpPr>
-        <p:spPr>
-          <a:xfrm>
-            <a:off x="1600200" y="3163824"/>
-            <a:ext cx="9509760" cy="822960"/>
-          </a:xfrm>
-          <a:prstGeom prst="rect">
-            <a:avLst/>
-          </a:prstGeom>
-          <a:noFill/>
-        </p:spPr>
-        <p:txBody>
-          <a:bodyPr wrap="square" anchor="t" lIns="0" rIns="0" tIns="0" bIns="0">
-            <a:spAutoFit/>
-          </a:bodyPr>
-          <a:lstStyle/>
-          <a:p>
-            <a:pPr algn="l">
-              <a:lnSpc>
-                <a:spcPct val="130000"/>
-              </a:lnSpc>
-            </a:pPr>
-            <a:r>
-              <a:rPr sz="1500" b="0" i="0">
-                <a:solidFill>
-                  <a:srgbClr val="1C1730"/>
-                </a:solidFill>
-                <a:latin typeface="Calibri"/>
-              </a:rPr>
-              <a:t>Verify the signature succeeds — then tamper with the message and confirm verification fails.</a:t>
-            </a:r>
-          </a:p>
-        </p:txBody>
-      </p:sp>
-      <p:sp>
-        <p:nvSpPr>
-          <p:cNvPr id="9" name="Oval 8"/>
-          <p:cNvSpPr/>
-          <p:nvPr/>
-        </p:nvSpPr>
-        <p:spPr>
-          <a:xfrm>
-            <a:off x="822960" y="4069080"/>
-            <a:ext cx="502920" cy="502920"/>
-          </a:xfrm>
-          <a:prstGeom prst="ellipse">
-            <a:avLst/>
-          </a:prstGeom>
-          <a:solidFill>
-            <a:srgbClr val="C67A1E"/>
-          </a:solidFill>
-          <a:ln>
-            <a:noFill/>
-          </a:ln>
-          <a:effectLst/>
-        </p:spPr>
-        <p:style>
-          <a:lnRef idx="1">
-            <a:schemeClr val="accent1"/>
-          </a:lnRef>
-          <a:fillRef idx="3">
-            <a:schemeClr val="accent1"/>
-          </a:fillRef>
-          <a:effectRef idx="2">
-            <a:schemeClr val="accent1"/>
-          </a:effectRef>
-          <a:fontRef idx="minor">
-            <a:schemeClr val="lt1"/>
-          </a:fontRef>
-        </p:style>
-        <p:txBody>
-          <a:bodyPr rtlCol="0" anchor="ctr" wrap="none"/>
-          <a:lstStyle/>
-          <a:p>
-            <a:pPr algn="ctr"/>
-            <a:r>
-              <a:rPr sz="1500" b="1">
-                <a:solidFill>
-                  <a:srgbClr val="FFFFFF"/>
-                </a:solidFill>
-                <a:latin typeface="Century Gothic"/>
-              </a:rPr>
-              <a:t>3</a:t>
-            </a:r>
-          </a:p>
-        </p:txBody>
-      </p:sp>
-      <p:sp>
-        <p:nvSpPr>
-          <p:cNvPr id="10" name="TextBox 9"/>
-          <p:cNvSpPr txBox="1"/>
-          <p:nvPr/>
-        </p:nvSpPr>
-        <p:spPr>
-          <a:xfrm>
-            <a:off x="1600200" y="4123944"/>
-            <a:ext cx="9509760" cy="822960"/>
-          </a:xfrm>
-          <a:prstGeom prst="rect">
-            <a:avLst/>
-          </a:prstGeom>
-          <a:noFill/>
-        </p:spPr>
-        <p:txBody>
-          <a:bodyPr wrap="square" anchor="t" lIns="0" rIns="0" tIns="0" bIns="0">
-            <a:spAutoFit/>
-          </a:bodyPr>
-          <a:lstStyle/>
-          <a:p>
-            <a:pPr algn="l">
-              <a:lnSpc>
-                <a:spcPct val="130000"/>
-              </a:lnSpc>
-            </a:pPr>
-            <a:r>
-              <a:rPr sz="1500" b="0" i="0">
-                <a:solidFill>
-                  <a:srgbClr val="1C1730"/>
-                </a:solidFill>
-                <a:latin typeface="Calibri"/>
-              </a:rPr>
-              <a:t>Repeat the same experiment on the Anders Brownworth public/private key demo.</a:t>
-            </a:r>
-          </a:p>
-        </p:txBody>
-      </p:sp>
-      <p:sp>
-        <p:nvSpPr>
-          <p:cNvPr id="11" name="Oval 10"/>
-          <p:cNvSpPr/>
-          <p:nvPr/>
-        </p:nvSpPr>
-        <p:spPr>
-          <a:xfrm>
-            <a:off x="822960" y="5029200"/>
-            <a:ext cx="502920" cy="502920"/>
-          </a:xfrm>
-          <a:prstGeom prst="ellipse">
-            <a:avLst/>
-          </a:prstGeom>
-          <a:solidFill>
-            <a:srgbClr val="C67A1E"/>
-          </a:solidFill>
-          <a:ln>
-            <a:noFill/>
-          </a:ln>
-          <a:effectLst/>
-        </p:spPr>
-        <p:style>
-          <a:lnRef idx="1">
-            <a:schemeClr val="accent1"/>
-          </a:lnRef>
-          <a:fillRef idx="3">
-            <a:schemeClr val="accent1"/>
-          </a:fillRef>
-          <a:effectRef idx="2">
-            <a:schemeClr val="accent1"/>
-          </a:effectRef>
-          <a:fontRef idx="minor">
-            <a:schemeClr val="lt1"/>
-          </a:fontRef>
-        </p:style>
-        <p:txBody>
-          <a:bodyPr rtlCol="0" anchor="ctr" wrap="none"/>
-          <a:lstStyle/>
-          <a:p>
-            <a:pPr algn="ctr"/>
-            <a:r>
-              <a:rPr sz="1500" b="1">
-                <a:solidFill>
-                  <a:srgbClr val="FFFFFF"/>
-                </a:solidFill>
-                <a:latin typeface="Century Gothic"/>
-              </a:rPr>
-              <a:t>4</a:t>
-            </a:r>
-          </a:p>
-        </p:txBody>
-      </p:sp>
-      <p:sp>
-        <p:nvSpPr>
-          <p:cNvPr id="12" name="TextBox 11"/>
-          <p:cNvSpPr txBox="1"/>
-          <p:nvPr/>
-        </p:nvSpPr>
-        <p:spPr>
-          <a:xfrm>
-            <a:off x="1600200" y="5084064"/>
-            <a:ext cx="9509760" cy="822960"/>
-          </a:xfrm>
-          <a:prstGeom prst="rect">
-            <a:avLst/>
-          </a:prstGeom>
-          <a:noFill/>
-        </p:spPr>
-        <p:txBody>
-          <a:bodyPr wrap="square" anchor="t" lIns="0" rIns="0" tIns="0" bIns="0">
-            <a:spAutoFit/>
-          </a:bodyPr>
-          <a:lstStyle/>
-          <a:p>
-            <a:pPr algn="l">
-              <a:lnSpc>
-                <a:spcPct val="130000"/>
-              </a:lnSpc>
-            </a:pPr>
-            <a:r>
-              <a:rPr sz="1500" b="0" i="0">
-                <a:solidFill>
-                  <a:srgbClr val="1C1730"/>
-                </a:solidFill>
-                <a:latin typeface="Calibri"/>
-              </a:rPr>
-              <a:t>Open MetaMask and notice: every "Confirm" click is your private key signing, invisibly, behind the scenes.</a:t>
-            </a:r>
-          </a:p>
-        </p:txBody>
-      </p:sp>
-      <p:sp>
-        <p:nvSpPr>
-          <p:cNvPr id="13" name="TextBox 12"/>
+              <a:t>Two different jobs: encryption (public key locks, private key unlocks — for confidentiality) vs. signing (private key signs, public key verifies — for authenticity). Blockchain wallets use almost entirely signing. Your transaction is never secret — “send 0.1 ETH to X” is fully readable on a block explorer. What's proven is WHO authorized it, not WHAT it says.</a:t>
+            </a:r>
+          </a:p>
+        </p:txBody>
+      </p:sp>
+      <p:sp>
+        <p:nvSpPr>
+          <p:cNvPr id="7" name="TextBox 6"/>
           <p:cNvSpPr txBox="1"/>
           <p:nvPr/>
         </p:nvSpPr>
@@ -6120,7 +6128,7 @@
                 </a:solidFill>
                 <a:latin typeface="Consolas"/>
               </a:rPr>
-              <a:t>14 / 15</a:t>
+              <a:t>14 / 18</a:t>
             </a:r>
           </a:p>
         </p:txBody>
@@ -6158,6 +6166,1330 @@
             <a:avLst/>
           </a:prstGeom>
           <a:solidFill>
+            <a:srgbClr val="F8F6F2"/>
+          </a:solidFill>
+          <a:ln>
+            <a:noFill/>
+          </a:ln>
+          <a:effectLst/>
+        </p:spPr>
+        <p:style>
+          <a:lnRef idx="1">
+            <a:schemeClr val="accent1"/>
+          </a:lnRef>
+          <a:fillRef idx="3">
+            <a:schemeClr val="accent1"/>
+          </a:fillRef>
+          <a:effectRef idx="2">
+            <a:schemeClr val="accent1"/>
+          </a:effectRef>
+          <a:fontRef idx="minor">
+            <a:schemeClr val="lt1"/>
+          </a:fontRef>
+        </p:style>
+        <p:txBody>
+          <a:bodyPr rtlCol="0" anchor="ctr"/>
+          <a:lstStyle/>
+          <a:p>
+            <a:pPr algn="ctr"/>
+          </a:p>
+        </p:txBody>
+      </p:sp>
+      <p:sp>
+        <p:nvSpPr>
+          <p:cNvPr id="3" name="TextBox 2"/>
+          <p:cNvSpPr txBox="1"/>
+          <p:nvPr/>
+        </p:nvSpPr>
+        <p:spPr>
+          <a:xfrm>
+            <a:off x="822960" y="640080"/>
+            <a:ext cx="10058400" cy="365760"/>
+          </a:xfrm>
+          <a:prstGeom prst="rect">
+            <a:avLst/>
+          </a:prstGeom>
+          <a:noFill/>
+        </p:spPr>
+        <p:txBody>
+          <a:bodyPr wrap="square" anchor="t" lIns="0" rIns="0" tIns="0" bIns="0">
+            <a:spAutoFit/>
+          </a:bodyPr>
+          <a:lstStyle/>
+          <a:p>
+            <a:pPr algn="l">
+              <a:lnSpc>
+                <a:spcPct val="115000"/>
+              </a:lnSpc>
+            </a:pPr>
+            <a:r>
+              <a:rPr sz="1300" b="1" i="0">
+                <a:solidFill>
+                  <a:srgbClr val="C67A1E"/>
+                </a:solidFill>
+                <a:latin typeface="Calibri"/>
+              </a:rPr>
+              <a:t>REAL-LIFE ANALOGY</a:t>
+            </a:r>
+          </a:p>
+        </p:txBody>
+      </p:sp>
+      <p:sp>
+        <p:nvSpPr>
+          <p:cNvPr id="4" name="TextBox 3"/>
+          <p:cNvSpPr txBox="1"/>
+          <p:nvPr/>
+        </p:nvSpPr>
+        <p:spPr>
+          <a:xfrm>
+            <a:off x="822960" y="1097280"/>
+            <a:ext cx="10332720" cy="1005840"/>
+          </a:xfrm>
+          <a:prstGeom prst="rect">
+            <a:avLst/>
+          </a:prstGeom>
+          <a:noFill/>
+        </p:spPr>
+        <p:txBody>
+          <a:bodyPr wrap="square" anchor="t" lIns="0" rIns="0" tIns="0" bIns="0">
+            <a:spAutoFit/>
+          </a:bodyPr>
+          <a:lstStyle/>
+          <a:p>
+            <a:pPr algn="l">
+              <a:lnSpc>
+                <a:spcPct val="105000"/>
+              </a:lnSpc>
+            </a:pPr>
+            <a:r>
+              <a:rPr sz="3000" b="1" i="0">
+                <a:solidFill>
+                  <a:srgbClr val="1C1730"/>
+                </a:solidFill>
+                <a:latin typeface="Century Gothic"/>
+              </a:rPr>
+              <a:t>A Signet Ring And A Reference Card</a:t>
+            </a:r>
+          </a:p>
+        </p:txBody>
+      </p:sp>
+      <p:sp>
+        <p:nvSpPr>
+          <p:cNvPr id="5" name="Rectangle 4"/>
+          <p:cNvSpPr/>
+          <p:nvPr/>
+        </p:nvSpPr>
+        <p:spPr>
+          <a:xfrm>
+            <a:off x="822960" y="2286000"/>
+            <a:ext cx="91440" cy="3657600"/>
+          </a:xfrm>
+          <a:prstGeom prst="rect">
+            <a:avLst/>
+          </a:prstGeom>
+          <a:solidFill>
+            <a:srgbClr val="C67A1E"/>
+          </a:solidFill>
+          <a:ln>
+            <a:noFill/>
+          </a:ln>
+          <a:effectLst/>
+        </p:spPr>
+        <p:style>
+          <a:lnRef idx="1">
+            <a:schemeClr val="accent1"/>
+          </a:lnRef>
+          <a:fillRef idx="3">
+            <a:schemeClr val="accent1"/>
+          </a:fillRef>
+          <a:effectRef idx="2">
+            <a:schemeClr val="accent1"/>
+          </a:effectRef>
+          <a:fontRef idx="minor">
+            <a:schemeClr val="lt1"/>
+          </a:fontRef>
+        </p:style>
+        <p:txBody>
+          <a:bodyPr rtlCol="0" anchor="ctr"/>
+          <a:lstStyle/>
+          <a:p>
+            <a:pPr algn="ctr"/>
+          </a:p>
+        </p:txBody>
+      </p:sp>
+      <p:sp>
+        <p:nvSpPr>
+          <p:cNvPr id="6" name="TextBox 5"/>
+          <p:cNvSpPr txBox="1"/>
+          <p:nvPr/>
+        </p:nvSpPr>
+        <p:spPr>
+          <a:xfrm>
+            <a:off x="1280160" y="2377440"/>
+            <a:ext cx="9784080" cy="3566160"/>
+          </a:xfrm>
+          <a:prstGeom prst="rect">
+            <a:avLst/>
+          </a:prstGeom>
+          <a:noFill/>
+        </p:spPr>
+        <p:txBody>
+          <a:bodyPr wrap="square" anchor="t" lIns="0" rIns="0" tIns="0" bIns="0">
+            <a:spAutoFit/>
+          </a:bodyPr>
+          <a:lstStyle/>
+          <a:p>
+            <a:pPr algn="l">
+              <a:lnSpc>
+                <a:spcPct val="160000"/>
+              </a:lnSpc>
+            </a:pPr>
+            <a:r>
+              <a:rPr sz="1800" b="0" i="0">
+                <a:solidFill>
+                  <a:srgbClr val="1C1730"/>
+                </a:solidFill>
+                <a:latin typeface="Calibri"/>
+              </a:rPr>
+              <a:t>Your private key is a unique, impossible-to-forge signature stamp — a wax-seal signet ring only you own. Your public key is a reference card everyone holds, showing exactly what your genuine seal impression looks like. Anyone can compare a seal against the card; nobody can forge the ring's impression from the card alone.</a:t>
+            </a:r>
+          </a:p>
+        </p:txBody>
+      </p:sp>
+      <p:sp>
+        <p:nvSpPr>
+          <p:cNvPr id="7" name="TextBox 6"/>
+          <p:cNvSpPr txBox="1"/>
+          <p:nvPr/>
+        </p:nvSpPr>
+        <p:spPr>
+          <a:xfrm>
+            <a:off x="9966960" y="502920"/>
+            <a:ext cx="1371600" cy="320040"/>
+          </a:xfrm>
+          <a:prstGeom prst="rect">
+            <a:avLst/>
+          </a:prstGeom>
+          <a:noFill/>
+        </p:spPr>
+        <p:txBody>
+          <a:bodyPr wrap="square" anchor="t" lIns="0" rIns="0" tIns="0" bIns="0">
+            <a:spAutoFit/>
+          </a:bodyPr>
+          <a:lstStyle/>
+          <a:p>
+            <a:pPr algn="r">
+              <a:lnSpc>
+                <a:spcPct val="115000"/>
+              </a:lnSpc>
+            </a:pPr>
+            <a:r>
+              <a:rPr sz="1100" b="1" i="0">
+                <a:solidFill>
+                  <a:srgbClr val="5C576E"/>
+                </a:solidFill>
+                <a:latin typeface="Consolas"/>
+              </a:rPr>
+              <a:t>15 / 18</a:t>
+            </a:r>
+          </a:p>
+        </p:txBody>
+      </p:sp>
+    </p:spTree>
+  </p:cSld>
+  <p:clrMapOvr>
+    <a:masterClrMapping/>
+  </p:clrMapOvr>
+</p:sld>
+</file>
+
+<file path=ppt/slides/slide16.xml><?xml version="1.0" encoding="utf-8"?>
+<p:sld xmlns:a="http://schemas.openxmlformats.org/drawingml/2006/main" xmlns:p="http://schemas.openxmlformats.org/presentationml/2006/main" xmlns:r="http://schemas.openxmlformats.org/officeDocument/2006/relationships">
+  <p:cSld>
+    <p:spTree>
+      <p:nvGrpSpPr>
+        <p:cNvPr id="1" name=""/>
+        <p:cNvGrpSpPr/>
+        <p:nvPr/>
+      </p:nvGrpSpPr>
+      <p:grpSpPr/>
+      <p:sp>
+        <p:nvSpPr>
+          <p:cNvPr id="2" name="Rectangle 1"/>
+          <p:cNvSpPr/>
+          <p:nvPr/>
+        </p:nvSpPr>
+        <p:spPr>
+          <a:xfrm>
+            <a:off x="0" y="0"/>
+            <a:ext cx="12191695" cy="6858000"/>
+          </a:xfrm>
+          <a:prstGeom prst="rect">
+            <a:avLst/>
+          </a:prstGeom>
+          <a:solidFill>
+            <a:srgbClr val="F8F6F2"/>
+          </a:solidFill>
+          <a:ln>
+            <a:noFill/>
+          </a:ln>
+          <a:effectLst/>
+        </p:spPr>
+        <p:style>
+          <a:lnRef idx="1">
+            <a:schemeClr val="accent1"/>
+          </a:lnRef>
+          <a:fillRef idx="3">
+            <a:schemeClr val="accent1"/>
+          </a:fillRef>
+          <a:effectRef idx="2">
+            <a:schemeClr val="accent1"/>
+          </a:effectRef>
+          <a:fontRef idx="minor">
+            <a:schemeClr val="lt1"/>
+          </a:fontRef>
+        </p:style>
+        <p:txBody>
+          <a:bodyPr rtlCol="0" anchor="ctr"/>
+          <a:lstStyle/>
+          <a:p>
+            <a:pPr algn="ctr"/>
+          </a:p>
+        </p:txBody>
+      </p:sp>
+      <p:sp>
+        <p:nvSpPr>
+          <p:cNvPr id="3" name="TextBox 2"/>
+          <p:cNvSpPr txBox="1"/>
+          <p:nvPr/>
+        </p:nvSpPr>
+        <p:spPr>
+          <a:xfrm>
+            <a:off x="822960" y="640080"/>
+            <a:ext cx="10058400" cy="365760"/>
+          </a:xfrm>
+          <a:prstGeom prst="rect">
+            <a:avLst/>
+          </a:prstGeom>
+          <a:noFill/>
+        </p:spPr>
+        <p:txBody>
+          <a:bodyPr wrap="square" anchor="t" lIns="0" rIns="0" tIns="0" bIns="0">
+            <a:spAutoFit/>
+          </a:bodyPr>
+          <a:lstStyle/>
+          <a:p>
+            <a:pPr algn="l">
+              <a:lnSpc>
+                <a:spcPct val="115000"/>
+              </a:lnSpc>
+            </a:pPr>
+            <a:r>
+              <a:rPr sz="1300" b="1" i="0">
+                <a:solidFill>
+                  <a:srgbClr val="C67A1E"/>
+                </a:solidFill>
+                <a:latin typeface="Calibri"/>
+              </a:rPr>
+              <a:t>COMMON MISCONCEPTIONS</a:t>
+            </a:r>
+          </a:p>
+        </p:txBody>
+      </p:sp>
+      <p:sp>
+        <p:nvSpPr>
+          <p:cNvPr id="4" name="TextBox 3"/>
+          <p:cNvSpPr txBox="1"/>
+          <p:nvPr/>
+        </p:nvSpPr>
+        <p:spPr>
+          <a:xfrm>
+            <a:off x="822960" y="1051560"/>
+            <a:ext cx="9601200" cy="1005840"/>
+          </a:xfrm>
+          <a:prstGeom prst="rect">
+            <a:avLst/>
+          </a:prstGeom>
+          <a:noFill/>
+        </p:spPr>
+        <p:txBody>
+          <a:bodyPr wrap="square" anchor="t" lIns="0" rIns="0" tIns="0" bIns="0">
+            <a:spAutoFit/>
+          </a:bodyPr>
+          <a:lstStyle/>
+          <a:p>
+            <a:pPr algn="l">
+              <a:lnSpc>
+                <a:spcPct val="105000"/>
+              </a:lnSpc>
+            </a:pPr>
+            <a:r>
+              <a:rPr sz="3000" b="1" i="0">
+                <a:solidFill>
+                  <a:srgbClr val="1C1730"/>
+                </a:solidFill>
+                <a:latin typeface="Century Gothic"/>
+              </a:rPr>
+              <a:t>Where People Get Tripped Up</a:t>
+            </a:r>
+          </a:p>
+        </p:txBody>
+      </p:sp>
+      <p:sp>
+        <p:nvSpPr>
+          <p:cNvPr id="5" name="Rounded Rectangle 4"/>
+          <p:cNvSpPr/>
+          <p:nvPr/>
+        </p:nvSpPr>
+        <p:spPr>
+          <a:xfrm>
+            <a:off x="822960" y="2057400"/>
+            <a:ext cx="10515600" cy="1874519"/>
+          </a:xfrm>
+          <a:prstGeom prst="roundRect">
+            <a:avLst>
+              <a:gd name="adj" fmla="val 5000"/>
+            </a:avLst>
+          </a:prstGeom>
+          <a:solidFill>
+            <a:srgbClr val="FFFFFF"/>
+          </a:solidFill>
+          <a:ln>
+            <a:noFill/>
+          </a:ln>
+          <a:effectLst/>
+        </p:spPr>
+        <p:style>
+          <a:lnRef idx="1">
+            <a:schemeClr val="accent1"/>
+          </a:lnRef>
+          <a:fillRef idx="3">
+            <a:schemeClr val="accent1"/>
+          </a:fillRef>
+          <a:effectRef idx="2">
+            <a:schemeClr val="accent1"/>
+          </a:effectRef>
+          <a:fontRef idx="minor">
+            <a:schemeClr val="lt1"/>
+          </a:fontRef>
+        </p:style>
+        <p:txBody>
+          <a:bodyPr rtlCol="0" anchor="ctr"/>
+          <a:lstStyle/>
+          <a:p>
+            <a:pPr algn="ctr"/>
+          </a:p>
+        </p:txBody>
+      </p:sp>
+      <p:sp>
+        <p:nvSpPr>
+          <p:cNvPr id="6" name="Rectangle 5"/>
+          <p:cNvSpPr/>
+          <p:nvPr/>
+        </p:nvSpPr>
+        <p:spPr>
+          <a:xfrm>
+            <a:off x="822960" y="2057400"/>
+            <a:ext cx="82296" cy="1874519"/>
+          </a:xfrm>
+          <a:prstGeom prst="rect">
+            <a:avLst/>
+          </a:prstGeom>
+          <a:solidFill>
+            <a:srgbClr val="C67A1E"/>
+          </a:solidFill>
+          <a:ln>
+            <a:noFill/>
+          </a:ln>
+          <a:effectLst/>
+        </p:spPr>
+        <p:style>
+          <a:lnRef idx="1">
+            <a:schemeClr val="accent1"/>
+          </a:lnRef>
+          <a:fillRef idx="3">
+            <a:schemeClr val="accent1"/>
+          </a:fillRef>
+          <a:effectRef idx="2">
+            <a:schemeClr val="accent1"/>
+          </a:effectRef>
+          <a:fontRef idx="minor">
+            <a:schemeClr val="lt1"/>
+          </a:fontRef>
+        </p:style>
+        <p:txBody>
+          <a:bodyPr rtlCol="0" anchor="ctr"/>
+          <a:lstStyle/>
+          <a:p>
+            <a:pPr algn="ctr"/>
+          </a:p>
+        </p:txBody>
+      </p:sp>
+      <p:sp>
+        <p:nvSpPr>
+          <p:cNvPr id="7" name="TextBox 6"/>
+          <p:cNvSpPr txBox="1"/>
+          <p:nvPr/>
+        </p:nvSpPr>
+        <p:spPr>
+          <a:xfrm>
+            <a:off x="1188720" y="2258568"/>
+            <a:ext cx="9784080" cy="457200"/>
+          </a:xfrm>
+          <a:prstGeom prst="rect">
+            <a:avLst/>
+          </a:prstGeom>
+          <a:noFill/>
+        </p:spPr>
+        <p:txBody>
+          <a:bodyPr wrap="square" anchor="t" lIns="0" rIns="0" tIns="0" bIns="0">
+            <a:spAutoFit/>
+          </a:bodyPr>
+          <a:lstStyle/>
+          <a:p>
+            <a:pPr algn="l">
+              <a:lnSpc>
+                <a:spcPct val="115000"/>
+              </a:lnSpc>
+            </a:pPr>
+            <a:r>
+              <a:rPr sz="1700" b="1" i="0">
+                <a:solidFill>
+                  <a:srgbClr val="C67A1E"/>
+                </a:solidFill>
+                <a:latin typeface="Century Gothic"/>
+              </a:rPr>
+              <a:t>“My wallet address IS my public key.”</a:t>
+            </a:r>
+          </a:p>
+        </p:txBody>
+      </p:sp>
+      <p:sp>
+        <p:nvSpPr>
+          <p:cNvPr id="8" name="TextBox 7"/>
+          <p:cNvSpPr txBox="1"/>
+          <p:nvPr/>
+        </p:nvSpPr>
+        <p:spPr>
+          <a:xfrm>
+            <a:off x="1188720" y="2743200"/>
+            <a:ext cx="9784080" cy="1097280"/>
+          </a:xfrm>
+          <a:prstGeom prst="rect">
+            <a:avLst/>
+          </a:prstGeom>
+          <a:noFill/>
+        </p:spPr>
+        <p:txBody>
+          <a:bodyPr wrap="square" anchor="t" lIns="0" rIns="0" tIns="0" bIns="0">
+            <a:spAutoFit/>
+          </a:bodyPr>
+          <a:lstStyle/>
+          <a:p>
+            <a:pPr algn="l">
+              <a:lnSpc>
+                <a:spcPct val="135000"/>
+              </a:lnSpc>
+            </a:pPr>
+            <a:r>
+              <a:rPr sz="1300" b="0" i="0">
+                <a:solidFill>
+                  <a:srgbClr val="5C576E"/>
+                </a:solidFill>
+                <a:latin typeface="Calibri"/>
+              </a:rPr>
+              <a:t>Not quite — your address is a hash of your public key. The full chain is public key → hash → address, one more one-way step layered on top.</a:t>
+            </a:r>
+          </a:p>
+        </p:txBody>
+      </p:sp>
+      <p:sp>
+        <p:nvSpPr>
+          <p:cNvPr id="9" name="Rounded Rectangle 8"/>
+          <p:cNvSpPr/>
+          <p:nvPr/>
+        </p:nvSpPr>
+        <p:spPr>
+          <a:xfrm>
+            <a:off x="822960" y="4160520"/>
+            <a:ext cx="10515600" cy="1874519"/>
+          </a:xfrm>
+          <a:prstGeom prst="roundRect">
+            <a:avLst>
+              <a:gd name="adj" fmla="val 5000"/>
+            </a:avLst>
+          </a:prstGeom>
+          <a:solidFill>
+            <a:srgbClr val="FFFFFF"/>
+          </a:solidFill>
+          <a:ln>
+            <a:noFill/>
+          </a:ln>
+          <a:effectLst/>
+        </p:spPr>
+        <p:style>
+          <a:lnRef idx="1">
+            <a:schemeClr val="accent1"/>
+          </a:lnRef>
+          <a:fillRef idx="3">
+            <a:schemeClr val="accent1"/>
+          </a:fillRef>
+          <a:effectRef idx="2">
+            <a:schemeClr val="accent1"/>
+          </a:effectRef>
+          <a:fontRef idx="minor">
+            <a:schemeClr val="lt1"/>
+          </a:fontRef>
+        </p:style>
+        <p:txBody>
+          <a:bodyPr rtlCol="0" anchor="ctr"/>
+          <a:lstStyle/>
+          <a:p>
+            <a:pPr algn="ctr"/>
+          </a:p>
+        </p:txBody>
+      </p:sp>
+      <p:sp>
+        <p:nvSpPr>
+          <p:cNvPr id="10" name="Rectangle 9"/>
+          <p:cNvSpPr/>
+          <p:nvPr/>
+        </p:nvSpPr>
+        <p:spPr>
+          <a:xfrm>
+            <a:off x="822960" y="4160520"/>
+            <a:ext cx="82296" cy="1874519"/>
+          </a:xfrm>
+          <a:prstGeom prst="rect">
+            <a:avLst/>
+          </a:prstGeom>
+          <a:solidFill>
+            <a:srgbClr val="C67A1E"/>
+          </a:solidFill>
+          <a:ln>
+            <a:noFill/>
+          </a:ln>
+          <a:effectLst/>
+        </p:spPr>
+        <p:style>
+          <a:lnRef idx="1">
+            <a:schemeClr val="accent1"/>
+          </a:lnRef>
+          <a:fillRef idx="3">
+            <a:schemeClr val="accent1"/>
+          </a:fillRef>
+          <a:effectRef idx="2">
+            <a:schemeClr val="accent1"/>
+          </a:effectRef>
+          <a:fontRef idx="minor">
+            <a:schemeClr val="lt1"/>
+          </a:fontRef>
+        </p:style>
+        <p:txBody>
+          <a:bodyPr rtlCol="0" anchor="ctr"/>
+          <a:lstStyle/>
+          <a:p>
+            <a:pPr algn="ctr"/>
+          </a:p>
+        </p:txBody>
+      </p:sp>
+      <p:sp>
+        <p:nvSpPr>
+          <p:cNvPr id="11" name="TextBox 10"/>
+          <p:cNvSpPr txBox="1"/>
+          <p:nvPr/>
+        </p:nvSpPr>
+        <p:spPr>
+          <a:xfrm>
+            <a:off x="1188720" y="4361688"/>
+            <a:ext cx="9784080" cy="457200"/>
+          </a:xfrm>
+          <a:prstGeom prst="rect">
+            <a:avLst/>
+          </a:prstGeom>
+          <a:noFill/>
+        </p:spPr>
+        <p:txBody>
+          <a:bodyPr wrap="square" anchor="t" lIns="0" rIns="0" tIns="0" bIns="0">
+            <a:spAutoFit/>
+          </a:bodyPr>
+          <a:lstStyle/>
+          <a:p>
+            <a:pPr algn="l">
+              <a:lnSpc>
+                <a:spcPct val="115000"/>
+              </a:lnSpc>
+            </a:pPr>
+            <a:r>
+              <a:rPr sz="1700" b="1" i="0">
+                <a:solidFill>
+                  <a:srgbClr val="C67A1E"/>
+                </a:solidFill>
+                <a:latin typeface="Century Gothic"/>
+              </a:rPr>
+              <a:t>“If I lose my private key, I can reset it like a password.”</a:t>
+            </a:r>
+          </a:p>
+        </p:txBody>
+      </p:sp>
+      <p:sp>
+        <p:nvSpPr>
+          <p:cNvPr id="12" name="TextBox 11"/>
+          <p:cNvSpPr txBox="1"/>
+          <p:nvPr/>
+        </p:nvSpPr>
+        <p:spPr>
+          <a:xfrm>
+            <a:off x="1188720" y="4846320"/>
+            <a:ext cx="9784080" cy="1097280"/>
+          </a:xfrm>
+          <a:prstGeom prst="rect">
+            <a:avLst/>
+          </a:prstGeom>
+          <a:noFill/>
+        </p:spPr>
+        <p:txBody>
+          <a:bodyPr wrap="square" anchor="t" lIns="0" rIns="0" tIns="0" bIns="0">
+            <a:spAutoFit/>
+          </a:bodyPr>
+          <a:lstStyle/>
+          <a:p>
+            <a:pPr algn="l">
+              <a:lnSpc>
+                <a:spcPct val="135000"/>
+              </a:lnSpc>
+            </a:pPr>
+            <a:r>
+              <a:rPr sz="1300" b="0" i="0">
+                <a:solidFill>
+                  <a:srgbClr val="5C576E"/>
+                </a:solidFill>
+                <a:latin typeface="Calibri"/>
+              </a:rPr>
+              <a:t>There is no reset. No recovery mechanism is built into the protocol — only a backup phrase, if you saved one in advance.</a:t>
+            </a:r>
+          </a:p>
+        </p:txBody>
+      </p:sp>
+      <p:sp>
+        <p:nvSpPr>
+          <p:cNvPr id="13" name="TextBox 12"/>
+          <p:cNvSpPr txBox="1"/>
+          <p:nvPr/>
+        </p:nvSpPr>
+        <p:spPr>
+          <a:xfrm>
+            <a:off x="9966960" y="502920"/>
+            <a:ext cx="1371600" cy="320040"/>
+          </a:xfrm>
+          <a:prstGeom prst="rect">
+            <a:avLst/>
+          </a:prstGeom>
+          <a:noFill/>
+        </p:spPr>
+        <p:txBody>
+          <a:bodyPr wrap="square" anchor="t" lIns="0" rIns="0" tIns="0" bIns="0">
+            <a:spAutoFit/>
+          </a:bodyPr>
+          <a:lstStyle/>
+          <a:p>
+            <a:pPr algn="r">
+              <a:lnSpc>
+                <a:spcPct val="115000"/>
+              </a:lnSpc>
+            </a:pPr>
+            <a:r>
+              <a:rPr sz="1100" b="1" i="0">
+                <a:solidFill>
+                  <a:srgbClr val="5C576E"/>
+                </a:solidFill>
+                <a:latin typeface="Consolas"/>
+              </a:rPr>
+              <a:t>16 / 18</a:t>
+            </a:r>
+          </a:p>
+        </p:txBody>
+      </p:sp>
+    </p:spTree>
+  </p:cSld>
+  <p:clrMapOvr>
+    <a:masterClrMapping/>
+  </p:clrMapOvr>
+</p:sld>
+</file>
+
+<file path=ppt/slides/slide17.xml><?xml version="1.0" encoding="utf-8"?>
+<p:sld xmlns:a="http://schemas.openxmlformats.org/drawingml/2006/main" xmlns:p="http://schemas.openxmlformats.org/presentationml/2006/main" xmlns:r="http://schemas.openxmlformats.org/officeDocument/2006/relationships">
+  <p:cSld>
+    <p:spTree>
+      <p:nvGrpSpPr>
+        <p:cNvPr id="1" name=""/>
+        <p:cNvGrpSpPr/>
+        <p:nvPr/>
+      </p:nvGrpSpPr>
+      <p:grpSpPr/>
+      <p:sp>
+        <p:nvSpPr>
+          <p:cNvPr id="2" name="Rectangle 1"/>
+          <p:cNvSpPr/>
+          <p:nvPr/>
+        </p:nvSpPr>
+        <p:spPr>
+          <a:xfrm>
+            <a:off x="0" y="0"/>
+            <a:ext cx="12191695" cy="6858000"/>
+          </a:xfrm>
+          <a:prstGeom prst="rect">
+            <a:avLst/>
+          </a:prstGeom>
+          <a:solidFill>
+            <a:srgbClr val="F8F6F2"/>
+          </a:solidFill>
+          <a:ln>
+            <a:noFill/>
+          </a:ln>
+          <a:effectLst/>
+        </p:spPr>
+        <p:style>
+          <a:lnRef idx="1">
+            <a:schemeClr val="accent1"/>
+          </a:lnRef>
+          <a:fillRef idx="3">
+            <a:schemeClr val="accent1"/>
+          </a:fillRef>
+          <a:effectRef idx="2">
+            <a:schemeClr val="accent1"/>
+          </a:effectRef>
+          <a:fontRef idx="minor">
+            <a:schemeClr val="lt1"/>
+          </a:fontRef>
+        </p:style>
+        <p:txBody>
+          <a:bodyPr rtlCol="0" anchor="ctr"/>
+          <a:lstStyle/>
+          <a:p>
+            <a:pPr algn="ctr"/>
+          </a:p>
+        </p:txBody>
+      </p:sp>
+      <p:sp>
+        <p:nvSpPr>
+          <p:cNvPr id="3" name="TextBox 2"/>
+          <p:cNvSpPr txBox="1"/>
+          <p:nvPr/>
+        </p:nvSpPr>
+        <p:spPr>
+          <a:xfrm>
+            <a:off x="822960" y="640080"/>
+            <a:ext cx="10058400" cy="365760"/>
+          </a:xfrm>
+          <a:prstGeom prst="rect">
+            <a:avLst/>
+          </a:prstGeom>
+          <a:noFill/>
+        </p:spPr>
+        <p:txBody>
+          <a:bodyPr wrap="square" anchor="t" lIns="0" rIns="0" tIns="0" bIns="0">
+            <a:spAutoFit/>
+          </a:bodyPr>
+          <a:lstStyle/>
+          <a:p>
+            <a:pPr algn="l">
+              <a:lnSpc>
+                <a:spcPct val="115000"/>
+              </a:lnSpc>
+            </a:pPr>
+            <a:r>
+              <a:rPr sz="1300" b="1" i="0">
+                <a:solidFill>
+                  <a:srgbClr val="C67A1E"/>
+                </a:solidFill>
+                <a:latin typeface="Calibri"/>
+              </a:rPr>
+              <a:t>HANDS-ON PRACTICE</a:t>
+            </a:r>
+          </a:p>
+        </p:txBody>
+      </p:sp>
+      <p:sp>
+        <p:nvSpPr>
+          <p:cNvPr id="4" name="TextBox 3"/>
+          <p:cNvSpPr txBox="1"/>
+          <p:nvPr/>
+        </p:nvSpPr>
+        <p:spPr>
+          <a:xfrm>
+            <a:off x="822960" y="1051560"/>
+            <a:ext cx="9601200" cy="1005840"/>
+          </a:xfrm>
+          <a:prstGeom prst="rect">
+            <a:avLst/>
+          </a:prstGeom>
+          <a:noFill/>
+        </p:spPr>
+        <p:txBody>
+          <a:bodyPr wrap="square" anchor="t" lIns="0" rIns="0" tIns="0" bIns="0">
+            <a:spAutoFit/>
+          </a:bodyPr>
+          <a:lstStyle/>
+          <a:p>
+            <a:pPr algn="l">
+              <a:lnSpc>
+                <a:spcPct val="105000"/>
+              </a:lnSpc>
+            </a:pPr>
+            <a:r>
+              <a:rPr sz="3200" b="1" i="0">
+                <a:solidFill>
+                  <a:srgbClr val="1C1730"/>
+                </a:solidFill>
+                <a:latin typeface="Century Gothic"/>
+              </a:rPr>
+              <a:t>Do This Now</a:t>
+            </a:r>
+          </a:p>
+        </p:txBody>
+      </p:sp>
+      <p:sp>
+        <p:nvSpPr>
+          <p:cNvPr id="5" name="Oval 4"/>
+          <p:cNvSpPr/>
+          <p:nvPr/>
+        </p:nvSpPr>
+        <p:spPr>
+          <a:xfrm>
+            <a:off x="822960" y="2148840"/>
+            <a:ext cx="502920" cy="502920"/>
+          </a:xfrm>
+          <a:prstGeom prst="ellipse">
+            <a:avLst/>
+          </a:prstGeom>
+          <a:solidFill>
+            <a:srgbClr val="C67A1E"/>
+          </a:solidFill>
+          <a:ln>
+            <a:noFill/>
+          </a:ln>
+          <a:effectLst/>
+        </p:spPr>
+        <p:style>
+          <a:lnRef idx="1">
+            <a:schemeClr val="accent1"/>
+          </a:lnRef>
+          <a:fillRef idx="3">
+            <a:schemeClr val="accent1"/>
+          </a:fillRef>
+          <a:effectRef idx="2">
+            <a:schemeClr val="accent1"/>
+          </a:effectRef>
+          <a:fontRef idx="minor">
+            <a:schemeClr val="lt1"/>
+          </a:fontRef>
+        </p:style>
+        <p:txBody>
+          <a:bodyPr rtlCol="0" anchor="ctr" wrap="none"/>
+          <a:lstStyle/>
+          <a:p>
+            <a:pPr algn="ctr"/>
+            <a:r>
+              <a:rPr sz="1500" b="1">
+                <a:solidFill>
+                  <a:srgbClr val="FFFFFF"/>
+                </a:solidFill>
+                <a:latin typeface="Century Gothic"/>
+              </a:rPr>
+              <a:t>1</a:t>
+            </a:r>
+          </a:p>
+        </p:txBody>
+      </p:sp>
+      <p:sp>
+        <p:nvSpPr>
+          <p:cNvPr id="6" name="TextBox 5"/>
+          <p:cNvSpPr txBox="1"/>
+          <p:nvPr/>
+        </p:nvSpPr>
+        <p:spPr>
+          <a:xfrm>
+            <a:off x="1600200" y="2203704"/>
+            <a:ext cx="9509760" cy="822960"/>
+          </a:xfrm>
+          <a:prstGeom prst="rect">
+            <a:avLst/>
+          </a:prstGeom>
+          <a:noFill/>
+        </p:spPr>
+        <p:txBody>
+          <a:bodyPr wrap="square" anchor="t" lIns="0" rIns="0" tIns="0" bIns="0">
+            <a:spAutoFit/>
+          </a:bodyPr>
+          <a:lstStyle/>
+          <a:p>
+            <a:pPr algn="l">
+              <a:lnSpc>
+                <a:spcPct val="130000"/>
+              </a:lnSpc>
+            </a:pPr>
+            <a:r>
+              <a:rPr sz="1500" b="0" i="0">
+                <a:solidFill>
+                  <a:srgbClr val="1C1730"/>
+                </a:solidFill>
+                <a:latin typeface="Calibri"/>
+              </a:rPr>
+              <a:t>Generate a real keypair with openssl and sign a message of your own choosing.</a:t>
+            </a:r>
+          </a:p>
+        </p:txBody>
+      </p:sp>
+      <p:sp>
+        <p:nvSpPr>
+          <p:cNvPr id="7" name="Oval 6"/>
+          <p:cNvSpPr/>
+          <p:nvPr/>
+        </p:nvSpPr>
+        <p:spPr>
+          <a:xfrm>
+            <a:off x="822960" y="3108960"/>
+            <a:ext cx="502920" cy="502920"/>
+          </a:xfrm>
+          <a:prstGeom prst="ellipse">
+            <a:avLst/>
+          </a:prstGeom>
+          <a:solidFill>
+            <a:srgbClr val="C67A1E"/>
+          </a:solidFill>
+          <a:ln>
+            <a:noFill/>
+          </a:ln>
+          <a:effectLst/>
+        </p:spPr>
+        <p:style>
+          <a:lnRef idx="1">
+            <a:schemeClr val="accent1"/>
+          </a:lnRef>
+          <a:fillRef idx="3">
+            <a:schemeClr val="accent1"/>
+          </a:fillRef>
+          <a:effectRef idx="2">
+            <a:schemeClr val="accent1"/>
+          </a:effectRef>
+          <a:fontRef idx="minor">
+            <a:schemeClr val="lt1"/>
+          </a:fontRef>
+        </p:style>
+        <p:txBody>
+          <a:bodyPr rtlCol="0" anchor="ctr" wrap="none"/>
+          <a:lstStyle/>
+          <a:p>
+            <a:pPr algn="ctr"/>
+            <a:r>
+              <a:rPr sz="1500" b="1">
+                <a:solidFill>
+                  <a:srgbClr val="FFFFFF"/>
+                </a:solidFill>
+                <a:latin typeface="Century Gothic"/>
+              </a:rPr>
+              <a:t>2</a:t>
+            </a:r>
+          </a:p>
+        </p:txBody>
+      </p:sp>
+      <p:sp>
+        <p:nvSpPr>
+          <p:cNvPr id="8" name="TextBox 7"/>
+          <p:cNvSpPr txBox="1"/>
+          <p:nvPr/>
+        </p:nvSpPr>
+        <p:spPr>
+          <a:xfrm>
+            <a:off x="1600200" y="3163824"/>
+            <a:ext cx="9509760" cy="822960"/>
+          </a:xfrm>
+          <a:prstGeom prst="rect">
+            <a:avLst/>
+          </a:prstGeom>
+          <a:noFill/>
+        </p:spPr>
+        <p:txBody>
+          <a:bodyPr wrap="square" anchor="t" lIns="0" rIns="0" tIns="0" bIns="0">
+            <a:spAutoFit/>
+          </a:bodyPr>
+          <a:lstStyle/>
+          <a:p>
+            <a:pPr algn="l">
+              <a:lnSpc>
+                <a:spcPct val="130000"/>
+              </a:lnSpc>
+            </a:pPr>
+            <a:r>
+              <a:rPr sz="1500" b="0" i="0">
+                <a:solidFill>
+                  <a:srgbClr val="1C1730"/>
+                </a:solidFill>
+                <a:latin typeface="Calibri"/>
+              </a:rPr>
+              <a:t>Verify the signature succeeds — then tamper with the message and confirm verification fails.</a:t>
+            </a:r>
+          </a:p>
+        </p:txBody>
+      </p:sp>
+      <p:sp>
+        <p:nvSpPr>
+          <p:cNvPr id="9" name="Oval 8"/>
+          <p:cNvSpPr/>
+          <p:nvPr/>
+        </p:nvSpPr>
+        <p:spPr>
+          <a:xfrm>
+            <a:off x="822960" y="4069080"/>
+            <a:ext cx="502920" cy="502920"/>
+          </a:xfrm>
+          <a:prstGeom prst="ellipse">
+            <a:avLst/>
+          </a:prstGeom>
+          <a:solidFill>
+            <a:srgbClr val="C67A1E"/>
+          </a:solidFill>
+          <a:ln>
+            <a:noFill/>
+          </a:ln>
+          <a:effectLst/>
+        </p:spPr>
+        <p:style>
+          <a:lnRef idx="1">
+            <a:schemeClr val="accent1"/>
+          </a:lnRef>
+          <a:fillRef idx="3">
+            <a:schemeClr val="accent1"/>
+          </a:fillRef>
+          <a:effectRef idx="2">
+            <a:schemeClr val="accent1"/>
+          </a:effectRef>
+          <a:fontRef idx="minor">
+            <a:schemeClr val="lt1"/>
+          </a:fontRef>
+        </p:style>
+        <p:txBody>
+          <a:bodyPr rtlCol="0" anchor="ctr" wrap="none"/>
+          <a:lstStyle/>
+          <a:p>
+            <a:pPr algn="ctr"/>
+            <a:r>
+              <a:rPr sz="1500" b="1">
+                <a:solidFill>
+                  <a:srgbClr val="FFFFFF"/>
+                </a:solidFill>
+                <a:latin typeface="Century Gothic"/>
+              </a:rPr>
+              <a:t>3</a:t>
+            </a:r>
+          </a:p>
+        </p:txBody>
+      </p:sp>
+      <p:sp>
+        <p:nvSpPr>
+          <p:cNvPr id="10" name="TextBox 9"/>
+          <p:cNvSpPr txBox="1"/>
+          <p:nvPr/>
+        </p:nvSpPr>
+        <p:spPr>
+          <a:xfrm>
+            <a:off x="1600200" y="4123944"/>
+            <a:ext cx="9509760" cy="822960"/>
+          </a:xfrm>
+          <a:prstGeom prst="rect">
+            <a:avLst/>
+          </a:prstGeom>
+          <a:noFill/>
+        </p:spPr>
+        <p:txBody>
+          <a:bodyPr wrap="square" anchor="t" lIns="0" rIns="0" tIns="0" bIns="0">
+            <a:spAutoFit/>
+          </a:bodyPr>
+          <a:lstStyle/>
+          <a:p>
+            <a:pPr algn="l">
+              <a:lnSpc>
+                <a:spcPct val="130000"/>
+              </a:lnSpc>
+            </a:pPr>
+            <a:r>
+              <a:rPr sz="1500" b="0" i="0">
+                <a:solidFill>
+                  <a:srgbClr val="1C1730"/>
+                </a:solidFill>
+                <a:latin typeface="Calibri"/>
+              </a:rPr>
+              <a:t>Repeat the same experiment on the Anders Brownworth public/private key demo.</a:t>
+            </a:r>
+          </a:p>
+        </p:txBody>
+      </p:sp>
+      <p:sp>
+        <p:nvSpPr>
+          <p:cNvPr id="11" name="Oval 10"/>
+          <p:cNvSpPr/>
+          <p:nvPr/>
+        </p:nvSpPr>
+        <p:spPr>
+          <a:xfrm>
+            <a:off x="822960" y="5029200"/>
+            <a:ext cx="502920" cy="502920"/>
+          </a:xfrm>
+          <a:prstGeom prst="ellipse">
+            <a:avLst/>
+          </a:prstGeom>
+          <a:solidFill>
+            <a:srgbClr val="C67A1E"/>
+          </a:solidFill>
+          <a:ln>
+            <a:noFill/>
+          </a:ln>
+          <a:effectLst/>
+        </p:spPr>
+        <p:style>
+          <a:lnRef idx="1">
+            <a:schemeClr val="accent1"/>
+          </a:lnRef>
+          <a:fillRef idx="3">
+            <a:schemeClr val="accent1"/>
+          </a:fillRef>
+          <a:effectRef idx="2">
+            <a:schemeClr val="accent1"/>
+          </a:effectRef>
+          <a:fontRef idx="minor">
+            <a:schemeClr val="lt1"/>
+          </a:fontRef>
+        </p:style>
+        <p:txBody>
+          <a:bodyPr rtlCol="0" anchor="ctr" wrap="none"/>
+          <a:lstStyle/>
+          <a:p>
+            <a:pPr algn="ctr"/>
+            <a:r>
+              <a:rPr sz="1500" b="1">
+                <a:solidFill>
+                  <a:srgbClr val="FFFFFF"/>
+                </a:solidFill>
+                <a:latin typeface="Century Gothic"/>
+              </a:rPr>
+              <a:t>4</a:t>
+            </a:r>
+          </a:p>
+        </p:txBody>
+      </p:sp>
+      <p:sp>
+        <p:nvSpPr>
+          <p:cNvPr id="12" name="TextBox 11"/>
+          <p:cNvSpPr txBox="1"/>
+          <p:nvPr/>
+        </p:nvSpPr>
+        <p:spPr>
+          <a:xfrm>
+            <a:off x="1600200" y="5084064"/>
+            <a:ext cx="9509760" cy="822960"/>
+          </a:xfrm>
+          <a:prstGeom prst="rect">
+            <a:avLst/>
+          </a:prstGeom>
+          <a:noFill/>
+        </p:spPr>
+        <p:txBody>
+          <a:bodyPr wrap="square" anchor="t" lIns="0" rIns="0" tIns="0" bIns="0">
+            <a:spAutoFit/>
+          </a:bodyPr>
+          <a:lstStyle/>
+          <a:p>
+            <a:pPr algn="l">
+              <a:lnSpc>
+                <a:spcPct val="130000"/>
+              </a:lnSpc>
+            </a:pPr>
+            <a:r>
+              <a:rPr sz="1500" b="0" i="0">
+                <a:solidFill>
+                  <a:srgbClr val="1C1730"/>
+                </a:solidFill>
+                <a:latin typeface="Calibri"/>
+              </a:rPr>
+              <a:t>Open MetaMask and notice: every "Confirm" click is your private key signing, invisibly, behind the scenes.</a:t>
+            </a:r>
+          </a:p>
+        </p:txBody>
+      </p:sp>
+      <p:sp>
+        <p:nvSpPr>
+          <p:cNvPr id="13" name="TextBox 12"/>
+          <p:cNvSpPr txBox="1"/>
+          <p:nvPr/>
+        </p:nvSpPr>
+        <p:spPr>
+          <a:xfrm>
+            <a:off x="9966960" y="502920"/>
+            <a:ext cx="1371600" cy="320040"/>
+          </a:xfrm>
+          <a:prstGeom prst="rect">
+            <a:avLst/>
+          </a:prstGeom>
+          <a:noFill/>
+        </p:spPr>
+        <p:txBody>
+          <a:bodyPr wrap="square" anchor="t" lIns="0" rIns="0" tIns="0" bIns="0">
+            <a:spAutoFit/>
+          </a:bodyPr>
+          <a:lstStyle/>
+          <a:p>
+            <a:pPr algn="r">
+              <a:lnSpc>
+                <a:spcPct val="115000"/>
+              </a:lnSpc>
+            </a:pPr>
+            <a:r>
+              <a:rPr sz="1100" b="1" i="0">
+                <a:solidFill>
+                  <a:srgbClr val="5C576E"/>
+                </a:solidFill>
+                <a:latin typeface="Consolas"/>
+              </a:rPr>
+              <a:t>17 / 18</a:t>
+            </a:r>
+          </a:p>
+        </p:txBody>
+      </p:sp>
+    </p:spTree>
+  </p:cSld>
+  <p:clrMapOvr>
+    <a:masterClrMapping/>
+  </p:clrMapOvr>
+</p:sld>
+</file>
+
+<file path=ppt/slides/slide18.xml><?xml version="1.0" encoding="utf-8"?>
+<p:sld xmlns:a="http://schemas.openxmlformats.org/drawingml/2006/main" xmlns:p="http://schemas.openxmlformats.org/presentationml/2006/main" xmlns:r="http://schemas.openxmlformats.org/officeDocument/2006/relationships">
+  <p:cSld>
+    <p:spTree>
+      <p:nvGrpSpPr>
+        <p:cNvPr id="1" name=""/>
+        <p:cNvGrpSpPr/>
+        <p:nvPr/>
+      </p:nvGrpSpPr>
+      <p:grpSpPr/>
+      <p:sp>
+        <p:nvSpPr>
+          <p:cNvPr id="2" name="Rectangle 1"/>
+          <p:cNvSpPr/>
+          <p:nvPr/>
+        </p:nvSpPr>
+        <p:spPr>
+          <a:xfrm>
+            <a:off x="0" y="0"/>
+            <a:ext cx="12191695" cy="6858000"/>
+          </a:xfrm>
+          <a:prstGeom prst="rect">
+            <a:avLst/>
+          </a:prstGeom>
+          <a:solidFill>
             <a:srgbClr val="1C1730"/>
           </a:solidFill>
           <a:ln>
@@ -6743,7 +8075,7 @@
                 </a:solidFill>
                 <a:latin typeface="Consolas"/>
               </a:rPr>
-              <a:t>15 / 15</a:t>
+              <a:t>18 / 18</a:t>
             </a:r>
           </a:p>
         </p:txBody>
@@ -6840,11 +8172,11 @@
             <a:r>
               <a:rPr sz="1300" b="1" i="0">
                 <a:solidFill>
-                  <a:srgbClr val="C67A1E"/>
+                  <a:srgbClr val="5C576E"/>
                 </a:solidFill>
                 <a:latin typeface="Calibri"/>
               </a:rPr>
-              <a:t>TOPIC 02 — PUBLIC / PRIVATE KEYS</a:t>
+              <a:t>HOW THIS COURSE IS STRUCTURED</a:t>
             </a:r>
           </a:p>
         </p:txBody>
@@ -6883,21 +8215,69 @@
                 </a:solidFill>
                 <a:latin typeface="Century Gothic"/>
               </a:rPr>
-              <a:t>Why This Matters</a:t>
-            </a:r>
-          </a:p>
-        </p:txBody>
-      </p:sp>
-      <p:sp>
-        <p:nvSpPr>
-          <p:cNvPr id="5" name="TextBox 4"/>
-          <p:cNvSpPr txBox="1"/>
-          <p:nvPr/>
-        </p:nvSpPr>
-        <p:spPr>
-          <a:xfrm>
-            <a:off x="822960" y="1965960"/>
-            <a:ext cx="9875520" cy="1463040"/>
+              <a:t>Two Halves, Four Weeks Each</a:t>
+            </a:r>
+          </a:p>
+        </p:txBody>
+      </p:sp>
+      <p:sp>
+        <p:nvSpPr>
+          <p:cNvPr id="5" name="Rounded Rectangle 4"/>
+          <p:cNvSpPr/>
+          <p:nvPr/>
+        </p:nvSpPr>
+        <p:spPr>
+          <a:xfrm>
+            <a:off x="822960" y="2103120"/>
+            <a:ext cx="5120640" cy="2743200"/>
+          </a:xfrm>
+          <a:prstGeom prst="roundRect">
+            <a:avLst>
+              <a:gd name="adj" fmla="val 9000"/>
+            </a:avLst>
+          </a:prstGeom>
+          <a:solidFill>
+            <a:srgbClr val="FFFFFF"/>
+          </a:solidFill>
+          <a:ln w="12700">
+            <a:solidFill>
+              <a:srgbClr val="DED9EA"/>
+            </a:solidFill>
+          </a:ln>
+          <a:effectLst/>
+        </p:spPr>
+        <p:style>
+          <a:lnRef idx="1">
+            <a:schemeClr val="accent1"/>
+          </a:lnRef>
+          <a:fillRef idx="3">
+            <a:schemeClr val="accent1"/>
+          </a:fillRef>
+          <a:effectRef idx="2">
+            <a:schemeClr val="accent1"/>
+          </a:effectRef>
+          <a:fontRef idx="minor">
+            <a:schemeClr val="lt1"/>
+          </a:fontRef>
+        </p:style>
+        <p:txBody>
+          <a:bodyPr rtlCol="0" anchor="ctr"/>
+          <a:lstStyle/>
+          <a:p>
+            <a:pPr algn="ctr"/>
+          </a:p>
+        </p:txBody>
+      </p:sp>
+      <p:sp>
+        <p:nvSpPr>
+          <p:cNvPr id="6" name="TextBox 5"/>
+          <p:cNvSpPr txBox="1"/>
+          <p:nvPr/>
+        </p:nvSpPr>
+        <p:spPr>
+          <a:xfrm>
+            <a:off x="1078992" y="2359152"/>
+            <a:ext cx="4608576" cy="457200"/>
           </a:xfrm>
           <a:prstGeom prst="rect">
             <a:avLst/>
@@ -6912,73 +8292,201 @@
           <a:p>
             <a:pPr algn="l">
               <a:lnSpc>
-                <a:spcPct val="140000"/>
-              </a:lnSpc>
-            </a:pPr>
-            <a:r>
-              <a:rPr sz="1600" b="0" i="0">
+                <a:spcPct val="115000"/>
+              </a:lnSpc>
+            </a:pPr>
+            <a:r>
+              <a:rPr sz="1800" b="1" i="0">
+                <a:solidFill>
+                  <a:srgbClr val="1C1730"/>
+                </a:solidFill>
+                <a:latin typeface="Century Gothic"/>
+              </a:rPr>
+              <a:t>Half 1 · Weeks 1–4</a:t>
+            </a:r>
+          </a:p>
+        </p:txBody>
+      </p:sp>
+      <p:sp>
+        <p:nvSpPr>
+          <p:cNvPr id="7" name="TextBox 6"/>
+          <p:cNvSpPr txBox="1"/>
+          <p:nvPr/>
+        </p:nvSpPr>
+        <p:spPr>
+          <a:xfrm>
+            <a:off x="1078992" y="2816352"/>
+            <a:ext cx="4608576" cy="1892808"/>
+          </a:xfrm>
+          <a:prstGeom prst="rect">
+            <a:avLst/>
+          </a:prstGeom>
+          <a:noFill/>
+        </p:spPr>
+        <p:txBody>
+          <a:bodyPr wrap="square" anchor="t" lIns="0" rIns="0" tIns="0" bIns="0">
+            <a:spAutoFit/>
+          </a:bodyPr>
+          <a:lstStyle/>
+          <a:p>
+            <a:pPr algn="l">
+              <a:lnSpc>
+                <a:spcPct val="128000"/>
+              </a:lnSpc>
+            </a:pPr>
+            <a:r>
+              <a:rPr sz="1350" b="0" i="0">
+                <a:solidFill>
+                  <a:srgbClr val="1C1730"/>
+                </a:solidFill>
+                <a:latin typeface="Calibri"/>
+              </a:rPr>
+              <a:t>Basics &amp; Core Concepts. Everything you need to walk into a hackathon and build something real — wallets, contracts, tokens, a working dApp.</a:t>
+            </a:r>
+          </a:p>
+        </p:txBody>
+      </p:sp>
+      <p:sp>
+        <p:nvSpPr>
+          <p:cNvPr id="8" name="Rounded Rectangle 7"/>
+          <p:cNvSpPr/>
+          <p:nvPr/>
+        </p:nvSpPr>
+        <p:spPr>
+          <a:xfrm>
+            <a:off x="6217920" y="2103120"/>
+            <a:ext cx="5120640" cy="2743200"/>
+          </a:xfrm>
+          <a:prstGeom prst="roundRect">
+            <a:avLst>
+              <a:gd name="adj" fmla="val 9000"/>
+            </a:avLst>
+          </a:prstGeom>
+          <a:solidFill>
+            <a:srgbClr val="FFFFFF"/>
+          </a:solidFill>
+          <a:ln w="12700">
+            <a:solidFill>
+              <a:srgbClr val="DED9EA"/>
+            </a:solidFill>
+          </a:ln>
+          <a:effectLst/>
+        </p:spPr>
+        <p:style>
+          <a:lnRef idx="1">
+            <a:schemeClr val="accent1"/>
+          </a:lnRef>
+          <a:fillRef idx="3">
+            <a:schemeClr val="accent1"/>
+          </a:fillRef>
+          <a:effectRef idx="2">
+            <a:schemeClr val="accent1"/>
+          </a:effectRef>
+          <a:fontRef idx="minor">
+            <a:schemeClr val="lt1"/>
+          </a:fontRef>
+        </p:style>
+        <p:txBody>
+          <a:bodyPr rtlCol="0" anchor="ctr"/>
+          <a:lstStyle/>
+          <a:p>
+            <a:pPr algn="ctr"/>
+          </a:p>
+        </p:txBody>
+      </p:sp>
+      <p:sp>
+        <p:nvSpPr>
+          <p:cNvPr id="9" name="TextBox 8"/>
+          <p:cNvSpPr txBox="1"/>
+          <p:nvPr/>
+        </p:nvSpPr>
+        <p:spPr>
+          <a:xfrm>
+            <a:off x="6473952" y="2359152"/>
+            <a:ext cx="4608576" cy="457200"/>
+          </a:xfrm>
+          <a:prstGeom prst="rect">
+            <a:avLst/>
+          </a:prstGeom>
+          <a:noFill/>
+        </p:spPr>
+        <p:txBody>
+          <a:bodyPr wrap="square" anchor="t" lIns="0" rIns="0" tIns="0" bIns="0">
+            <a:spAutoFit/>
+          </a:bodyPr>
+          <a:lstStyle/>
+          <a:p>
+            <a:pPr algn="l">
+              <a:lnSpc>
+                <a:spcPct val="115000"/>
+              </a:lnSpc>
+            </a:pPr>
+            <a:r>
+              <a:rPr sz="1800" b="1" i="0">
                 <a:solidFill>
                   <a:srgbClr val="5C576E"/>
                 </a:solidFill>
+                <a:latin typeface="Century Gothic"/>
+              </a:rPr>
+              <a:t>Half 2 · Weeks 5–8</a:t>
+            </a:r>
+          </a:p>
+        </p:txBody>
+      </p:sp>
+      <p:sp>
+        <p:nvSpPr>
+          <p:cNvPr id="10" name="TextBox 9"/>
+          <p:cNvSpPr txBox="1"/>
+          <p:nvPr/>
+        </p:nvSpPr>
+        <p:spPr>
+          <a:xfrm>
+            <a:off x="6473952" y="2816352"/>
+            <a:ext cx="4608576" cy="1892808"/>
+          </a:xfrm>
+          <a:prstGeom prst="rect">
+            <a:avLst/>
+          </a:prstGeom>
+          <a:noFill/>
+        </p:spPr>
+        <p:txBody>
+          <a:bodyPr wrap="square" anchor="t" lIns="0" rIns="0" tIns="0" bIns="0">
+            <a:spAutoFit/>
+          </a:bodyPr>
+          <a:lstStyle/>
+          <a:p>
+            <a:pPr algn="l">
+              <a:lnSpc>
+                <a:spcPct val="128000"/>
+              </a:lnSpc>
+            </a:pPr>
+            <a:r>
+              <a:rPr sz="1350" b="0" i="0">
+                <a:solidFill>
+                  <a:srgbClr val="5C576E"/>
+                </a:solidFill>
                 <a:latin typeface="Calibri"/>
               </a:rPr>
-              <a:t>Hashing gave you tamper-evidence. Keys give you authorization — proving who's allowed to move funds, with no login system, no password reset, and no bank sitting in the middle. This is the entire foundation of blockchain authorization.</a:t>
-            </a:r>
-          </a:p>
-        </p:txBody>
-      </p:sp>
-      <p:sp>
-        <p:nvSpPr>
-          <p:cNvPr id="6" name="TextBox 5"/>
-          <p:cNvSpPr txBox="1"/>
-          <p:nvPr/>
-        </p:nvSpPr>
-        <p:spPr>
-          <a:xfrm>
-            <a:off x="822960" y="3657600"/>
-            <a:ext cx="9875520" cy="365760"/>
-          </a:xfrm>
-          <a:prstGeom prst="rect">
-            <a:avLst/>
-          </a:prstGeom>
-          <a:noFill/>
-        </p:spPr>
-        <p:txBody>
-          <a:bodyPr wrap="square" anchor="t" lIns="0" rIns="0" tIns="0" bIns="0">
-            <a:spAutoFit/>
-          </a:bodyPr>
-          <a:lstStyle/>
-          <a:p>
-            <a:pPr algn="l">
-              <a:lnSpc>
-                <a:spcPct val="115000"/>
-              </a:lnSpc>
-            </a:pPr>
-            <a:r>
-              <a:rPr sz="1200" b="1" i="0">
-                <a:solidFill>
-                  <a:srgbClr val="C67A1E"/>
-                </a:solidFill>
-                <a:latin typeface="Calibri"/>
-              </a:rPr>
-              <a:t>WHAT THIS SECTION COVERS</a:t>
-            </a:r>
-          </a:p>
-        </p:txBody>
-      </p:sp>
-      <p:sp>
-        <p:nvSpPr>
-          <p:cNvPr id="7" name="Rectangle 6"/>
+              <a:t>Advanced Topics. Security, upgradeable contracts, Layer 2s, and the wider ecosystem — what separates a prototype from production.</a:t>
+            </a:r>
+          </a:p>
+        </p:txBody>
+      </p:sp>
+      <p:sp>
+        <p:nvSpPr>
+          <p:cNvPr id="11" name="Rounded Rectangle 10"/>
           <p:cNvSpPr/>
           <p:nvPr/>
         </p:nvSpPr>
         <p:spPr>
           <a:xfrm>
-            <a:off x="822960" y="4197096"/>
-            <a:ext cx="82296" cy="82296"/>
-          </a:xfrm>
-          <a:prstGeom prst="rect">
-            <a:avLst/>
+            <a:off x="822960" y="5074920"/>
+            <a:ext cx="3291840" cy="502920"/>
+          </a:xfrm>
+          <a:prstGeom prst="roundRect">
+            <a:avLst>
+              <a:gd name="adj" fmla="val 50000"/>
+            </a:avLst>
           </a:prstGeom>
           <a:solidFill>
             <a:srgbClr val="C67A1E"/>
@@ -7012,14 +8520,14 @@
       </p:sp>
       <p:sp>
         <p:nvSpPr>
-          <p:cNvPr id="8" name="TextBox 7"/>
-          <p:cNvSpPr txBox="1"/>
-          <p:nvPr/>
-        </p:nvSpPr>
-        <p:spPr>
-          <a:xfrm>
-            <a:off x="1051560" y="4114800"/>
-            <a:ext cx="4709160" cy="365760"/>
+          <p:cNvPr id="12" name="TextBox 11"/>
+          <p:cNvSpPr txBox="1"/>
+          <p:nvPr/>
+        </p:nvSpPr>
+        <p:spPr>
+          <a:xfrm>
+            <a:off x="1097280" y="5193792"/>
+            <a:ext cx="2926080" cy="320040"/>
           </a:xfrm>
           <a:prstGeom prst="rect">
             <a:avLst/>
@@ -7038,684 +8546,20 @@
               </a:lnSpc>
             </a:pPr>
             <a:r>
-              <a:rPr sz="1350" b="0" i="0">
-                <a:solidFill>
-                  <a:srgbClr val="1C1730"/>
+              <a:rPr sz="1250" b="1" i="0">
+                <a:solidFill>
+                  <a:srgbClr val="FFFFFF"/>
                 </a:solidFill>
                 <a:latin typeface="Calibri"/>
               </a:rPr>
-              <a:t>Core concept</a:t>
-            </a:r>
-          </a:p>
-        </p:txBody>
-      </p:sp>
-      <p:sp>
-        <p:nvSpPr>
-          <p:cNvPr id="9" name="Rectangle 8"/>
-          <p:cNvSpPr/>
-          <p:nvPr/>
-        </p:nvSpPr>
-        <p:spPr>
-          <a:xfrm>
-            <a:off x="6035040" y="4197096"/>
-            <a:ext cx="82296" cy="82296"/>
-          </a:xfrm>
-          <a:prstGeom prst="rect">
-            <a:avLst/>
-          </a:prstGeom>
-          <a:solidFill>
-            <a:srgbClr val="C67A1E"/>
-          </a:solidFill>
-          <a:ln>
-            <a:noFill/>
-          </a:ln>
-          <a:effectLst/>
-        </p:spPr>
-        <p:style>
-          <a:lnRef idx="1">
-            <a:schemeClr val="accent1"/>
-          </a:lnRef>
-          <a:fillRef idx="3">
-            <a:schemeClr val="accent1"/>
-          </a:fillRef>
-          <a:effectRef idx="2">
-            <a:schemeClr val="accent1"/>
-          </a:effectRef>
-          <a:fontRef idx="minor">
-            <a:schemeClr val="lt1"/>
-          </a:fontRef>
-        </p:style>
-        <p:txBody>
-          <a:bodyPr rtlCol="0" anchor="ctr"/>
-          <a:lstStyle/>
-          <a:p>
-            <a:pPr algn="ctr"/>
-          </a:p>
-        </p:txBody>
-      </p:sp>
-      <p:sp>
-        <p:nvSpPr>
-          <p:cNvPr id="10" name="TextBox 9"/>
-          <p:cNvSpPr txBox="1"/>
-          <p:nvPr/>
-        </p:nvSpPr>
-        <p:spPr>
-          <a:xfrm>
-            <a:off x="6263640" y="4114800"/>
-            <a:ext cx="4709160" cy="365760"/>
-          </a:xfrm>
-          <a:prstGeom prst="rect">
-            <a:avLst/>
-          </a:prstGeom>
-          <a:noFill/>
-        </p:spPr>
-        <p:txBody>
-          <a:bodyPr wrap="square" anchor="t" lIns="0" rIns="0" tIns="0" bIns="0">
-            <a:spAutoFit/>
-          </a:bodyPr>
-          <a:lstStyle/>
-          <a:p>
-            <a:pPr algn="l">
-              <a:lnSpc>
-                <a:spcPct val="115000"/>
-              </a:lnSpc>
-            </a:pPr>
-            <a:r>
-              <a:rPr sz="1350" b="0" i="0">
-                <a:solidFill>
-                  <a:srgbClr val="1C1730"/>
-                </a:solidFill>
-                <a:latin typeface="Calibri"/>
-              </a:rPr>
-              <a:t>Four key ideas, one at a time</a:t>
-            </a:r>
-          </a:p>
-        </p:txBody>
-      </p:sp>
-      <p:sp>
-        <p:nvSpPr>
-          <p:cNvPr id="11" name="Rectangle 10"/>
-          <p:cNvSpPr/>
-          <p:nvPr/>
-        </p:nvSpPr>
-        <p:spPr>
-          <a:xfrm>
-            <a:off x="822960" y="4654296"/>
-            <a:ext cx="82296" cy="82296"/>
-          </a:xfrm>
-          <a:prstGeom prst="rect">
-            <a:avLst/>
-          </a:prstGeom>
-          <a:solidFill>
-            <a:srgbClr val="C67A1E"/>
-          </a:solidFill>
-          <a:ln>
-            <a:noFill/>
-          </a:ln>
-          <a:effectLst/>
-        </p:spPr>
-        <p:style>
-          <a:lnRef idx="1">
-            <a:schemeClr val="accent1"/>
-          </a:lnRef>
-          <a:fillRef idx="3">
-            <a:schemeClr val="accent1"/>
-          </a:fillRef>
-          <a:effectRef idx="2">
-            <a:schemeClr val="accent1"/>
-          </a:effectRef>
-          <a:fontRef idx="minor">
-            <a:schemeClr val="lt1"/>
-          </a:fontRef>
-        </p:style>
-        <p:txBody>
-          <a:bodyPr rtlCol="0" anchor="ctr"/>
-          <a:lstStyle/>
-          <a:p>
-            <a:pPr algn="ctr"/>
-          </a:p>
-        </p:txBody>
-      </p:sp>
-      <p:sp>
-        <p:nvSpPr>
-          <p:cNvPr id="12" name="TextBox 11"/>
-          <p:cNvSpPr txBox="1"/>
-          <p:nvPr/>
-        </p:nvSpPr>
-        <p:spPr>
-          <a:xfrm>
-            <a:off x="1051560" y="4572000"/>
-            <a:ext cx="4709160" cy="365760"/>
-          </a:xfrm>
-          <a:prstGeom prst="rect">
-            <a:avLst/>
-          </a:prstGeom>
-          <a:noFill/>
-        </p:spPr>
-        <p:txBody>
-          <a:bodyPr wrap="square" anchor="t" lIns="0" rIns="0" tIns="0" bIns="0">
-            <a:spAutoFit/>
-          </a:bodyPr>
-          <a:lstStyle/>
-          <a:p>
-            <a:pPr algn="l">
-              <a:lnSpc>
-                <a:spcPct val="115000"/>
-              </a:lnSpc>
-            </a:pPr>
-            <a:r>
-              <a:rPr sz="1350" b="0" i="0">
-                <a:solidFill>
-                  <a:srgbClr val="1C1730"/>
-                </a:solidFill>
-                <a:latin typeface="Calibri"/>
-              </a:rPr>
-              <a:t>A real, reproducible worked example</a:t>
-            </a:r>
-          </a:p>
-        </p:txBody>
-      </p:sp>
-      <p:sp>
-        <p:nvSpPr>
-          <p:cNvPr id="13" name="Rectangle 12"/>
-          <p:cNvSpPr/>
-          <p:nvPr/>
-        </p:nvSpPr>
-        <p:spPr>
-          <a:xfrm>
-            <a:off x="6035040" y="4654296"/>
-            <a:ext cx="82296" cy="82296"/>
-          </a:xfrm>
-          <a:prstGeom prst="rect">
-            <a:avLst/>
-          </a:prstGeom>
-          <a:solidFill>
-            <a:srgbClr val="C67A1E"/>
-          </a:solidFill>
-          <a:ln>
-            <a:noFill/>
-          </a:ln>
-          <a:effectLst/>
-        </p:spPr>
-        <p:style>
-          <a:lnRef idx="1">
-            <a:schemeClr val="accent1"/>
-          </a:lnRef>
-          <a:fillRef idx="3">
-            <a:schemeClr val="accent1"/>
-          </a:fillRef>
-          <a:effectRef idx="2">
-            <a:schemeClr val="accent1"/>
-          </a:effectRef>
-          <a:fontRef idx="minor">
-            <a:schemeClr val="lt1"/>
-          </a:fontRef>
-        </p:style>
-        <p:txBody>
-          <a:bodyPr rtlCol="0" anchor="ctr"/>
-          <a:lstStyle/>
-          <a:p>
-            <a:pPr algn="ctr"/>
-          </a:p>
-        </p:txBody>
-      </p:sp>
-      <p:sp>
-        <p:nvSpPr>
-          <p:cNvPr id="14" name="TextBox 13"/>
-          <p:cNvSpPr txBox="1"/>
-          <p:nvPr/>
-        </p:nvSpPr>
-        <p:spPr>
-          <a:xfrm>
-            <a:off x="6263640" y="4572000"/>
-            <a:ext cx="4709160" cy="365760"/>
-          </a:xfrm>
-          <a:prstGeom prst="rect">
-            <a:avLst/>
-          </a:prstGeom>
-          <a:noFill/>
-        </p:spPr>
-        <p:txBody>
-          <a:bodyPr wrap="square" anchor="t" lIns="0" rIns="0" tIns="0" bIns="0">
-            <a:spAutoFit/>
-          </a:bodyPr>
-          <a:lstStyle/>
-          <a:p>
-            <a:pPr algn="l">
-              <a:lnSpc>
-                <a:spcPct val="115000"/>
-              </a:lnSpc>
-            </a:pPr>
-            <a:r>
-              <a:rPr sz="1350" b="0" i="0">
-                <a:solidFill>
-                  <a:srgbClr val="1C1730"/>
-                </a:solidFill>
-                <a:latin typeface="Calibri"/>
-              </a:rPr>
-              <a:t>Real-world uses beyond blockchain</a:t>
-            </a:r>
-          </a:p>
-        </p:txBody>
-      </p:sp>
-      <p:sp>
-        <p:nvSpPr>
-          <p:cNvPr id="15" name="Rectangle 14"/>
-          <p:cNvSpPr/>
-          <p:nvPr/>
-        </p:nvSpPr>
-        <p:spPr>
-          <a:xfrm>
-            <a:off x="822960" y="5111496"/>
-            <a:ext cx="82296" cy="82296"/>
-          </a:xfrm>
-          <a:prstGeom prst="rect">
-            <a:avLst/>
-          </a:prstGeom>
-          <a:solidFill>
-            <a:srgbClr val="C67A1E"/>
-          </a:solidFill>
-          <a:ln>
-            <a:noFill/>
-          </a:ln>
-          <a:effectLst/>
-        </p:spPr>
-        <p:style>
-          <a:lnRef idx="1">
-            <a:schemeClr val="accent1"/>
-          </a:lnRef>
-          <a:fillRef idx="3">
-            <a:schemeClr val="accent1"/>
-          </a:fillRef>
-          <a:effectRef idx="2">
-            <a:schemeClr val="accent1"/>
-          </a:effectRef>
-          <a:fontRef idx="minor">
-            <a:schemeClr val="lt1"/>
-          </a:fontRef>
-        </p:style>
-        <p:txBody>
-          <a:bodyPr rtlCol="0" anchor="ctr"/>
-          <a:lstStyle/>
-          <a:p>
-            <a:pPr algn="ctr"/>
-          </a:p>
-        </p:txBody>
-      </p:sp>
-      <p:sp>
-        <p:nvSpPr>
-          <p:cNvPr id="16" name="TextBox 15"/>
-          <p:cNvSpPr txBox="1"/>
-          <p:nvPr/>
-        </p:nvSpPr>
-        <p:spPr>
-          <a:xfrm>
-            <a:off x="1051560" y="5029200"/>
-            <a:ext cx="4709160" cy="365760"/>
-          </a:xfrm>
-          <a:prstGeom prst="rect">
-            <a:avLst/>
-          </a:prstGeom>
-          <a:noFill/>
-        </p:spPr>
-        <p:txBody>
-          <a:bodyPr wrap="square" anchor="t" lIns="0" rIns="0" tIns="0" bIns="0">
-            <a:spAutoFit/>
-          </a:bodyPr>
-          <a:lstStyle/>
-          <a:p>
-            <a:pPr algn="l">
-              <a:lnSpc>
-                <a:spcPct val="115000"/>
-              </a:lnSpc>
-            </a:pPr>
-            <a:r>
-              <a:rPr sz="1350" b="0" i="0">
-                <a:solidFill>
-                  <a:srgbClr val="1C1730"/>
-                </a:solidFill>
-                <a:latin typeface="Calibri"/>
-              </a:rPr>
-              <a:t>A flagship case study</a:t>
-            </a:r>
-          </a:p>
-        </p:txBody>
-      </p:sp>
-      <p:sp>
-        <p:nvSpPr>
-          <p:cNvPr id="17" name="Rectangle 16"/>
-          <p:cNvSpPr/>
-          <p:nvPr/>
-        </p:nvSpPr>
-        <p:spPr>
-          <a:xfrm>
-            <a:off x="6035040" y="5111496"/>
-            <a:ext cx="82296" cy="82296"/>
-          </a:xfrm>
-          <a:prstGeom prst="rect">
-            <a:avLst/>
-          </a:prstGeom>
-          <a:solidFill>
-            <a:srgbClr val="C67A1E"/>
-          </a:solidFill>
-          <a:ln>
-            <a:noFill/>
-          </a:ln>
-          <a:effectLst/>
-        </p:spPr>
-        <p:style>
-          <a:lnRef idx="1">
-            <a:schemeClr val="accent1"/>
-          </a:lnRef>
-          <a:fillRef idx="3">
-            <a:schemeClr val="accent1"/>
-          </a:fillRef>
-          <a:effectRef idx="2">
-            <a:schemeClr val="accent1"/>
-          </a:effectRef>
-          <a:fontRef idx="minor">
-            <a:schemeClr val="lt1"/>
-          </a:fontRef>
-        </p:style>
-        <p:txBody>
-          <a:bodyPr rtlCol="0" anchor="ctr"/>
-          <a:lstStyle/>
-          <a:p>
-            <a:pPr algn="ctr"/>
-          </a:p>
-        </p:txBody>
-      </p:sp>
-      <p:sp>
-        <p:nvSpPr>
-          <p:cNvPr id="18" name="TextBox 17"/>
-          <p:cNvSpPr txBox="1"/>
-          <p:nvPr/>
-        </p:nvSpPr>
-        <p:spPr>
-          <a:xfrm>
-            <a:off x="6263640" y="5029200"/>
-            <a:ext cx="4709160" cy="365760"/>
-          </a:xfrm>
-          <a:prstGeom prst="rect">
-            <a:avLst/>
-          </a:prstGeom>
-          <a:noFill/>
-        </p:spPr>
-        <p:txBody>
-          <a:bodyPr wrap="square" anchor="t" lIns="0" rIns="0" tIns="0" bIns="0">
-            <a:spAutoFit/>
-          </a:bodyPr>
-          <a:lstStyle/>
-          <a:p>
-            <a:pPr algn="l">
-              <a:lnSpc>
-                <a:spcPct val="115000"/>
-              </a:lnSpc>
-            </a:pPr>
-            <a:r>
-              <a:rPr sz="1350" b="0" i="0">
-                <a:solidFill>
-                  <a:srgbClr val="1C1730"/>
-                </a:solidFill>
-                <a:latin typeface="Calibri"/>
-              </a:rPr>
-              <a:t>A real-life analogy</a:t>
-            </a:r>
-          </a:p>
-        </p:txBody>
-      </p:sp>
-      <p:sp>
-        <p:nvSpPr>
-          <p:cNvPr id="19" name="Rectangle 18"/>
-          <p:cNvSpPr/>
-          <p:nvPr/>
-        </p:nvSpPr>
-        <p:spPr>
-          <a:xfrm>
-            <a:off x="822960" y="5568696"/>
-            <a:ext cx="82296" cy="82296"/>
-          </a:xfrm>
-          <a:prstGeom prst="rect">
-            <a:avLst/>
-          </a:prstGeom>
-          <a:solidFill>
-            <a:srgbClr val="C67A1E"/>
-          </a:solidFill>
-          <a:ln>
-            <a:noFill/>
-          </a:ln>
-          <a:effectLst/>
-        </p:spPr>
-        <p:style>
-          <a:lnRef idx="1">
-            <a:schemeClr val="accent1"/>
-          </a:lnRef>
-          <a:fillRef idx="3">
-            <a:schemeClr val="accent1"/>
-          </a:fillRef>
-          <a:effectRef idx="2">
-            <a:schemeClr val="accent1"/>
-          </a:effectRef>
-          <a:fontRef idx="minor">
-            <a:schemeClr val="lt1"/>
-          </a:fontRef>
-        </p:style>
-        <p:txBody>
-          <a:bodyPr rtlCol="0" anchor="ctr"/>
-          <a:lstStyle/>
-          <a:p>
-            <a:pPr algn="ctr"/>
-          </a:p>
-        </p:txBody>
-      </p:sp>
-      <p:sp>
-        <p:nvSpPr>
-          <p:cNvPr id="20" name="TextBox 19"/>
-          <p:cNvSpPr txBox="1"/>
-          <p:nvPr/>
-        </p:nvSpPr>
-        <p:spPr>
-          <a:xfrm>
-            <a:off x="1051560" y="5486400"/>
-            <a:ext cx="4709160" cy="365760"/>
-          </a:xfrm>
-          <a:prstGeom prst="rect">
-            <a:avLst/>
-          </a:prstGeom>
-          <a:noFill/>
-        </p:spPr>
-        <p:txBody>
-          <a:bodyPr wrap="square" anchor="t" lIns="0" rIns="0" tIns="0" bIns="0">
-            <a:spAutoFit/>
-          </a:bodyPr>
-          <a:lstStyle/>
-          <a:p>
-            <a:pPr algn="l">
-              <a:lnSpc>
-                <a:spcPct val="115000"/>
-              </a:lnSpc>
-            </a:pPr>
-            <a:r>
-              <a:rPr sz="1350" b="0" i="0">
-                <a:solidFill>
-                  <a:srgbClr val="1C1730"/>
-                </a:solidFill>
-                <a:latin typeface="Calibri"/>
-              </a:rPr>
-              <a:t>Common misconceptions</a:t>
-            </a:r>
-          </a:p>
-        </p:txBody>
-      </p:sp>
-      <p:sp>
-        <p:nvSpPr>
-          <p:cNvPr id="21" name="Rectangle 20"/>
-          <p:cNvSpPr/>
-          <p:nvPr/>
-        </p:nvSpPr>
-        <p:spPr>
-          <a:xfrm>
-            <a:off x="6035040" y="5568696"/>
-            <a:ext cx="82296" cy="82296"/>
-          </a:xfrm>
-          <a:prstGeom prst="rect">
-            <a:avLst/>
-          </a:prstGeom>
-          <a:solidFill>
-            <a:srgbClr val="C67A1E"/>
-          </a:solidFill>
-          <a:ln>
-            <a:noFill/>
-          </a:ln>
-          <a:effectLst/>
-        </p:spPr>
-        <p:style>
-          <a:lnRef idx="1">
-            <a:schemeClr val="accent1"/>
-          </a:lnRef>
-          <a:fillRef idx="3">
-            <a:schemeClr val="accent1"/>
-          </a:fillRef>
-          <a:effectRef idx="2">
-            <a:schemeClr val="accent1"/>
-          </a:effectRef>
-          <a:fontRef idx="minor">
-            <a:schemeClr val="lt1"/>
-          </a:fontRef>
-        </p:style>
-        <p:txBody>
-          <a:bodyPr rtlCol="0" anchor="ctr"/>
-          <a:lstStyle/>
-          <a:p>
-            <a:pPr algn="ctr"/>
-          </a:p>
-        </p:txBody>
-      </p:sp>
-      <p:sp>
-        <p:nvSpPr>
-          <p:cNvPr id="22" name="TextBox 21"/>
-          <p:cNvSpPr txBox="1"/>
-          <p:nvPr/>
-        </p:nvSpPr>
-        <p:spPr>
-          <a:xfrm>
-            <a:off x="6263640" y="5486400"/>
-            <a:ext cx="4709160" cy="365760"/>
-          </a:xfrm>
-          <a:prstGeom prst="rect">
-            <a:avLst/>
-          </a:prstGeom>
-          <a:noFill/>
-        </p:spPr>
-        <p:txBody>
-          <a:bodyPr wrap="square" anchor="t" lIns="0" rIns="0" tIns="0" bIns="0">
-            <a:spAutoFit/>
-          </a:bodyPr>
-          <a:lstStyle/>
-          <a:p>
-            <a:pPr algn="l">
-              <a:lnSpc>
-                <a:spcPct val="115000"/>
-              </a:lnSpc>
-            </a:pPr>
-            <a:r>
-              <a:rPr sz="1350" b="0" i="0">
-                <a:solidFill>
-                  <a:srgbClr val="1C1730"/>
-                </a:solidFill>
-                <a:latin typeface="Calibri"/>
-              </a:rPr>
-              <a:t>Hands-on practice</a:t>
-            </a:r>
-          </a:p>
-        </p:txBody>
-      </p:sp>
-      <p:sp>
-        <p:nvSpPr>
-          <p:cNvPr id="23" name="Rectangle 22"/>
-          <p:cNvSpPr/>
-          <p:nvPr/>
-        </p:nvSpPr>
-        <p:spPr>
-          <a:xfrm>
-            <a:off x="822960" y="6025896"/>
-            <a:ext cx="82296" cy="82296"/>
-          </a:xfrm>
-          <a:prstGeom prst="rect">
-            <a:avLst/>
-          </a:prstGeom>
-          <a:solidFill>
-            <a:srgbClr val="C67A1E"/>
-          </a:solidFill>
-          <a:ln>
-            <a:noFill/>
-          </a:ln>
-          <a:effectLst/>
-        </p:spPr>
-        <p:style>
-          <a:lnRef idx="1">
-            <a:schemeClr val="accent1"/>
-          </a:lnRef>
-          <a:fillRef idx="3">
-            <a:schemeClr val="accent1"/>
-          </a:fillRef>
-          <a:effectRef idx="2">
-            <a:schemeClr val="accent1"/>
-          </a:effectRef>
-          <a:fontRef idx="minor">
-            <a:schemeClr val="lt1"/>
-          </a:fontRef>
-        </p:style>
-        <p:txBody>
-          <a:bodyPr rtlCol="0" anchor="ctr"/>
-          <a:lstStyle/>
-          <a:p>
-            <a:pPr algn="ctr"/>
-          </a:p>
-        </p:txBody>
-      </p:sp>
-      <p:sp>
-        <p:nvSpPr>
-          <p:cNvPr id="24" name="TextBox 23"/>
-          <p:cNvSpPr txBox="1"/>
-          <p:nvPr/>
-        </p:nvSpPr>
-        <p:spPr>
-          <a:xfrm>
-            <a:off x="1051560" y="5943600"/>
-            <a:ext cx="4709160" cy="365760"/>
-          </a:xfrm>
-          <a:prstGeom prst="rect">
-            <a:avLst/>
-          </a:prstGeom>
-          <a:noFill/>
-        </p:spPr>
-        <p:txBody>
-          <a:bodyPr wrap="square" anchor="t" lIns="0" rIns="0" tIns="0" bIns="0">
-            <a:spAutoFit/>
-          </a:bodyPr>
-          <a:lstStyle/>
-          <a:p>
-            <a:pPr algn="l">
-              <a:lnSpc>
-                <a:spcPct val="115000"/>
-              </a:lnSpc>
-            </a:pPr>
-            <a:r>
-              <a:rPr sz="1350" b="0" i="0">
-                <a:solidFill>
-                  <a:srgbClr val="1C1730"/>
-                </a:solidFill>
-                <a:latin typeface="Calibri"/>
-              </a:rPr>
-              <a:t>Take-home assignment</a:t>
-            </a:r>
-          </a:p>
-        </p:txBody>
-      </p:sp>
-      <p:sp>
-        <p:nvSpPr>
-          <p:cNvPr id="25" name="TextBox 24"/>
+              <a:t>◉  YOU ARE HERE — WEEK 01</a:t>
+            </a:r>
+          </a:p>
+        </p:txBody>
+      </p:sp>
+      <p:sp>
+        <p:nvSpPr>
+          <p:cNvPr id="13" name="TextBox 12"/>
           <p:cNvSpPr txBox="1"/>
           <p:nvPr/>
         </p:nvSpPr>
@@ -7747,7 +8591,7 @@
                 </a:solidFill>
                 <a:latin typeface="Consolas"/>
               </a:rPr>
-              <a:t>02 / 15</a:t>
+              <a:t>02 / 18</a:t>
             </a:r>
           </a:p>
         </p:txBody>
@@ -7785,7 +8629,7 @@
             <a:avLst/>
           </a:prstGeom>
           <a:solidFill>
-            <a:srgbClr val="F8F6F2"/>
+            <a:srgbClr val="1C1730"/>
           </a:solidFill>
           <a:ln>
             <a:noFill/>
@@ -7822,7 +8666,7 @@
         </p:nvSpPr>
         <p:spPr>
           <a:xfrm>
-            <a:off x="822960" y="640080"/>
+            <a:off x="822960" y="731520"/>
             <a:ext cx="10058400" cy="365760"/>
           </a:xfrm>
           <a:prstGeom prst="rect">
@@ -7844,11 +8688,11 @@
             <a:r>
               <a:rPr sz="1300" b="1" i="0">
                 <a:solidFill>
-                  <a:srgbClr val="C67A1E"/>
+                  <a:srgbClr val="FFC53D"/>
                 </a:solidFill>
                 <a:latin typeface="Calibri"/>
               </a:rPr>
-              <a:t>TOPIC 02 — PUBLIC / PRIVATE KEYS</a:t>
+              <a:t>GROUND RULES</a:t>
             </a:r>
           </a:p>
         </p:txBody>
@@ -7861,7 +8705,7 @@
         </p:nvSpPr>
         <p:spPr>
           <a:xfrm>
-            <a:off x="822960" y="1097280"/>
+            <a:off x="822960" y="1188720"/>
             <a:ext cx="9601200" cy="1005840"/>
           </a:xfrm>
           <a:prstGeom prst="rect">
@@ -7883,102 +8727,90 @@
             <a:r>
               <a:rPr sz="3400" b="1" i="0">
                 <a:solidFill>
-                  <a:srgbClr val="1C1730"/>
+                  <a:srgbClr val="FFFFFF"/>
                 </a:solidFill>
                 <a:latin typeface="Century Gothic"/>
               </a:rPr>
-              <a:t>The Core Concept</a:t>
-            </a:r>
-          </a:p>
-        </p:txBody>
-      </p:sp>
-      <p:sp>
-        <p:nvSpPr>
-          <p:cNvPr id="5" name="Rounded Rectangle 4"/>
-          <p:cNvSpPr/>
+              <a:t>Before You Begin</a:t>
+            </a:r>
+          </a:p>
+        </p:txBody>
+      </p:sp>
+      <p:sp>
+        <p:nvSpPr>
+          <p:cNvPr id="5" name="TextBox 4"/>
+          <p:cNvSpPr txBox="1"/>
           <p:nvPr/>
         </p:nvSpPr>
         <p:spPr>
           <a:xfrm>
             <a:off x="822960" y="2286000"/>
-            <a:ext cx="10515600" cy="3291840"/>
-          </a:xfrm>
-          <a:prstGeom prst="roundRect">
-            <a:avLst>
-              <a:gd name="adj" fmla="val 4000"/>
-            </a:avLst>
-          </a:prstGeom>
-          <a:solidFill>
-            <a:srgbClr val="FFFFFF"/>
-          </a:solidFill>
-          <a:ln>
-            <a:noFill/>
-          </a:ln>
-          <a:effectLst/>
-        </p:spPr>
-        <p:style>
-          <a:lnRef idx="1">
-            <a:schemeClr val="accent1"/>
-          </a:lnRef>
-          <a:fillRef idx="3">
-            <a:schemeClr val="accent1"/>
-          </a:fillRef>
-          <a:effectRef idx="2">
-            <a:schemeClr val="accent1"/>
-          </a:effectRef>
-          <a:fontRef idx="minor">
-            <a:schemeClr val="lt1"/>
-          </a:fontRef>
-        </p:style>
-        <p:txBody>
-          <a:bodyPr rtlCol="0" anchor="ctr"/>
-          <a:lstStyle/>
-          <a:p>
-            <a:pPr algn="ctr"/>
-          </a:p>
-        </p:txBody>
-      </p:sp>
-      <p:sp>
-        <p:nvSpPr>
-          <p:cNvPr id="6" name="Rectangle 5"/>
-          <p:cNvSpPr/>
-          <p:nvPr/>
-        </p:nvSpPr>
-        <p:spPr>
-          <a:xfrm>
-            <a:off x="822960" y="2286000"/>
-            <a:ext cx="91440" cy="3291840"/>
-          </a:xfrm>
-          <a:prstGeom prst="rect">
-            <a:avLst/>
-          </a:prstGeom>
-          <a:solidFill>
-            <a:srgbClr val="C67A1E"/>
-          </a:solidFill>
-          <a:ln>
-            <a:noFill/>
-          </a:ln>
-          <a:effectLst/>
-        </p:spPr>
-        <p:style>
-          <a:lnRef idx="1">
-            <a:schemeClr val="accent1"/>
-          </a:lnRef>
-          <a:fillRef idx="3">
-            <a:schemeClr val="accent1"/>
-          </a:fillRef>
-          <a:effectRef idx="2">
-            <a:schemeClr val="accent1"/>
-          </a:effectRef>
-          <a:fontRef idx="minor">
-            <a:schemeClr val="lt1"/>
-          </a:fontRef>
-        </p:style>
-        <p:txBody>
-          <a:bodyPr rtlCol="0" anchor="ctr"/>
-          <a:lstStyle/>
-          <a:p>
-            <a:pPr algn="ctr"/>
+            <a:ext cx="548640" cy="457200"/>
+          </a:xfrm>
+          <a:prstGeom prst="rect">
+            <a:avLst/>
+          </a:prstGeom>
+          <a:noFill/>
+        </p:spPr>
+        <p:txBody>
+          <a:bodyPr wrap="square" anchor="t" lIns="0" rIns="0" tIns="0" bIns="0">
+            <a:spAutoFit/>
+          </a:bodyPr>
+          <a:lstStyle/>
+          <a:p>
+            <a:pPr algn="l">
+              <a:lnSpc>
+                <a:spcPct val="115000"/>
+              </a:lnSpc>
+            </a:pPr>
+            <a:r>
+              <a:rPr sz="1800" b="1" i="0">
+                <a:solidFill>
+                  <a:srgbClr val="FFC53D"/>
+                </a:solidFill>
+                <a:latin typeface="Century Gothic"/>
+              </a:rPr>
+              <a:t>01</a:t>
+            </a:r>
+          </a:p>
+        </p:txBody>
+      </p:sp>
+      <p:sp>
+        <p:nvSpPr>
+          <p:cNvPr id="6" name="TextBox 5"/>
+          <p:cNvSpPr txBox="1"/>
+          <p:nvPr/>
+        </p:nvSpPr>
+        <p:spPr>
+          <a:xfrm>
+            <a:off x="1463040" y="2313432"/>
+            <a:ext cx="9326880" cy="548640"/>
+          </a:xfrm>
+          <a:prstGeom prst="rect">
+            <a:avLst/>
+          </a:prstGeom>
+          <a:noFill/>
+        </p:spPr>
+        <p:txBody>
+          <a:bodyPr wrap="square" anchor="t" lIns="0" rIns="0" tIns="0" bIns="0">
+            <a:spAutoFit/>
+          </a:bodyPr>
+          <a:lstStyle/>
+          <a:p>
+            <a:pPr algn="l">
+              <a:lnSpc>
+                <a:spcPct val="130000"/>
+              </a:lnSpc>
+            </a:pPr>
+            <a:r>
+              <a:rPr sz="1450" b="0" i="0">
+                <a:solidFill>
+                  <a:srgbClr val="E9E6F2"/>
+                </a:solidFill>
+                <a:latin typeface="Calibri"/>
+              </a:rPr>
+              <a:t>Understand before you copy — if you can't explain a line of code, don't ship it.</a:t>
+            </a:r>
           </a:p>
         </p:txBody>
       </p:sp>
@@ -7990,8 +8822,8 @@
         </p:nvSpPr>
         <p:spPr>
           <a:xfrm>
-            <a:off x="1280160" y="2697480"/>
-            <a:ext cx="9601200" cy="2560320"/>
+            <a:off x="822960" y="2999232"/>
+            <a:ext cx="548640" cy="457200"/>
           </a:xfrm>
           <a:prstGeom prst="rect">
             <a:avLst/>
@@ -8006,24 +8838,297 @@
           <a:p>
             <a:pPr algn="l">
               <a:lnSpc>
-                <a:spcPct val="155000"/>
-              </a:lnSpc>
-            </a:pPr>
-            <a:r>
-              <a:rPr sz="2000" b="0" i="0">
-                <a:solidFill>
-                  <a:srgbClr val="1C1730"/>
+                <a:spcPct val="115000"/>
+              </a:lnSpc>
+            </a:pPr>
+            <a:r>
+              <a:rPr sz="1800" b="1" i="0">
+                <a:solidFill>
+                  <a:srgbClr val="FFC53D"/>
+                </a:solidFill>
+                <a:latin typeface="Century Gothic"/>
+              </a:rPr>
+              <a:t>02</a:t>
+            </a:r>
+          </a:p>
+        </p:txBody>
+      </p:sp>
+      <p:sp>
+        <p:nvSpPr>
+          <p:cNvPr id="8" name="TextBox 7"/>
+          <p:cNvSpPr txBox="1"/>
+          <p:nvPr/>
+        </p:nvSpPr>
+        <p:spPr>
+          <a:xfrm>
+            <a:off x="1463040" y="3026664"/>
+            <a:ext cx="9326880" cy="548640"/>
+          </a:xfrm>
+          <a:prstGeom prst="rect">
+            <a:avLst/>
+          </a:prstGeom>
+          <a:noFill/>
+        </p:spPr>
+        <p:txBody>
+          <a:bodyPr wrap="square" anchor="t" lIns="0" rIns="0" tIns="0" bIns="0">
+            <a:spAutoFit/>
+          </a:bodyPr>
+          <a:lstStyle/>
+          <a:p>
+            <a:pPr algn="l">
+              <a:lnSpc>
+                <a:spcPct val="130000"/>
+              </a:lnSpc>
+            </a:pPr>
+            <a:r>
+              <a:rPr sz="1450" b="0" i="0">
+                <a:solidFill>
+                  <a:srgbClr val="E9E6F2"/>
                 </a:solidFill>
                 <a:latin typeface="Calibri"/>
               </a:rPr>
-              <a:t>Asymmetric cryptography gives you two mathematically related keys: a private key (secret, signs things) and a public key (shareable, verifies things). Ethereum and Bitcoin use ECDSA on a specific curve named secp256k1. One direction is easy; the other is computationally infeasible.</a:t>
-            </a:r>
-          </a:p>
-        </p:txBody>
-      </p:sp>
-      <p:sp>
-        <p:nvSpPr>
-          <p:cNvPr id="8" name="TextBox 7"/>
+              <a:t>Testnet first, always — never deploy something you haven't tested locally and on a testnet.</a:t>
+            </a:r>
+          </a:p>
+        </p:txBody>
+      </p:sp>
+      <p:sp>
+        <p:nvSpPr>
+          <p:cNvPr id="9" name="TextBox 8"/>
+          <p:cNvSpPr txBox="1"/>
+          <p:nvPr/>
+        </p:nvSpPr>
+        <p:spPr>
+          <a:xfrm>
+            <a:off x="822960" y="3712464"/>
+            <a:ext cx="548640" cy="457200"/>
+          </a:xfrm>
+          <a:prstGeom prst="rect">
+            <a:avLst/>
+          </a:prstGeom>
+          <a:noFill/>
+        </p:spPr>
+        <p:txBody>
+          <a:bodyPr wrap="square" anchor="t" lIns="0" rIns="0" tIns="0" bIns="0">
+            <a:spAutoFit/>
+          </a:bodyPr>
+          <a:lstStyle/>
+          <a:p>
+            <a:pPr algn="l">
+              <a:lnSpc>
+                <a:spcPct val="115000"/>
+              </a:lnSpc>
+            </a:pPr>
+            <a:r>
+              <a:rPr sz="1800" b="1" i="0">
+                <a:solidFill>
+                  <a:srgbClr val="FFC53D"/>
+                </a:solidFill>
+                <a:latin typeface="Century Gothic"/>
+              </a:rPr>
+              <a:t>03</a:t>
+            </a:r>
+          </a:p>
+        </p:txBody>
+      </p:sp>
+      <p:sp>
+        <p:nvSpPr>
+          <p:cNvPr id="10" name="TextBox 9"/>
+          <p:cNvSpPr txBox="1"/>
+          <p:nvPr/>
+        </p:nvSpPr>
+        <p:spPr>
+          <a:xfrm>
+            <a:off x="1463040" y="3739896"/>
+            <a:ext cx="9326880" cy="548640"/>
+          </a:xfrm>
+          <a:prstGeom prst="rect">
+            <a:avLst/>
+          </a:prstGeom>
+          <a:noFill/>
+        </p:spPr>
+        <p:txBody>
+          <a:bodyPr wrap="square" anchor="t" lIns="0" rIns="0" tIns="0" bIns="0">
+            <a:spAutoFit/>
+          </a:bodyPr>
+          <a:lstStyle/>
+          <a:p>
+            <a:pPr algn="l">
+              <a:lnSpc>
+                <a:spcPct val="130000"/>
+              </a:lnSpc>
+            </a:pPr>
+            <a:r>
+              <a:rPr sz="1450" b="0" i="0">
+                <a:solidFill>
+                  <a:srgbClr val="E9E6F2"/>
+                </a:solidFill>
+                <a:latin typeface="Calibri"/>
+              </a:rPr>
+              <a:t>No frontend before your contract works from the command line.</a:t>
+            </a:r>
+          </a:p>
+        </p:txBody>
+      </p:sp>
+      <p:sp>
+        <p:nvSpPr>
+          <p:cNvPr id="11" name="TextBox 10"/>
+          <p:cNvSpPr txBox="1"/>
+          <p:nvPr/>
+        </p:nvSpPr>
+        <p:spPr>
+          <a:xfrm>
+            <a:off x="822960" y="4425696"/>
+            <a:ext cx="548640" cy="457200"/>
+          </a:xfrm>
+          <a:prstGeom prst="rect">
+            <a:avLst/>
+          </a:prstGeom>
+          <a:noFill/>
+        </p:spPr>
+        <p:txBody>
+          <a:bodyPr wrap="square" anchor="t" lIns="0" rIns="0" tIns="0" bIns="0">
+            <a:spAutoFit/>
+          </a:bodyPr>
+          <a:lstStyle/>
+          <a:p>
+            <a:pPr algn="l">
+              <a:lnSpc>
+                <a:spcPct val="115000"/>
+              </a:lnSpc>
+            </a:pPr>
+            <a:r>
+              <a:rPr sz="1800" b="1" i="0">
+                <a:solidFill>
+                  <a:srgbClr val="FFC53D"/>
+                </a:solidFill>
+                <a:latin typeface="Century Gothic"/>
+              </a:rPr>
+              <a:t>04</a:t>
+            </a:r>
+          </a:p>
+        </p:txBody>
+      </p:sp>
+      <p:sp>
+        <p:nvSpPr>
+          <p:cNvPr id="12" name="TextBox 11"/>
+          <p:cNvSpPr txBox="1"/>
+          <p:nvPr/>
+        </p:nvSpPr>
+        <p:spPr>
+          <a:xfrm>
+            <a:off x="1463040" y="4453128"/>
+            <a:ext cx="9326880" cy="548640"/>
+          </a:xfrm>
+          <a:prstGeom prst="rect">
+            <a:avLst/>
+          </a:prstGeom>
+          <a:noFill/>
+        </p:spPr>
+        <p:txBody>
+          <a:bodyPr wrap="square" anchor="t" lIns="0" rIns="0" tIns="0" bIns="0">
+            <a:spAutoFit/>
+          </a:bodyPr>
+          <a:lstStyle/>
+          <a:p>
+            <a:pPr algn="l">
+              <a:lnSpc>
+                <a:spcPct val="130000"/>
+              </a:lnSpc>
+            </a:pPr>
+            <a:r>
+              <a:rPr sz="1450" b="0" i="0">
+                <a:solidFill>
+                  <a:srgbClr val="E9E6F2"/>
+                </a:solidFill>
+                <a:latin typeface="Calibri"/>
+              </a:rPr>
+              <a:t>Every contract gets at least a basic test — an untested contract is unfinished.</a:t>
+            </a:r>
+          </a:p>
+        </p:txBody>
+      </p:sp>
+      <p:sp>
+        <p:nvSpPr>
+          <p:cNvPr id="13" name="TextBox 12"/>
+          <p:cNvSpPr txBox="1"/>
+          <p:nvPr/>
+        </p:nvSpPr>
+        <p:spPr>
+          <a:xfrm>
+            <a:off x="822960" y="5138928"/>
+            <a:ext cx="548640" cy="457200"/>
+          </a:xfrm>
+          <a:prstGeom prst="rect">
+            <a:avLst/>
+          </a:prstGeom>
+          <a:noFill/>
+        </p:spPr>
+        <p:txBody>
+          <a:bodyPr wrap="square" anchor="t" lIns="0" rIns="0" tIns="0" bIns="0">
+            <a:spAutoFit/>
+          </a:bodyPr>
+          <a:lstStyle/>
+          <a:p>
+            <a:pPr algn="l">
+              <a:lnSpc>
+                <a:spcPct val="115000"/>
+              </a:lnSpc>
+            </a:pPr>
+            <a:r>
+              <a:rPr sz="1800" b="1" i="0">
+                <a:solidFill>
+                  <a:srgbClr val="FFC53D"/>
+                </a:solidFill>
+                <a:latin typeface="Century Gothic"/>
+              </a:rPr>
+              <a:t>05</a:t>
+            </a:r>
+          </a:p>
+        </p:txBody>
+      </p:sp>
+      <p:sp>
+        <p:nvSpPr>
+          <p:cNvPr id="14" name="TextBox 13"/>
+          <p:cNvSpPr txBox="1"/>
+          <p:nvPr/>
+        </p:nvSpPr>
+        <p:spPr>
+          <a:xfrm>
+            <a:off x="1463040" y="5166360"/>
+            <a:ext cx="9326880" cy="548640"/>
+          </a:xfrm>
+          <a:prstGeom prst="rect">
+            <a:avLst/>
+          </a:prstGeom>
+          <a:noFill/>
+        </p:spPr>
+        <p:txBody>
+          <a:bodyPr wrap="square" anchor="t" lIns="0" rIns="0" tIns="0" bIns="0">
+            <a:spAutoFit/>
+          </a:bodyPr>
+          <a:lstStyle/>
+          <a:p>
+            <a:pPr algn="l">
+              <a:lnSpc>
+                <a:spcPct val="130000"/>
+              </a:lnSpc>
+            </a:pPr>
+            <a:r>
+              <a:rPr sz="1450" b="0" i="0">
+                <a:solidFill>
+                  <a:srgbClr val="E9E6F2"/>
+                </a:solidFill>
+                <a:latin typeface="Calibri"/>
+              </a:rPr>
+              <a:t>Treat every external call as a potential attack.</a:t>
+            </a:r>
+          </a:p>
+        </p:txBody>
+      </p:sp>
+      <p:sp>
+        <p:nvSpPr>
+          <p:cNvPr id="15" name="TextBox 14"/>
           <p:cNvSpPr txBox="1"/>
           <p:nvPr/>
         </p:nvSpPr>
@@ -8055,7 +9160,7 @@
                 </a:solidFill>
                 <a:latin typeface="Consolas"/>
               </a:rPr>
-              <a:t>03 / 15</a:t>
+              <a:t>03 / 18</a:t>
             </a:r>
           </a:p>
         </p:txBody>
@@ -8093,7 +9198,7 @@
             <a:avLst/>
           </a:prstGeom>
           <a:solidFill>
-            <a:srgbClr val="F8F6F2"/>
+            <a:srgbClr val="1C1730"/>
           </a:solidFill>
           <a:ln>
             <a:noFill/>
@@ -8122,180 +9227,48 @@
           </a:p>
         </p:txBody>
       </p:sp>
-      <p:sp>
-        <p:nvSpPr>
-          <p:cNvPr id="3" name="TextBox 2"/>
-          <p:cNvSpPr txBox="1"/>
-          <p:nvPr/>
-        </p:nvSpPr>
-        <p:spPr>
-          <a:xfrm>
-            <a:off x="822960" y="640080"/>
-            <a:ext cx="10058400" cy="365760"/>
-          </a:xfrm>
-          <a:prstGeom prst="rect">
-            <a:avLst/>
-          </a:prstGeom>
-          <a:noFill/>
-        </p:spPr>
-        <p:txBody>
-          <a:bodyPr wrap="square" anchor="t" lIns="0" rIns="0" tIns="0" bIns="0">
-            <a:spAutoFit/>
-          </a:bodyPr>
-          <a:lstStyle/>
-          <a:p>
-            <a:pPr algn="l">
-              <a:lnSpc>
-                <a:spcPct val="115000"/>
-              </a:lnSpc>
-            </a:pPr>
-            <a:r>
-              <a:rPr sz="1300" b="1" i="0">
-                <a:solidFill>
-                  <a:srgbClr val="C67A1E"/>
-                </a:solidFill>
-                <a:latin typeface="Calibri"/>
-              </a:rPr>
-              <a:t>TOPIC 02 — PUBLIC / PRIVATE KEYS</a:t>
-            </a:r>
-          </a:p>
-        </p:txBody>
-      </p:sp>
-      <p:sp>
-        <p:nvSpPr>
-          <p:cNvPr id="4" name="TextBox 3"/>
-          <p:cNvSpPr txBox="1"/>
-          <p:nvPr/>
-        </p:nvSpPr>
-        <p:spPr>
-          <a:xfrm>
-            <a:off x="8503920" y="640080"/>
-            <a:ext cx="2834640" cy="365760"/>
-          </a:xfrm>
-          <a:prstGeom prst="rect">
-            <a:avLst/>
-          </a:prstGeom>
-          <a:noFill/>
-        </p:spPr>
-        <p:txBody>
-          <a:bodyPr wrap="square" anchor="t" lIns="0" rIns="0" tIns="0" bIns="0">
-            <a:spAutoFit/>
-          </a:bodyPr>
-          <a:lstStyle/>
-          <a:p>
-            <a:pPr algn="r">
-              <a:lnSpc>
-                <a:spcPct val="115000"/>
-              </a:lnSpc>
-            </a:pPr>
-            <a:r>
-              <a:rPr sz="1200" b="1" i="0">
-                <a:solidFill>
-                  <a:srgbClr val="5C576E"/>
-                </a:solidFill>
-                <a:latin typeface="Calibri"/>
-              </a:rPr>
-              <a:t>KEY IDEA 1 / 4</a:t>
-            </a:r>
-          </a:p>
-        </p:txBody>
-      </p:sp>
-      <p:sp>
-        <p:nvSpPr>
-          <p:cNvPr id="5" name="TextBox 4"/>
-          <p:cNvSpPr txBox="1"/>
-          <p:nvPr/>
-        </p:nvSpPr>
-        <p:spPr>
-          <a:xfrm>
-            <a:off x="822960" y="1097280"/>
-            <a:ext cx="9601200" cy="1005840"/>
-          </a:xfrm>
-          <a:prstGeom prst="rect">
-            <a:avLst/>
-          </a:prstGeom>
-          <a:noFill/>
-        </p:spPr>
-        <p:txBody>
-          <a:bodyPr wrap="square" anchor="t" lIns="0" rIns="0" tIns="0" bIns="0">
-            <a:spAutoFit/>
-          </a:bodyPr>
-          <a:lstStyle/>
-          <a:p>
-            <a:pPr algn="l">
-              <a:lnSpc>
-                <a:spcPct val="105000"/>
-              </a:lnSpc>
-            </a:pPr>
-            <a:r>
-              <a:rPr sz="3200" b="1" i="0">
-                <a:solidFill>
-                  <a:srgbClr val="1C1730"/>
-                </a:solidFill>
-                <a:latin typeface="Century Gothic"/>
-              </a:rPr>
-              <a:t>Private Key</a:t>
-            </a:r>
-          </a:p>
-        </p:txBody>
-      </p:sp>
-      <p:sp>
-        <p:nvSpPr>
-          <p:cNvPr id="6" name="TextBox 5"/>
-          <p:cNvSpPr txBox="1"/>
-          <p:nvPr/>
-        </p:nvSpPr>
-        <p:spPr>
-          <a:xfrm>
-            <a:off x="822960" y="2148840"/>
-            <a:ext cx="9875520" cy="2011680"/>
-          </a:xfrm>
-          <a:prstGeom prst="rect">
-            <a:avLst/>
-          </a:prstGeom>
-          <a:noFill/>
-        </p:spPr>
-        <p:txBody>
-          <a:bodyPr wrap="square" anchor="t" lIns="0" rIns="0" tIns="0" bIns="0">
-            <a:spAutoFit/>
-          </a:bodyPr>
-          <a:lstStyle/>
-          <a:p>
-            <a:pPr algn="l">
-              <a:lnSpc>
-                <a:spcPct val="150000"/>
-              </a:lnSpc>
-            </a:pPr>
-            <a:r>
-              <a:rPr sz="1650" b="0" i="0">
-                <a:solidFill>
-                  <a:srgbClr val="1C1730"/>
-                </a:solidFill>
-                <a:latin typeface="Calibri"/>
-              </a:rPr>
-              <a:t>A very large random number, generated when you create a wallet. Whoever holds it has complete control of the wallet. It must never be shared with anyone, ever, for any reason.</a:t>
-            </a:r>
-          </a:p>
-        </p:txBody>
-      </p:sp>
-      <p:sp>
-        <p:nvSpPr>
-          <p:cNvPr id="7" name="Rounded Rectangle 6"/>
+      <p:pic>
+        <p:nvPicPr>
+          <p:cNvPr id="3" name="Picture 2" descr="_cover_02.jpg"/>
+          <p:cNvPicPr>
+            <a:picLocks noChangeAspect="1"/>
+          </p:cNvPicPr>
+          <p:nvPr/>
+        </p:nvPicPr>
+        <p:blipFill>
+          <a:blip r:embed="rId2"/>
+          <a:stretch>
+            <a:fillRect/>
+          </a:stretch>
+        </p:blipFill>
+        <p:spPr>
+          <a:xfrm>
+            <a:off x="0" y="0"/>
+            <a:ext cx="12191695" cy="6858000"/>
+          </a:xfrm>
+          <a:prstGeom prst="rect">
+            <a:avLst/>
+          </a:prstGeom>
+        </p:spPr>
+      </p:pic>
+      <p:sp>
+        <p:nvSpPr>
+          <p:cNvPr id="4" name="Rectangle 3"/>
           <p:cNvSpPr/>
           <p:nvPr/>
         </p:nvSpPr>
         <p:spPr>
           <a:xfrm>
-            <a:off x="822960" y="4434840"/>
-            <a:ext cx="10515600" cy="1280160"/>
-          </a:xfrm>
-          <a:prstGeom prst="roundRect">
-            <a:avLst>
-              <a:gd name="adj" fmla="val 6000"/>
-            </a:avLst>
+            <a:off x="0" y="0"/>
+            <a:ext cx="12191695" cy="6858000"/>
+          </a:xfrm>
+          <a:prstGeom prst="rect">
+            <a:avLst/>
           </a:prstGeom>
           <a:solidFill>
-            <a:srgbClr val="F9F1E8"/>
+            <a:srgbClr val="1C1730">
+              <a:alpha val="45000"/>
+            </a:srgbClr>
           </a:solidFill>
           <a:ln>
             <a:noFill/>
@@ -8326,14 +9299,138 @@
       </p:sp>
       <p:sp>
         <p:nvSpPr>
+          <p:cNvPr id="5" name="Rectangle 4"/>
+          <p:cNvSpPr/>
+          <p:nvPr/>
+        </p:nvSpPr>
+        <p:spPr>
+          <a:xfrm>
+            <a:off x="0" y="0"/>
+            <a:ext cx="12191695" cy="6858000"/>
+          </a:xfrm>
+          <a:prstGeom prst="rect">
+            <a:avLst/>
+          </a:prstGeom>
+          <a:solidFill>
+            <a:srgbClr val="C67A1E">
+              <a:alpha val="35000"/>
+            </a:srgbClr>
+          </a:solidFill>
+          <a:ln>
+            <a:noFill/>
+          </a:ln>
+          <a:effectLst/>
+        </p:spPr>
+        <p:style>
+          <a:lnRef idx="1">
+            <a:schemeClr val="accent1"/>
+          </a:lnRef>
+          <a:fillRef idx="3">
+            <a:schemeClr val="accent1"/>
+          </a:fillRef>
+          <a:effectRef idx="2">
+            <a:schemeClr val="accent1"/>
+          </a:effectRef>
+          <a:fontRef idx="minor">
+            <a:schemeClr val="lt1"/>
+          </a:fontRef>
+        </p:style>
+        <p:txBody>
+          <a:bodyPr rtlCol="0" anchor="ctr"/>
+          <a:lstStyle/>
+          <a:p>
+            <a:pPr algn="ctr"/>
+          </a:p>
+        </p:txBody>
+      </p:sp>
+      <p:sp>
+        <p:nvSpPr>
+          <p:cNvPr id="6" name="TextBox 5"/>
+          <p:cNvSpPr txBox="1"/>
+          <p:nvPr/>
+        </p:nvSpPr>
+        <p:spPr>
+          <a:xfrm>
+            <a:off x="822960" y="502920"/>
+            <a:ext cx="9144000" cy="365760"/>
+          </a:xfrm>
+          <a:prstGeom prst="rect">
+            <a:avLst/>
+          </a:prstGeom>
+          <a:noFill/>
+        </p:spPr>
+        <p:txBody>
+          <a:bodyPr wrap="square" anchor="t" lIns="0" rIns="0" tIns="0" bIns="0">
+            <a:spAutoFit/>
+          </a:bodyPr>
+          <a:lstStyle/>
+          <a:p>
+            <a:pPr algn="l">
+              <a:lnSpc>
+                <a:spcPct val="115000"/>
+              </a:lnSpc>
+            </a:pPr>
+            <a:r>
+              <a:rPr sz="1300" b="1" i="0">
+                <a:solidFill>
+                  <a:srgbClr val="FFC53D"/>
+                </a:solidFill>
+                <a:latin typeface="Calibri"/>
+              </a:rPr>
+              <a:t>BlockchainCourse · Curriculum · Week 01 · Topic 02 of 04</a:t>
+            </a:r>
+          </a:p>
+        </p:txBody>
+      </p:sp>
+      <p:sp>
+        <p:nvSpPr>
+          <p:cNvPr id="7" name="TextBox 6"/>
+          <p:cNvSpPr txBox="1"/>
+          <p:nvPr/>
+        </p:nvSpPr>
+        <p:spPr>
+          <a:xfrm>
+            <a:off x="822960" y="1188720"/>
+            <a:ext cx="5486400" cy="1188720"/>
+          </a:xfrm>
+          <a:prstGeom prst="rect">
+            <a:avLst/>
+          </a:prstGeom>
+          <a:noFill/>
+        </p:spPr>
+        <p:txBody>
+          <a:bodyPr wrap="square" anchor="t" lIns="0" rIns="0" tIns="0" bIns="0">
+            <a:spAutoFit/>
+          </a:bodyPr>
+          <a:lstStyle/>
+          <a:p>
+            <a:pPr algn="l">
+              <a:lnSpc>
+                <a:spcPct val="115000"/>
+              </a:lnSpc>
+            </a:pPr>
+            <a:r>
+              <a:rPr sz="10000" b="1" i="0">
+                <a:solidFill>
+                  <a:srgbClr val="FFFFFF"/>
+                </a:solidFill>
+                <a:latin typeface="Century Gothic"/>
+              </a:rPr>
+              <a:t>02</a:t>
+            </a:r>
+          </a:p>
+        </p:txBody>
+      </p:sp>
+      <p:sp>
+        <p:nvSpPr>
           <p:cNvPr id="8" name="TextBox 7"/>
           <p:cNvSpPr txBox="1"/>
           <p:nvPr/>
         </p:nvSpPr>
         <p:spPr>
           <a:xfrm>
-            <a:off x="1143000" y="4617720"/>
-            <a:ext cx="9875520" cy="320040"/>
+            <a:off x="822960" y="2423160"/>
+            <a:ext cx="8961120" cy="1554480"/>
           </a:xfrm>
           <a:prstGeom prst="rect">
             <a:avLst/>
@@ -8348,63 +9445,334 @@
           <a:p>
             <a:pPr algn="l">
               <a:lnSpc>
+                <a:spcPct val="105000"/>
+              </a:lnSpc>
+            </a:pPr>
+            <a:r>
+              <a:rPr sz="4600" b="1" i="0">
+                <a:solidFill>
+                  <a:srgbClr val="FFFFFF"/>
+                </a:solidFill>
+                <a:latin typeface="Century Gothic"/>
+              </a:rPr>
+              <a:t>Public / Private Keys</a:t>
+            </a:r>
+          </a:p>
+        </p:txBody>
+      </p:sp>
+      <p:sp>
+        <p:nvSpPr>
+          <p:cNvPr id="9" name="TextBox 8"/>
+          <p:cNvSpPr txBox="1"/>
+          <p:nvPr/>
+        </p:nvSpPr>
+        <p:spPr>
+          <a:xfrm>
+            <a:off x="822960" y="4160520"/>
+            <a:ext cx="6858000" cy="1097280"/>
+          </a:xfrm>
+          <a:prstGeom prst="rect">
+            <a:avLst/>
+          </a:prstGeom>
+          <a:noFill/>
+        </p:spPr>
+        <p:txBody>
+          <a:bodyPr wrap="square" anchor="t" lIns="0" rIns="0" tIns="0" bIns="0">
+            <a:spAutoFit/>
+          </a:bodyPr>
+          <a:lstStyle/>
+          <a:p>
+            <a:pPr algn="l">
+              <a:lnSpc>
+                <a:spcPct val="125000"/>
+              </a:lnSpc>
+            </a:pPr>
+            <a:r>
+              <a:rPr sz="1900" b="0" i="0">
+                <a:solidFill>
+                  <a:srgbClr val="FFFFFF"/>
+                </a:solidFill>
+                <a:latin typeface="Calibri"/>
+              </a:rPr>
+              <a:t>Prove ownership without ever revealing the secret that proves it.</a:t>
+            </a:r>
+          </a:p>
+        </p:txBody>
+      </p:sp>
+      <p:sp>
+        <p:nvSpPr>
+          <p:cNvPr id="10" name="Rounded Rectangle 9"/>
+          <p:cNvSpPr/>
+          <p:nvPr/>
+        </p:nvSpPr>
+        <p:spPr>
+          <a:xfrm>
+            <a:off x="822960" y="5669280"/>
+            <a:ext cx="1100937" cy="402336"/>
+          </a:xfrm>
+          <a:prstGeom prst="roundRect">
+            <a:avLst>
+              <a:gd name="adj" fmla="val 50000"/>
+            </a:avLst>
+          </a:prstGeom>
+          <a:solidFill>
+            <a:srgbClr val="FFFFFF">
+              <a:alpha val="14000"/>
+            </a:srgbClr>
+          </a:solidFill>
+          <a:ln w="9525">
+            <a:solidFill>
+              <a:srgbClr val="FFFFFF"/>
+            </a:solidFill>
+          </a:ln>
+          <a:effectLst/>
+        </p:spPr>
+        <p:style>
+          <a:lnRef idx="1">
+            <a:schemeClr val="accent1"/>
+          </a:lnRef>
+          <a:fillRef idx="3">
+            <a:schemeClr val="accent1"/>
+          </a:fillRef>
+          <a:effectRef idx="2">
+            <a:schemeClr val="accent1"/>
+          </a:effectRef>
+          <a:fontRef idx="minor">
+            <a:schemeClr val="lt1"/>
+          </a:fontRef>
+        </p:style>
+        <p:txBody>
+          <a:bodyPr rtlCol="0" anchor="ctr" lIns="109728" rIns="109728" tIns="18288" bIns="18288" wrap="none"/>
+          <a:lstStyle/>
+          <a:p>
+            <a:pPr algn="ctr"/>
+            <a:r>
+              <a:rPr sz="1100" b="0">
+                <a:solidFill>
+                  <a:srgbClr val="DDD9E8"/>
+                </a:solidFill>
+                <a:latin typeface="Calibri"/>
+              </a:rPr>
+              <a:t>01 · Hashing</a:t>
+            </a:r>
+          </a:p>
+        </p:txBody>
+      </p:sp>
+      <p:sp>
+        <p:nvSpPr>
+          <p:cNvPr id="11" name="Rounded Rectangle 10"/>
+          <p:cNvSpPr/>
+          <p:nvPr/>
+        </p:nvSpPr>
+        <p:spPr>
+          <a:xfrm>
+            <a:off x="2070201" y="5669280"/>
+            <a:ext cx="2022652" cy="402336"/>
+          </a:xfrm>
+          <a:prstGeom prst="roundRect">
+            <a:avLst>
+              <a:gd name="adj" fmla="val 50000"/>
+            </a:avLst>
+          </a:prstGeom>
+          <a:solidFill>
+            <a:srgbClr val="C67A1E"/>
+          </a:solidFill>
+          <a:ln>
+            <a:noFill/>
+          </a:ln>
+          <a:effectLst/>
+        </p:spPr>
+        <p:style>
+          <a:lnRef idx="1">
+            <a:schemeClr val="accent1"/>
+          </a:lnRef>
+          <a:fillRef idx="3">
+            <a:schemeClr val="accent1"/>
+          </a:fillRef>
+          <a:effectRef idx="2">
+            <a:schemeClr val="accent1"/>
+          </a:effectRef>
+          <a:fontRef idx="minor">
+            <a:schemeClr val="lt1"/>
+          </a:fontRef>
+        </p:style>
+        <p:txBody>
+          <a:bodyPr rtlCol="0" anchor="ctr" lIns="109728" rIns="109728" tIns="18288" bIns="18288" wrap="none"/>
+          <a:lstStyle/>
+          <a:p>
+            <a:pPr algn="ctr"/>
+            <a:r>
+              <a:rPr sz="1100" b="1">
+                <a:solidFill>
+                  <a:srgbClr val="FFFFFF"/>
+                </a:solidFill>
+                <a:latin typeface="Calibri"/>
+              </a:rPr>
+              <a:t>02 · Public / Private Keys</a:t>
+            </a:r>
+          </a:p>
+        </p:txBody>
+      </p:sp>
+      <p:sp>
+        <p:nvSpPr>
+          <p:cNvPr id="12" name="Rounded Rectangle 11"/>
+          <p:cNvSpPr/>
+          <p:nvPr/>
+        </p:nvSpPr>
+        <p:spPr>
+          <a:xfrm>
+            <a:off x="4239157" y="5669280"/>
+            <a:ext cx="1627632" cy="402336"/>
+          </a:xfrm>
+          <a:prstGeom prst="roundRect">
+            <a:avLst>
+              <a:gd name="adj" fmla="val 50000"/>
+            </a:avLst>
+          </a:prstGeom>
+          <a:solidFill>
+            <a:srgbClr val="FFFFFF">
+              <a:alpha val="14000"/>
+            </a:srgbClr>
+          </a:solidFill>
+          <a:ln w="9525">
+            <a:solidFill>
+              <a:srgbClr val="FFFFFF"/>
+            </a:solidFill>
+          </a:ln>
+          <a:effectLst/>
+        </p:spPr>
+        <p:style>
+          <a:lnRef idx="1">
+            <a:schemeClr val="accent1"/>
+          </a:lnRef>
+          <a:fillRef idx="3">
+            <a:schemeClr val="accent1"/>
+          </a:fillRef>
+          <a:effectRef idx="2">
+            <a:schemeClr val="accent1"/>
+          </a:effectRef>
+          <a:fontRef idx="minor">
+            <a:schemeClr val="lt1"/>
+          </a:fontRef>
+        </p:style>
+        <p:txBody>
+          <a:bodyPr rtlCol="0" anchor="ctr" lIns="109728" rIns="109728" tIns="18288" bIns="18288" wrap="none"/>
+          <a:lstStyle/>
+          <a:p>
+            <a:pPr algn="ctr"/>
+            <a:r>
+              <a:rPr sz="1100" b="0">
+                <a:solidFill>
+                  <a:srgbClr val="DDD9E8"/>
+                </a:solidFill>
+                <a:latin typeface="Calibri"/>
+              </a:rPr>
+              <a:t>03 · Blocks &amp; Chains</a:t>
+            </a:r>
+          </a:p>
+        </p:txBody>
+      </p:sp>
+      <p:sp>
+        <p:nvSpPr>
+          <p:cNvPr id="13" name="Rounded Rectangle 12"/>
+          <p:cNvSpPr/>
+          <p:nvPr/>
+        </p:nvSpPr>
+        <p:spPr>
+          <a:xfrm>
+            <a:off x="6013093" y="5669280"/>
+            <a:ext cx="1232611" cy="402336"/>
+          </a:xfrm>
+          <a:prstGeom prst="roundRect">
+            <a:avLst>
+              <a:gd name="adj" fmla="val 50000"/>
+            </a:avLst>
+          </a:prstGeom>
+          <a:solidFill>
+            <a:srgbClr val="FFFFFF">
+              <a:alpha val="14000"/>
+            </a:srgbClr>
+          </a:solidFill>
+          <a:ln w="9525">
+            <a:solidFill>
+              <a:srgbClr val="FFFFFF"/>
+            </a:solidFill>
+          </a:ln>
+          <a:effectLst/>
+        </p:spPr>
+        <p:style>
+          <a:lnRef idx="1">
+            <a:schemeClr val="accent1"/>
+          </a:lnRef>
+          <a:fillRef idx="3">
+            <a:schemeClr val="accent1"/>
+          </a:fillRef>
+          <a:effectRef idx="2">
+            <a:schemeClr val="accent1"/>
+          </a:effectRef>
+          <a:fontRef idx="minor">
+            <a:schemeClr val="lt1"/>
+          </a:fontRef>
+        </p:style>
+        <p:txBody>
+          <a:bodyPr rtlCol="0" anchor="ctr" lIns="109728" rIns="109728" tIns="18288" bIns="18288" wrap="none"/>
+          <a:lstStyle/>
+          <a:p>
+            <a:pPr algn="ctr"/>
+            <a:r>
+              <a:rPr sz="1100" b="0">
+                <a:solidFill>
+                  <a:srgbClr val="DDD9E8"/>
+                </a:solidFill>
+                <a:latin typeface="Calibri"/>
+              </a:rPr>
+              <a:t>04 · Consensus</a:t>
+            </a:r>
+          </a:p>
+        </p:txBody>
+      </p:sp>
+      <p:sp>
+        <p:nvSpPr>
+          <p:cNvPr id="14" name="TextBox 13"/>
+          <p:cNvSpPr txBox="1"/>
+          <p:nvPr/>
+        </p:nvSpPr>
+        <p:spPr>
+          <a:xfrm>
+            <a:off x="822960" y="6446520"/>
+            <a:ext cx="8229600" cy="320040"/>
+          </a:xfrm>
+          <a:prstGeom prst="rect">
+            <a:avLst/>
+          </a:prstGeom>
+          <a:noFill/>
+        </p:spPr>
+        <p:txBody>
+          <a:bodyPr wrap="square" anchor="t" lIns="0" rIns="0" tIns="0" bIns="0">
+            <a:spAutoFit/>
+          </a:bodyPr>
+          <a:lstStyle/>
+          <a:p>
+            <a:pPr algn="l">
+              <a:lnSpc>
                 <a:spcPct val="115000"/>
               </a:lnSpc>
             </a:pPr>
             <a:r>
-              <a:rPr sz="1100" b="1" i="0">
-                <a:solidFill>
-                  <a:srgbClr val="C67A1E"/>
+              <a:rPr sz="1000" b="0" i="0">
+                <a:solidFill>
+                  <a:srgbClr val="E9E6F2"/>
                 </a:solidFill>
                 <a:latin typeface="Calibri"/>
               </a:rPr>
-              <a:t>EXAMPLE</a:t>
-            </a:r>
-          </a:p>
-        </p:txBody>
-      </p:sp>
-      <p:sp>
-        <p:nvSpPr>
-          <p:cNvPr id="9" name="TextBox 8"/>
-          <p:cNvSpPr txBox="1"/>
-          <p:nvPr/>
-        </p:nvSpPr>
-        <p:spPr>
-          <a:xfrm>
-            <a:off x="1143000" y="4956048"/>
-            <a:ext cx="9875520" cy="640080"/>
-          </a:xfrm>
-          <a:prstGeom prst="rect">
-            <a:avLst/>
-          </a:prstGeom>
-          <a:noFill/>
-        </p:spPr>
-        <p:txBody>
-          <a:bodyPr wrap="square" anchor="t" lIns="0" rIns="0" tIns="0" bIns="0">
-            <a:spAutoFit/>
-          </a:bodyPr>
-          <a:lstStyle/>
-          <a:p>
-            <a:pPr algn="l">
-              <a:lnSpc>
-                <a:spcPct val="130000"/>
-              </a:lnSpc>
-            </a:pPr>
-            <a:r>
-              <a:rPr sz="1400" b="0" i="0">
-                <a:solidFill>
-                  <a:srgbClr val="1C1730"/>
-                </a:solidFill>
-                <a:latin typeface="Consolas"/>
-              </a:rPr>
-              <a:t>A 256-bit random number — never leaves your device.</a:t>
-            </a:r>
-          </a:p>
-        </p:txBody>
-      </p:sp>
-      <p:sp>
-        <p:nvSpPr>
-          <p:cNvPr id="10" name="TextBox 9"/>
+              <a:t>Photo: Shillings1005 / Wikimedia Commons, CC BY-SA 4.0</a:t>
+            </a:r>
+          </a:p>
+        </p:txBody>
+      </p:sp>
+      <p:sp>
+        <p:nvSpPr>
+          <p:cNvPr id="15" name="TextBox 14"/>
           <p:cNvSpPr txBox="1"/>
           <p:nvPr/>
         </p:nvSpPr>
@@ -8436,7 +9804,7 @@
                 </a:solidFill>
                 <a:latin typeface="Consolas"/>
               </a:rPr>
-              <a:t>04 / 15</a:t>
+              <a:t>04 / 18</a:t>
             </a:r>
           </a:p>
         </p:txBody>
@@ -8550,21 +9918,99 @@
         </p:nvSpPr>
         <p:spPr>
           <a:xfrm>
-            <a:off x="8503920" y="640080"/>
-            <a:ext cx="2834640" cy="365760"/>
-          </a:xfrm>
-          <a:prstGeom prst="rect">
-            <a:avLst/>
-          </a:prstGeom>
-          <a:noFill/>
-        </p:spPr>
-        <p:txBody>
-          <a:bodyPr wrap="square" anchor="t" lIns="0" rIns="0" tIns="0" bIns="0">
-            <a:spAutoFit/>
-          </a:bodyPr>
-          <a:lstStyle/>
-          <a:p>
-            <a:pPr algn="r">
+            <a:off x="822960" y="1051560"/>
+            <a:ext cx="9601200" cy="1005840"/>
+          </a:xfrm>
+          <a:prstGeom prst="rect">
+            <a:avLst/>
+          </a:prstGeom>
+          <a:noFill/>
+        </p:spPr>
+        <p:txBody>
+          <a:bodyPr wrap="square" anchor="t" lIns="0" rIns="0" tIns="0" bIns="0">
+            <a:spAutoFit/>
+          </a:bodyPr>
+          <a:lstStyle/>
+          <a:p>
+            <a:pPr algn="l">
+              <a:lnSpc>
+                <a:spcPct val="105000"/>
+              </a:lnSpc>
+            </a:pPr>
+            <a:r>
+              <a:rPr sz="3200" b="1" i="0">
+                <a:solidFill>
+                  <a:srgbClr val="1C1730"/>
+                </a:solidFill>
+                <a:latin typeface="Century Gothic"/>
+              </a:rPr>
+              <a:t>Why This Matters</a:t>
+            </a:r>
+          </a:p>
+        </p:txBody>
+      </p:sp>
+      <p:sp>
+        <p:nvSpPr>
+          <p:cNvPr id="5" name="TextBox 4"/>
+          <p:cNvSpPr txBox="1"/>
+          <p:nvPr/>
+        </p:nvSpPr>
+        <p:spPr>
+          <a:xfrm>
+            <a:off x="822960" y="1965960"/>
+            <a:ext cx="9875520" cy="1463040"/>
+          </a:xfrm>
+          <a:prstGeom prst="rect">
+            <a:avLst/>
+          </a:prstGeom>
+          <a:noFill/>
+        </p:spPr>
+        <p:txBody>
+          <a:bodyPr wrap="square" anchor="t" lIns="0" rIns="0" tIns="0" bIns="0">
+            <a:spAutoFit/>
+          </a:bodyPr>
+          <a:lstStyle/>
+          <a:p>
+            <a:pPr algn="l">
+              <a:lnSpc>
+                <a:spcPct val="140000"/>
+              </a:lnSpc>
+            </a:pPr>
+            <a:r>
+              <a:rPr sz="1600" b="0" i="0">
+                <a:solidFill>
+                  <a:srgbClr val="5C576E"/>
+                </a:solidFill>
+                <a:latin typeface="Calibri"/>
+              </a:rPr>
+              <a:t>Hashing gave you tamper-evidence. Keys give you authorization — proving who's allowed to move funds, with no login system, no password reset, and no bank sitting in the middle. This is the entire foundation of blockchain authorization.</a:t>
+            </a:r>
+          </a:p>
+        </p:txBody>
+      </p:sp>
+      <p:sp>
+        <p:nvSpPr>
+          <p:cNvPr id="6" name="TextBox 5"/>
+          <p:cNvSpPr txBox="1"/>
+          <p:nvPr/>
+        </p:nvSpPr>
+        <p:spPr>
+          <a:xfrm>
+            <a:off x="822960" y="3657600"/>
+            <a:ext cx="9875520" cy="365760"/>
+          </a:xfrm>
+          <a:prstGeom prst="rect">
+            <a:avLst/>
+          </a:prstGeom>
+          <a:noFill/>
+        </p:spPr>
+        <p:txBody>
+          <a:bodyPr wrap="square" anchor="t" lIns="0" rIns="0" tIns="0" bIns="0">
+            <a:spAutoFit/>
+          </a:bodyPr>
+          <a:lstStyle/>
+          <a:p>
+            <a:pPr algn="l">
               <a:lnSpc>
                 <a:spcPct val="115000"/>
               </a:lnSpc>
@@ -8572,111 +10018,31 @@
             <a:r>
               <a:rPr sz="1200" b="1" i="0">
                 <a:solidFill>
-                  <a:srgbClr val="5C576E"/>
+                  <a:srgbClr val="C67A1E"/>
                 </a:solidFill>
                 <a:latin typeface="Calibri"/>
               </a:rPr>
-              <a:t>KEY IDEA 2 / 4</a:t>
-            </a:r>
-          </a:p>
-        </p:txBody>
-      </p:sp>
-      <p:sp>
-        <p:nvSpPr>
-          <p:cNvPr id="5" name="TextBox 4"/>
-          <p:cNvSpPr txBox="1"/>
-          <p:nvPr/>
-        </p:nvSpPr>
-        <p:spPr>
-          <a:xfrm>
-            <a:off x="822960" y="1097280"/>
-            <a:ext cx="9601200" cy="1005840"/>
-          </a:xfrm>
-          <a:prstGeom prst="rect">
-            <a:avLst/>
-          </a:prstGeom>
-          <a:noFill/>
-        </p:spPr>
-        <p:txBody>
-          <a:bodyPr wrap="square" anchor="t" lIns="0" rIns="0" tIns="0" bIns="0">
-            <a:spAutoFit/>
-          </a:bodyPr>
-          <a:lstStyle/>
-          <a:p>
-            <a:pPr algn="l">
-              <a:lnSpc>
-                <a:spcPct val="105000"/>
-              </a:lnSpc>
-            </a:pPr>
-            <a:r>
-              <a:rPr sz="3200" b="1" i="0">
-                <a:solidFill>
-                  <a:srgbClr val="1C1730"/>
-                </a:solidFill>
-                <a:latin typeface="Century Gothic"/>
-              </a:rPr>
-              <a:t>Public Key</a:t>
-            </a:r>
-          </a:p>
-        </p:txBody>
-      </p:sp>
-      <p:sp>
-        <p:nvSpPr>
-          <p:cNvPr id="6" name="TextBox 5"/>
-          <p:cNvSpPr txBox="1"/>
-          <p:nvPr/>
-        </p:nvSpPr>
-        <p:spPr>
-          <a:xfrm>
-            <a:off x="822960" y="2148840"/>
-            <a:ext cx="9875520" cy="2011680"/>
-          </a:xfrm>
-          <a:prstGeom prst="rect">
-            <a:avLst/>
-          </a:prstGeom>
-          <a:noFill/>
-        </p:spPr>
-        <p:txBody>
-          <a:bodyPr wrap="square" anchor="t" lIns="0" rIns="0" tIns="0" bIns="0">
-            <a:spAutoFit/>
-          </a:bodyPr>
-          <a:lstStyle/>
-          <a:p>
-            <a:pPr algn="l">
-              <a:lnSpc>
-                <a:spcPct val="150000"/>
-              </a:lnSpc>
-            </a:pPr>
-            <a:r>
-              <a:rPr sz="1650" b="0" i="0">
-                <a:solidFill>
-                  <a:srgbClr val="1C1730"/>
-                </a:solidFill>
-                <a:latin typeface="Calibri"/>
-              </a:rPr>
-              <a:t>Derived one-way from the private key, using a process similar in spirit to hashing. Safe to share — you cannot work backwards from a public key to the private key that produced it.</a:t>
-            </a:r>
-          </a:p>
-        </p:txBody>
-      </p:sp>
-      <p:sp>
-        <p:nvSpPr>
-          <p:cNvPr id="7" name="Rounded Rectangle 6"/>
+              <a:t>WHAT THIS SECTION COVERS</a:t>
+            </a:r>
+          </a:p>
+        </p:txBody>
+      </p:sp>
+      <p:sp>
+        <p:nvSpPr>
+          <p:cNvPr id="7" name="Rectangle 6"/>
           <p:cNvSpPr/>
           <p:nvPr/>
         </p:nvSpPr>
         <p:spPr>
           <a:xfrm>
-            <a:off x="822960" y="4434840"/>
-            <a:ext cx="10515600" cy="1280160"/>
-          </a:xfrm>
-          <a:prstGeom prst="roundRect">
-            <a:avLst>
-              <a:gd name="adj" fmla="val 6000"/>
-            </a:avLst>
+            <a:off x="822960" y="4197096"/>
+            <a:ext cx="82296" cy="82296"/>
+          </a:xfrm>
+          <a:prstGeom prst="rect">
+            <a:avLst/>
           </a:prstGeom>
           <a:solidFill>
-            <a:srgbClr val="F9F1E8"/>
+            <a:srgbClr val="C67A1E"/>
           </a:solidFill>
           <a:ln>
             <a:noFill/>
@@ -8713,8 +10079,8 @@
         </p:nvSpPr>
         <p:spPr>
           <a:xfrm>
-            <a:off x="1143000" y="4617720"/>
-            <a:ext cx="9875520" cy="320040"/>
+            <a:off x="1051560" y="4114800"/>
+            <a:ext cx="4709160" cy="365760"/>
           </a:xfrm>
           <a:prstGeom prst="rect">
             <a:avLst/>
@@ -8733,27 +10099,71 @@
               </a:lnSpc>
             </a:pPr>
             <a:r>
-              <a:rPr sz="1100" b="1" i="0">
-                <a:solidFill>
-                  <a:srgbClr val="C67A1E"/>
+              <a:rPr sz="1350" b="0" i="0">
+                <a:solidFill>
+                  <a:srgbClr val="1C1730"/>
                 </a:solidFill>
                 <a:latin typeface="Calibri"/>
               </a:rPr>
-              <a:t>EXAMPLE</a:t>
-            </a:r>
-          </a:p>
-        </p:txBody>
-      </p:sp>
-      <p:sp>
-        <p:nvSpPr>
-          <p:cNvPr id="9" name="TextBox 8"/>
-          <p:cNvSpPr txBox="1"/>
-          <p:nvPr/>
-        </p:nvSpPr>
-        <p:spPr>
-          <a:xfrm>
-            <a:off x="1143000" y="4956048"/>
-            <a:ext cx="9875520" cy="640080"/>
+              <a:t>Core concept</a:t>
+            </a:r>
+          </a:p>
+        </p:txBody>
+      </p:sp>
+      <p:sp>
+        <p:nvSpPr>
+          <p:cNvPr id="9" name="Rectangle 8"/>
+          <p:cNvSpPr/>
+          <p:nvPr/>
+        </p:nvSpPr>
+        <p:spPr>
+          <a:xfrm>
+            <a:off x="6035040" y="4197096"/>
+            <a:ext cx="82296" cy="82296"/>
+          </a:xfrm>
+          <a:prstGeom prst="rect">
+            <a:avLst/>
+          </a:prstGeom>
+          <a:solidFill>
+            <a:srgbClr val="C67A1E"/>
+          </a:solidFill>
+          <a:ln>
+            <a:noFill/>
+          </a:ln>
+          <a:effectLst/>
+        </p:spPr>
+        <p:style>
+          <a:lnRef idx="1">
+            <a:schemeClr val="accent1"/>
+          </a:lnRef>
+          <a:fillRef idx="3">
+            <a:schemeClr val="accent1"/>
+          </a:fillRef>
+          <a:effectRef idx="2">
+            <a:schemeClr val="accent1"/>
+          </a:effectRef>
+          <a:fontRef idx="minor">
+            <a:schemeClr val="lt1"/>
+          </a:fontRef>
+        </p:style>
+        <p:txBody>
+          <a:bodyPr rtlCol="0" anchor="ctr"/>
+          <a:lstStyle/>
+          <a:p>
+            <a:pPr algn="ctr"/>
+          </a:p>
+        </p:txBody>
+      </p:sp>
+      <p:sp>
+        <p:nvSpPr>
+          <p:cNvPr id="10" name="TextBox 9"/>
+          <p:cNvSpPr txBox="1"/>
+          <p:nvPr/>
+        </p:nvSpPr>
+        <p:spPr>
+          <a:xfrm>
+            <a:off x="6263640" y="4114800"/>
+            <a:ext cx="4709160" cy="365760"/>
           </a:xfrm>
           <a:prstGeom prst="rect">
             <a:avLst/>
@@ -8768,24 +10178,605 @@
           <a:p>
             <a:pPr algn="l">
               <a:lnSpc>
-                <a:spcPct val="130000"/>
-              </a:lnSpc>
-            </a:pPr>
-            <a:r>
-              <a:rPr sz="1400" b="0" i="0">
+                <a:spcPct val="115000"/>
+              </a:lnSpc>
+            </a:pPr>
+            <a:r>
+              <a:rPr sz="1350" b="0" i="0">
                 <a:solidFill>
                   <a:srgbClr val="1C1730"/>
                 </a:solidFill>
-                <a:latin typeface="Consolas"/>
-              </a:rPr>
-              <a:t>Private key → (one-way math) → Public key</a:t>
-            </a:r>
-          </a:p>
-        </p:txBody>
-      </p:sp>
-      <p:sp>
-        <p:nvSpPr>
-          <p:cNvPr id="10" name="TextBox 9"/>
+                <a:latin typeface="Calibri"/>
+              </a:rPr>
+              <a:t>Four key ideas, one at a time</a:t>
+            </a:r>
+          </a:p>
+        </p:txBody>
+      </p:sp>
+      <p:sp>
+        <p:nvSpPr>
+          <p:cNvPr id="11" name="Rectangle 10"/>
+          <p:cNvSpPr/>
+          <p:nvPr/>
+        </p:nvSpPr>
+        <p:spPr>
+          <a:xfrm>
+            <a:off x="822960" y="4654296"/>
+            <a:ext cx="82296" cy="82296"/>
+          </a:xfrm>
+          <a:prstGeom prst="rect">
+            <a:avLst/>
+          </a:prstGeom>
+          <a:solidFill>
+            <a:srgbClr val="C67A1E"/>
+          </a:solidFill>
+          <a:ln>
+            <a:noFill/>
+          </a:ln>
+          <a:effectLst/>
+        </p:spPr>
+        <p:style>
+          <a:lnRef idx="1">
+            <a:schemeClr val="accent1"/>
+          </a:lnRef>
+          <a:fillRef idx="3">
+            <a:schemeClr val="accent1"/>
+          </a:fillRef>
+          <a:effectRef idx="2">
+            <a:schemeClr val="accent1"/>
+          </a:effectRef>
+          <a:fontRef idx="minor">
+            <a:schemeClr val="lt1"/>
+          </a:fontRef>
+        </p:style>
+        <p:txBody>
+          <a:bodyPr rtlCol="0" anchor="ctr"/>
+          <a:lstStyle/>
+          <a:p>
+            <a:pPr algn="ctr"/>
+          </a:p>
+        </p:txBody>
+      </p:sp>
+      <p:sp>
+        <p:nvSpPr>
+          <p:cNvPr id="12" name="TextBox 11"/>
+          <p:cNvSpPr txBox="1"/>
+          <p:nvPr/>
+        </p:nvSpPr>
+        <p:spPr>
+          <a:xfrm>
+            <a:off x="1051560" y="4572000"/>
+            <a:ext cx="4709160" cy="365760"/>
+          </a:xfrm>
+          <a:prstGeom prst="rect">
+            <a:avLst/>
+          </a:prstGeom>
+          <a:noFill/>
+        </p:spPr>
+        <p:txBody>
+          <a:bodyPr wrap="square" anchor="t" lIns="0" rIns="0" tIns="0" bIns="0">
+            <a:spAutoFit/>
+          </a:bodyPr>
+          <a:lstStyle/>
+          <a:p>
+            <a:pPr algn="l">
+              <a:lnSpc>
+                <a:spcPct val="115000"/>
+              </a:lnSpc>
+            </a:pPr>
+            <a:r>
+              <a:rPr sz="1350" b="0" i="0">
+                <a:solidFill>
+                  <a:srgbClr val="1C1730"/>
+                </a:solidFill>
+                <a:latin typeface="Calibri"/>
+              </a:rPr>
+              <a:t>A real, reproducible worked example</a:t>
+            </a:r>
+          </a:p>
+        </p:txBody>
+      </p:sp>
+      <p:sp>
+        <p:nvSpPr>
+          <p:cNvPr id="13" name="Rectangle 12"/>
+          <p:cNvSpPr/>
+          <p:nvPr/>
+        </p:nvSpPr>
+        <p:spPr>
+          <a:xfrm>
+            <a:off x="6035040" y="4654296"/>
+            <a:ext cx="82296" cy="82296"/>
+          </a:xfrm>
+          <a:prstGeom prst="rect">
+            <a:avLst/>
+          </a:prstGeom>
+          <a:solidFill>
+            <a:srgbClr val="C67A1E"/>
+          </a:solidFill>
+          <a:ln>
+            <a:noFill/>
+          </a:ln>
+          <a:effectLst/>
+        </p:spPr>
+        <p:style>
+          <a:lnRef idx="1">
+            <a:schemeClr val="accent1"/>
+          </a:lnRef>
+          <a:fillRef idx="3">
+            <a:schemeClr val="accent1"/>
+          </a:fillRef>
+          <a:effectRef idx="2">
+            <a:schemeClr val="accent1"/>
+          </a:effectRef>
+          <a:fontRef idx="minor">
+            <a:schemeClr val="lt1"/>
+          </a:fontRef>
+        </p:style>
+        <p:txBody>
+          <a:bodyPr rtlCol="0" anchor="ctr"/>
+          <a:lstStyle/>
+          <a:p>
+            <a:pPr algn="ctr"/>
+          </a:p>
+        </p:txBody>
+      </p:sp>
+      <p:sp>
+        <p:nvSpPr>
+          <p:cNvPr id="14" name="TextBox 13"/>
+          <p:cNvSpPr txBox="1"/>
+          <p:nvPr/>
+        </p:nvSpPr>
+        <p:spPr>
+          <a:xfrm>
+            <a:off x="6263640" y="4572000"/>
+            <a:ext cx="4709160" cy="365760"/>
+          </a:xfrm>
+          <a:prstGeom prst="rect">
+            <a:avLst/>
+          </a:prstGeom>
+          <a:noFill/>
+        </p:spPr>
+        <p:txBody>
+          <a:bodyPr wrap="square" anchor="t" lIns="0" rIns="0" tIns="0" bIns="0">
+            <a:spAutoFit/>
+          </a:bodyPr>
+          <a:lstStyle/>
+          <a:p>
+            <a:pPr algn="l">
+              <a:lnSpc>
+                <a:spcPct val="115000"/>
+              </a:lnSpc>
+            </a:pPr>
+            <a:r>
+              <a:rPr sz="1350" b="0" i="0">
+                <a:solidFill>
+                  <a:srgbClr val="1C1730"/>
+                </a:solidFill>
+                <a:latin typeface="Calibri"/>
+              </a:rPr>
+              <a:t>Real-world uses beyond blockchain</a:t>
+            </a:r>
+          </a:p>
+        </p:txBody>
+      </p:sp>
+      <p:sp>
+        <p:nvSpPr>
+          <p:cNvPr id="15" name="Rectangle 14"/>
+          <p:cNvSpPr/>
+          <p:nvPr/>
+        </p:nvSpPr>
+        <p:spPr>
+          <a:xfrm>
+            <a:off x="822960" y="5111496"/>
+            <a:ext cx="82296" cy="82296"/>
+          </a:xfrm>
+          <a:prstGeom prst="rect">
+            <a:avLst/>
+          </a:prstGeom>
+          <a:solidFill>
+            <a:srgbClr val="C67A1E"/>
+          </a:solidFill>
+          <a:ln>
+            <a:noFill/>
+          </a:ln>
+          <a:effectLst/>
+        </p:spPr>
+        <p:style>
+          <a:lnRef idx="1">
+            <a:schemeClr val="accent1"/>
+          </a:lnRef>
+          <a:fillRef idx="3">
+            <a:schemeClr val="accent1"/>
+          </a:fillRef>
+          <a:effectRef idx="2">
+            <a:schemeClr val="accent1"/>
+          </a:effectRef>
+          <a:fontRef idx="minor">
+            <a:schemeClr val="lt1"/>
+          </a:fontRef>
+        </p:style>
+        <p:txBody>
+          <a:bodyPr rtlCol="0" anchor="ctr"/>
+          <a:lstStyle/>
+          <a:p>
+            <a:pPr algn="ctr"/>
+          </a:p>
+        </p:txBody>
+      </p:sp>
+      <p:sp>
+        <p:nvSpPr>
+          <p:cNvPr id="16" name="TextBox 15"/>
+          <p:cNvSpPr txBox="1"/>
+          <p:nvPr/>
+        </p:nvSpPr>
+        <p:spPr>
+          <a:xfrm>
+            <a:off x="1051560" y="5029200"/>
+            <a:ext cx="4709160" cy="365760"/>
+          </a:xfrm>
+          <a:prstGeom prst="rect">
+            <a:avLst/>
+          </a:prstGeom>
+          <a:noFill/>
+        </p:spPr>
+        <p:txBody>
+          <a:bodyPr wrap="square" anchor="t" lIns="0" rIns="0" tIns="0" bIns="0">
+            <a:spAutoFit/>
+          </a:bodyPr>
+          <a:lstStyle/>
+          <a:p>
+            <a:pPr algn="l">
+              <a:lnSpc>
+                <a:spcPct val="115000"/>
+              </a:lnSpc>
+            </a:pPr>
+            <a:r>
+              <a:rPr sz="1350" b="0" i="0">
+                <a:solidFill>
+                  <a:srgbClr val="1C1730"/>
+                </a:solidFill>
+                <a:latin typeface="Calibri"/>
+              </a:rPr>
+              <a:t>A flagship case study</a:t>
+            </a:r>
+          </a:p>
+        </p:txBody>
+      </p:sp>
+      <p:sp>
+        <p:nvSpPr>
+          <p:cNvPr id="17" name="Rectangle 16"/>
+          <p:cNvSpPr/>
+          <p:nvPr/>
+        </p:nvSpPr>
+        <p:spPr>
+          <a:xfrm>
+            <a:off x="6035040" y="5111496"/>
+            <a:ext cx="82296" cy="82296"/>
+          </a:xfrm>
+          <a:prstGeom prst="rect">
+            <a:avLst/>
+          </a:prstGeom>
+          <a:solidFill>
+            <a:srgbClr val="C67A1E"/>
+          </a:solidFill>
+          <a:ln>
+            <a:noFill/>
+          </a:ln>
+          <a:effectLst/>
+        </p:spPr>
+        <p:style>
+          <a:lnRef idx="1">
+            <a:schemeClr val="accent1"/>
+          </a:lnRef>
+          <a:fillRef idx="3">
+            <a:schemeClr val="accent1"/>
+          </a:fillRef>
+          <a:effectRef idx="2">
+            <a:schemeClr val="accent1"/>
+          </a:effectRef>
+          <a:fontRef idx="minor">
+            <a:schemeClr val="lt1"/>
+          </a:fontRef>
+        </p:style>
+        <p:txBody>
+          <a:bodyPr rtlCol="0" anchor="ctr"/>
+          <a:lstStyle/>
+          <a:p>
+            <a:pPr algn="ctr"/>
+          </a:p>
+        </p:txBody>
+      </p:sp>
+      <p:sp>
+        <p:nvSpPr>
+          <p:cNvPr id="18" name="TextBox 17"/>
+          <p:cNvSpPr txBox="1"/>
+          <p:nvPr/>
+        </p:nvSpPr>
+        <p:spPr>
+          <a:xfrm>
+            <a:off x="6263640" y="5029200"/>
+            <a:ext cx="4709160" cy="365760"/>
+          </a:xfrm>
+          <a:prstGeom prst="rect">
+            <a:avLst/>
+          </a:prstGeom>
+          <a:noFill/>
+        </p:spPr>
+        <p:txBody>
+          <a:bodyPr wrap="square" anchor="t" lIns="0" rIns="0" tIns="0" bIns="0">
+            <a:spAutoFit/>
+          </a:bodyPr>
+          <a:lstStyle/>
+          <a:p>
+            <a:pPr algn="l">
+              <a:lnSpc>
+                <a:spcPct val="115000"/>
+              </a:lnSpc>
+            </a:pPr>
+            <a:r>
+              <a:rPr sz="1350" b="0" i="0">
+                <a:solidFill>
+                  <a:srgbClr val="1C1730"/>
+                </a:solidFill>
+                <a:latin typeface="Calibri"/>
+              </a:rPr>
+              <a:t>A real-life analogy</a:t>
+            </a:r>
+          </a:p>
+        </p:txBody>
+      </p:sp>
+      <p:sp>
+        <p:nvSpPr>
+          <p:cNvPr id="19" name="Rectangle 18"/>
+          <p:cNvSpPr/>
+          <p:nvPr/>
+        </p:nvSpPr>
+        <p:spPr>
+          <a:xfrm>
+            <a:off x="822960" y="5568696"/>
+            <a:ext cx="82296" cy="82296"/>
+          </a:xfrm>
+          <a:prstGeom prst="rect">
+            <a:avLst/>
+          </a:prstGeom>
+          <a:solidFill>
+            <a:srgbClr val="C67A1E"/>
+          </a:solidFill>
+          <a:ln>
+            <a:noFill/>
+          </a:ln>
+          <a:effectLst/>
+        </p:spPr>
+        <p:style>
+          <a:lnRef idx="1">
+            <a:schemeClr val="accent1"/>
+          </a:lnRef>
+          <a:fillRef idx="3">
+            <a:schemeClr val="accent1"/>
+          </a:fillRef>
+          <a:effectRef idx="2">
+            <a:schemeClr val="accent1"/>
+          </a:effectRef>
+          <a:fontRef idx="minor">
+            <a:schemeClr val="lt1"/>
+          </a:fontRef>
+        </p:style>
+        <p:txBody>
+          <a:bodyPr rtlCol="0" anchor="ctr"/>
+          <a:lstStyle/>
+          <a:p>
+            <a:pPr algn="ctr"/>
+          </a:p>
+        </p:txBody>
+      </p:sp>
+      <p:sp>
+        <p:nvSpPr>
+          <p:cNvPr id="20" name="TextBox 19"/>
+          <p:cNvSpPr txBox="1"/>
+          <p:nvPr/>
+        </p:nvSpPr>
+        <p:spPr>
+          <a:xfrm>
+            <a:off x="1051560" y="5486400"/>
+            <a:ext cx="4709160" cy="365760"/>
+          </a:xfrm>
+          <a:prstGeom prst="rect">
+            <a:avLst/>
+          </a:prstGeom>
+          <a:noFill/>
+        </p:spPr>
+        <p:txBody>
+          <a:bodyPr wrap="square" anchor="t" lIns="0" rIns="0" tIns="0" bIns="0">
+            <a:spAutoFit/>
+          </a:bodyPr>
+          <a:lstStyle/>
+          <a:p>
+            <a:pPr algn="l">
+              <a:lnSpc>
+                <a:spcPct val="115000"/>
+              </a:lnSpc>
+            </a:pPr>
+            <a:r>
+              <a:rPr sz="1350" b="0" i="0">
+                <a:solidFill>
+                  <a:srgbClr val="1C1730"/>
+                </a:solidFill>
+                <a:latin typeface="Calibri"/>
+              </a:rPr>
+              <a:t>Common misconceptions</a:t>
+            </a:r>
+          </a:p>
+        </p:txBody>
+      </p:sp>
+      <p:sp>
+        <p:nvSpPr>
+          <p:cNvPr id="21" name="Rectangle 20"/>
+          <p:cNvSpPr/>
+          <p:nvPr/>
+        </p:nvSpPr>
+        <p:spPr>
+          <a:xfrm>
+            <a:off x="6035040" y="5568696"/>
+            <a:ext cx="82296" cy="82296"/>
+          </a:xfrm>
+          <a:prstGeom prst="rect">
+            <a:avLst/>
+          </a:prstGeom>
+          <a:solidFill>
+            <a:srgbClr val="C67A1E"/>
+          </a:solidFill>
+          <a:ln>
+            <a:noFill/>
+          </a:ln>
+          <a:effectLst/>
+        </p:spPr>
+        <p:style>
+          <a:lnRef idx="1">
+            <a:schemeClr val="accent1"/>
+          </a:lnRef>
+          <a:fillRef idx="3">
+            <a:schemeClr val="accent1"/>
+          </a:fillRef>
+          <a:effectRef idx="2">
+            <a:schemeClr val="accent1"/>
+          </a:effectRef>
+          <a:fontRef idx="minor">
+            <a:schemeClr val="lt1"/>
+          </a:fontRef>
+        </p:style>
+        <p:txBody>
+          <a:bodyPr rtlCol="0" anchor="ctr"/>
+          <a:lstStyle/>
+          <a:p>
+            <a:pPr algn="ctr"/>
+          </a:p>
+        </p:txBody>
+      </p:sp>
+      <p:sp>
+        <p:nvSpPr>
+          <p:cNvPr id="22" name="TextBox 21"/>
+          <p:cNvSpPr txBox="1"/>
+          <p:nvPr/>
+        </p:nvSpPr>
+        <p:spPr>
+          <a:xfrm>
+            <a:off x="6263640" y="5486400"/>
+            <a:ext cx="4709160" cy="365760"/>
+          </a:xfrm>
+          <a:prstGeom prst="rect">
+            <a:avLst/>
+          </a:prstGeom>
+          <a:noFill/>
+        </p:spPr>
+        <p:txBody>
+          <a:bodyPr wrap="square" anchor="t" lIns="0" rIns="0" tIns="0" bIns="0">
+            <a:spAutoFit/>
+          </a:bodyPr>
+          <a:lstStyle/>
+          <a:p>
+            <a:pPr algn="l">
+              <a:lnSpc>
+                <a:spcPct val="115000"/>
+              </a:lnSpc>
+            </a:pPr>
+            <a:r>
+              <a:rPr sz="1350" b="0" i="0">
+                <a:solidFill>
+                  <a:srgbClr val="1C1730"/>
+                </a:solidFill>
+                <a:latin typeface="Calibri"/>
+              </a:rPr>
+              <a:t>Hands-on practice</a:t>
+            </a:r>
+          </a:p>
+        </p:txBody>
+      </p:sp>
+      <p:sp>
+        <p:nvSpPr>
+          <p:cNvPr id="23" name="Rectangle 22"/>
+          <p:cNvSpPr/>
+          <p:nvPr/>
+        </p:nvSpPr>
+        <p:spPr>
+          <a:xfrm>
+            <a:off x="822960" y="6025896"/>
+            <a:ext cx="82296" cy="82296"/>
+          </a:xfrm>
+          <a:prstGeom prst="rect">
+            <a:avLst/>
+          </a:prstGeom>
+          <a:solidFill>
+            <a:srgbClr val="C67A1E"/>
+          </a:solidFill>
+          <a:ln>
+            <a:noFill/>
+          </a:ln>
+          <a:effectLst/>
+        </p:spPr>
+        <p:style>
+          <a:lnRef idx="1">
+            <a:schemeClr val="accent1"/>
+          </a:lnRef>
+          <a:fillRef idx="3">
+            <a:schemeClr val="accent1"/>
+          </a:fillRef>
+          <a:effectRef idx="2">
+            <a:schemeClr val="accent1"/>
+          </a:effectRef>
+          <a:fontRef idx="minor">
+            <a:schemeClr val="lt1"/>
+          </a:fontRef>
+        </p:style>
+        <p:txBody>
+          <a:bodyPr rtlCol="0" anchor="ctr"/>
+          <a:lstStyle/>
+          <a:p>
+            <a:pPr algn="ctr"/>
+          </a:p>
+        </p:txBody>
+      </p:sp>
+      <p:sp>
+        <p:nvSpPr>
+          <p:cNvPr id="24" name="TextBox 23"/>
+          <p:cNvSpPr txBox="1"/>
+          <p:nvPr/>
+        </p:nvSpPr>
+        <p:spPr>
+          <a:xfrm>
+            <a:off x="1051560" y="5943600"/>
+            <a:ext cx="4709160" cy="365760"/>
+          </a:xfrm>
+          <a:prstGeom prst="rect">
+            <a:avLst/>
+          </a:prstGeom>
+          <a:noFill/>
+        </p:spPr>
+        <p:txBody>
+          <a:bodyPr wrap="square" anchor="t" lIns="0" rIns="0" tIns="0" bIns="0">
+            <a:spAutoFit/>
+          </a:bodyPr>
+          <a:lstStyle/>
+          <a:p>
+            <a:pPr algn="l">
+              <a:lnSpc>
+                <a:spcPct val="115000"/>
+              </a:lnSpc>
+            </a:pPr>
+            <a:r>
+              <a:rPr sz="1350" b="0" i="0">
+                <a:solidFill>
+                  <a:srgbClr val="1C1730"/>
+                </a:solidFill>
+                <a:latin typeface="Calibri"/>
+              </a:rPr>
+              <a:t>Take-home assignment</a:t>
+            </a:r>
+          </a:p>
+        </p:txBody>
+      </p:sp>
+      <p:sp>
+        <p:nvSpPr>
+          <p:cNvPr id="25" name="TextBox 24"/>
           <p:cNvSpPr txBox="1"/>
           <p:nvPr/>
         </p:nvSpPr>
@@ -8817,7 +10808,7 @@
                 </a:solidFill>
                 <a:latin typeface="Consolas"/>
               </a:rPr>
-              <a:t>05 / 15</a:t>
+              <a:t>05 / 18</a:t>
             </a:r>
           </a:p>
         </p:txBody>
@@ -8931,45 +10922,6 @@
         </p:nvSpPr>
         <p:spPr>
           <a:xfrm>
-            <a:off x="8503920" y="640080"/>
-            <a:ext cx="2834640" cy="365760"/>
-          </a:xfrm>
-          <a:prstGeom prst="rect">
-            <a:avLst/>
-          </a:prstGeom>
-          <a:noFill/>
-        </p:spPr>
-        <p:txBody>
-          <a:bodyPr wrap="square" anchor="t" lIns="0" rIns="0" tIns="0" bIns="0">
-            <a:spAutoFit/>
-          </a:bodyPr>
-          <a:lstStyle/>
-          <a:p>
-            <a:pPr algn="r">
-              <a:lnSpc>
-                <a:spcPct val="115000"/>
-              </a:lnSpc>
-            </a:pPr>
-            <a:r>
-              <a:rPr sz="1200" b="1" i="0">
-                <a:solidFill>
-                  <a:srgbClr val="5C576E"/>
-                </a:solidFill>
-                <a:latin typeface="Calibri"/>
-              </a:rPr>
-              <a:t>KEY IDEA 3 / 4</a:t>
-            </a:r>
-          </a:p>
-        </p:txBody>
-      </p:sp>
-      <p:sp>
-        <p:nvSpPr>
-          <p:cNvPr id="5" name="TextBox 4"/>
-          <p:cNvSpPr txBox="1"/>
-          <p:nvPr/>
-        </p:nvSpPr>
-        <p:spPr>
-          <a:xfrm>
             <a:off x="822960" y="1097280"/>
             <a:ext cx="9601200" cy="1005840"/>
           </a:xfrm>
@@ -8990,74 +10942,35 @@
               </a:lnSpc>
             </a:pPr>
             <a:r>
-              <a:rPr sz="3200" b="1" i="0">
+              <a:rPr sz="3400" b="1" i="0">
                 <a:solidFill>
                   <a:srgbClr val="1C1730"/>
                 </a:solidFill>
                 <a:latin typeface="Century Gothic"/>
               </a:rPr>
-              <a:t>Signature</a:t>
-            </a:r>
-          </a:p>
-        </p:txBody>
-      </p:sp>
-      <p:sp>
-        <p:nvSpPr>
-          <p:cNvPr id="6" name="TextBox 5"/>
-          <p:cNvSpPr txBox="1"/>
-          <p:nvPr/>
-        </p:nvSpPr>
-        <p:spPr>
-          <a:xfrm>
-            <a:off x="822960" y="2148840"/>
-            <a:ext cx="9875520" cy="2011680"/>
-          </a:xfrm>
-          <a:prstGeom prst="rect">
-            <a:avLst/>
-          </a:prstGeom>
-          <a:noFill/>
-        </p:spPr>
-        <p:txBody>
-          <a:bodyPr wrap="square" anchor="t" lIns="0" rIns="0" tIns="0" bIns="0">
-            <a:spAutoFit/>
-          </a:bodyPr>
-          <a:lstStyle/>
-          <a:p>
-            <a:pPr algn="l">
-              <a:lnSpc>
-                <a:spcPct val="150000"/>
-              </a:lnSpc>
-            </a:pPr>
-            <a:r>
-              <a:rPr sz="1650" b="0" i="0">
-                <a:solidFill>
-                  <a:srgbClr val="1C1730"/>
-                </a:solidFill>
-                <a:latin typeface="Calibri"/>
-              </a:rPr>
-              <a:t>Produced using the private key, a signature proves you authorized a specific message — without ever revealing the key itself. Anyone can verify it using only your public key.</a:t>
-            </a:r>
-          </a:p>
-        </p:txBody>
-      </p:sp>
-      <p:sp>
-        <p:nvSpPr>
-          <p:cNvPr id="7" name="Rounded Rectangle 6"/>
+              <a:t>The Core Concept</a:t>
+            </a:r>
+          </a:p>
+        </p:txBody>
+      </p:sp>
+      <p:sp>
+        <p:nvSpPr>
+          <p:cNvPr id="5" name="Rounded Rectangle 4"/>
           <p:cNvSpPr/>
           <p:nvPr/>
         </p:nvSpPr>
         <p:spPr>
           <a:xfrm>
-            <a:off x="822960" y="4434840"/>
-            <a:ext cx="10515600" cy="1280160"/>
+            <a:off x="822960" y="2286000"/>
+            <a:ext cx="10515600" cy="3291840"/>
           </a:xfrm>
           <a:prstGeom prst="roundRect">
             <a:avLst>
-              <a:gd name="adj" fmla="val 6000"/>
+              <a:gd name="adj" fmla="val 4000"/>
             </a:avLst>
           </a:prstGeom>
           <a:solidFill>
-            <a:srgbClr val="F9F1E8"/>
+            <a:srgbClr val="FFFFFF"/>
           </a:solidFill>
           <a:ln>
             <a:noFill/>
@@ -9088,85 +11001,90 @@
       </p:sp>
       <p:sp>
         <p:nvSpPr>
+          <p:cNvPr id="6" name="Rectangle 5"/>
+          <p:cNvSpPr/>
+          <p:nvPr/>
+        </p:nvSpPr>
+        <p:spPr>
+          <a:xfrm>
+            <a:off x="822960" y="2286000"/>
+            <a:ext cx="91440" cy="3291840"/>
+          </a:xfrm>
+          <a:prstGeom prst="rect">
+            <a:avLst/>
+          </a:prstGeom>
+          <a:solidFill>
+            <a:srgbClr val="C67A1E"/>
+          </a:solidFill>
+          <a:ln>
+            <a:noFill/>
+          </a:ln>
+          <a:effectLst/>
+        </p:spPr>
+        <p:style>
+          <a:lnRef idx="1">
+            <a:schemeClr val="accent1"/>
+          </a:lnRef>
+          <a:fillRef idx="3">
+            <a:schemeClr val="accent1"/>
+          </a:fillRef>
+          <a:effectRef idx="2">
+            <a:schemeClr val="accent1"/>
+          </a:effectRef>
+          <a:fontRef idx="minor">
+            <a:schemeClr val="lt1"/>
+          </a:fontRef>
+        </p:style>
+        <p:txBody>
+          <a:bodyPr rtlCol="0" anchor="ctr"/>
+          <a:lstStyle/>
+          <a:p>
+            <a:pPr algn="ctr"/>
+          </a:p>
+        </p:txBody>
+      </p:sp>
+      <p:sp>
+        <p:nvSpPr>
+          <p:cNvPr id="7" name="TextBox 6"/>
+          <p:cNvSpPr txBox="1"/>
+          <p:nvPr/>
+        </p:nvSpPr>
+        <p:spPr>
+          <a:xfrm>
+            <a:off x="1280160" y="2697480"/>
+            <a:ext cx="9601200" cy="2560320"/>
+          </a:xfrm>
+          <a:prstGeom prst="rect">
+            <a:avLst/>
+          </a:prstGeom>
+          <a:noFill/>
+        </p:spPr>
+        <p:txBody>
+          <a:bodyPr wrap="square" anchor="t" lIns="0" rIns="0" tIns="0" bIns="0">
+            <a:spAutoFit/>
+          </a:bodyPr>
+          <a:lstStyle/>
+          <a:p>
+            <a:pPr algn="l">
+              <a:lnSpc>
+                <a:spcPct val="155000"/>
+              </a:lnSpc>
+            </a:pPr>
+            <a:r>
+              <a:rPr sz="2000" b="0" i="0">
+                <a:solidFill>
+                  <a:srgbClr val="1C1730"/>
+                </a:solidFill>
+                <a:latin typeface="Calibri"/>
+              </a:rPr>
+              <a:t>Asymmetric cryptography gives you two mathematically related keys: a private key (secret, signs things) and a public key (shareable, verifies things). Ethereum and Bitcoin use ECDSA on a specific curve named secp256k1. One direction is easy; the other is computationally infeasible.</a:t>
+            </a:r>
+          </a:p>
+        </p:txBody>
+      </p:sp>
+      <p:sp>
+        <p:nvSpPr>
           <p:cNvPr id="8" name="TextBox 7"/>
-          <p:cNvSpPr txBox="1"/>
-          <p:nvPr/>
-        </p:nvSpPr>
-        <p:spPr>
-          <a:xfrm>
-            <a:off x="1143000" y="4617720"/>
-            <a:ext cx="9875520" cy="320040"/>
-          </a:xfrm>
-          <a:prstGeom prst="rect">
-            <a:avLst/>
-          </a:prstGeom>
-          <a:noFill/>
-        </p:spPr>
-        <p:txBody>
-          <a:bodyPr wrap="square" anchor="t" lIns="0" rIns="0" tIns="0" bIns="0">
-            <a:spAutoFit/>
-          </a:bodyPr>
-          <a:lstStyle/>
-          <a:p>
-            <a:pPr algn="l">
-              <a:lnSpc>
-                <a:spcPct val="115000"/>
-              </a:lnSpc>
-            </a:pPr>
-            <a:r>
-              <a:rPr sz="1100" b="1" i="0">
-                <a:solidFill>
-                  <a:srgbClr val="C67A1E"/>
-                </a:solidFill>
-                <a:latin typeface="Calibri"/>
-              </a:rPr>
-              <a:t>EXAMPLE</a:t>
-            </a:r>
-          </a:p>
-        </p:txBody>
-      </p:sp>
-      <p:sp>
-        <p:nvSpPr>
-          <p:cNvPr id="9" name="TextBox 8"/>
-          <p:cNvSpPr txBox="1"/>
-          <p:nvPr/>
-        </p:nvSpPr>
-        <p:spPr>
-          <a:xfrm>
-            <a:off x="1143000" y="4956048"/>
-            <a:ext cx="9875520" cy="640080"/>
-          </a:xfrm>
-          <a:prstGeom prst="rect">
-            <a:avLst/>
-          </a:prstGeom>
-          <a:noFill/>
-        </p:spPr>
-        <p:txBody>
-          <a:bodyPr wrap="square" anchor="t" lIns="0" rIns="0" tIns="0" bIns="0">
-            <a:spAutoFit/>
-          </a:bodyPr>
-          <a:lstStyle/>
-          <a:p>
-            <a:pPr algn="l">
-              <a:lnSpc>
-                <a:spcPct val="130000"/>
-              </a:lnSpc>
-            </a:pPr>
-            <a:r>
-              <a:rPr sz="1400" b="0" i="0">
-                <a:solidFill>
-                  <a:srgbClr val="1C1730"/>
-                </a:solidFill>
-                <a:latin typeface="Consolas"/>
-              </a:rPr>
-              <a:t>sign(message, private key) → signature; verify(message, signature, public key) → true/false</a:t>
-            </a:r>
-          </a:p>
-        </p:txBody>
-      </p:sp>
-      <p:sp>
-        <p:nvSpPr>
-          <p:cNvPr id="10" name="TextBox 9"/>
           <p:cNvSpPr txBox="1"/>
           <p:nvPr/>
         </p:nvSpPr>
@@ -9198,7 +11116,7 @@
                 </a:solidFill>
                 <a:latin typeface="Consolas"/>
               </a:rPr>
-              <a:t>06 / 15</a:t>
+              <a:t>06 / 18</a:t>
             </a:r>
           </a:p>
         </p:txBody>
@@ -9338,7 +11256,7 @@
                 </a:solidFill>
                 <a:latin typeface="Calibri"/>
               </a:rPr>
-              <a:t>KEY IDEA 4 / 4</a:t>
+              <a:t>KEY IDEA 1 / 4</a:t>
             </a:r>
           </a:p>
         </p:txBody>
@@ -9377,7 +11295,7 @@
                 </a:solidFill>
                 <a:latin typeface="Century Gothic"/>
               </a:rPr>
-              <a:t>Address</a:t>
+              <a:t>Private Key</a:t>
             </a:r>
           </a:p>
         </p:txBody>
@@ -9416,7 +11334,7 @@
                 </a:solidFill>
                 <a:latin typeface="Calibri"/>
               </a:rPr>
-              <a:t>Your wallet address is a hash of your public key — one more one-way step, layered on top, for extra safety margin. This directly connects back to Topic 01: your address is literally a hash.</a:t>
+              <a:t>A very large random number, generated when you create a wallet. Whoever holds it has complete control of the wallet. It must never be shared with anyone, ever, for any reason.</a:t>
             </a:r>
           </a:p>
         </p:txBody>
@@ -9540,7 +11458,7 @@
                 </a:solidFill>
                 <a:latin typeface="Consolas"/>
               </a:rPr>
-              <a:t>Private key → Public key → hash() → Address (0x...)</a:t>
+              <a:t>A 256-bit random number — never leaves your device.</a:t>
             </a:r>
           </a:p>
         </p:txBody>
@@ -9579,7 +11497,7 @@
                 </a:solidFill>
                 <a:latin typeface="Consolas"/>
               </a:rPr>
-              <a:t>07 / 15</a:t>
+              <a:t>07 / 18</a:t>
             </a:r>
           </a:p>
         </p:txBody>
@@ -9680,7 +11598,7 @@
                 </a:solidFill>
                 <a:latin typeface="Calibri"/>
               </a:rPr>
-              <a:t>WORKED EXAMPLE — PART 1</a:t>
+              <a:t>TOPIC 02 — PUBLIC / PRIVATE KEYS</a:t>
             </a:r>
           </a:p>
         </p:txBody>
@@ -9693,8 +11611,47 @@
         </p:nvSpPr>
         <p:spPr>
           <a:xfrm>
-            <a:off x="822960" y="1051560"/>
-            <a:ext cx="10332720" cy="1005840"/>
+            <a:off x="8503920" y="640080"/>
+            <a:ext cx="2834640" cy="365760"/>
+          </a:xfrm>
+          <a:prstGeom prst="rect">
+            <a:avLst/>
+          </a:prstGeom>
+          <a:noFill/>
+        </p:spPr>
+        <p:txBody>
+          <a:bodyPr wrap="square" anchor="t" lIns="0" rIns="0" tIns="0" bIns="0">
+            <a:spAutoFit/>
+          </a:bodyPr>
+          <a:lstStyle/>
+          <a:p>
+            <a:pPr algn="r">
+              <a:lnSpc>
+                <a:spcPct val="115000"/>
+              </a:lnSpc>
+            </a:pPr>
+            <a:r>
+              <a:rPr sz="1200" b="1" i="0">
+                <a:solidFill>
+                  <a:srgbClr val="5C576E"/>
+                </a:solidFill>
+                <a:latin typeface="Calibri"/>
+              </a:rPr>
+              <a:t>KEY IDEA 2 / 4</a:t>
+            </a:r>
+          </a:p>
+        </p:txBody>
+      </p:sp>
+      <p:sp>
+        <p:nvSpPr>
+          <p:cNvPr id="5" name="TextBox 4"/>
+          <p:cNvSpPr txBox="1"/>
+          <p:nvPr/>
+        </p:nvSpPr>
+        <p:spPr>
+          <a:xfrm>
+            <a:off x="822960" y="1097280"/>
+            <a:ext cx="9601200" cy="1005840"/>
           </a:xfrm>
           <a:prstGeom prst="rect">
             <a:avLst/>
@@ -9713,35 +11670,74 @@
               </a:lnSpc>
             </a:pPr>
             <a:r>
-              <a:rPr sz="2700" b="1" i="0">
+              <a:rPr sz="3200" b="1" i="0">
                 <a:solidFill>
                   <a:srgbClr val="1C1730"/>
                 </a:solidFill>
                 <a:latin typeface="Century Gothic"/>
               </a:rPr>
-              <a:t>A Real secp256k1 Keypair, Generated With openssl</a:t>
-            </a:r>
-          </a:p>
-        </p:txBody>
-      </p:sp>
-      <p:sp>
-        <p:nvSpPr>
-          <p:cNvPr id="5" name="Rounded Rectangle 4"/>
+              <a:t>Public Key</a:t>
+            </a:r>
+          </a:p>
+        </p:txBody>
+      </p:sp>
+      <p:sp>
+        <p:nvSpPr>
+          <p:cNvPr id="6" name="TextBox 5"/>
+          <p:cNvSpPr txBox="1"/>
+          <p:nvPr/>
+        </p:nvSpPr>
+        <p:spPr>
+          <a:xfrm>
+            <a:off x="822960" y="2148840"/>
+            <a:ext cx="9875520" cy="2011680"/>
+          </a:xfrm>
+          <a:prstGeom prst="rect">
+            <a:avLst/>
+          </a:prstGeom>
+          <a:noFill/>
+        </p:spPr>
+        <p:txBody>
+          <a:bodyPr wrap="square" anchor="t" lIns="0" rIns="0" tIns="0" bIns="0">
+            <a:spAutoFit/>
+          </a:bodyPr>
+          <a:lstStyle/>
+          <a:p>
+            <a:pPr algn="l">
+              <a:lnSpc>
+                <a:spcPct val="150000"/>
+              </a:lnSpc>
+            </a:pPr>
+            <a:r>
+              <a:rPr sz="1650" b="0" i="0">
+                <a:solidFill>
+                  <a:srgbClr val="1C1730"/>
+                </a:solidFill>
+                <a:latin typeface="Calibri"/>
+              </a:rPr>
+              <a:t>Derived one-way from the private key, using a process similar in spirit to hashing. Safe to share — you cannot work backwards from a public key to the private key that produced it.</a:t>
+            </a:r>
+          </a:p>
+        </p:txBody>
+      </p:sp>
+      <p:sp>
+        <p:nvSpPr>
+          <p:cNvPr id="7" name="Rounded Rectangle 6"/>
           <p:cNvSpPr/>
           <p:nvPr/>
         </p:nvSpPr>
         <p:spPr>
           <a:xfrm>
-            <a:off x="822960" y="1965960"/>
-            <a:ext cx="10515600" cy="3840480"/>
+            <a:off x="822960" y="4434840"/>
+            <a:ext cx="10515600" cy="1280160"/>
           </a:xfrm>
           <a:prstGeom prst="roundRect">
             <a:avLst>
-              <a:gd name="adj" fmla="val 4500"/>
+              <a:gd name="adj" fmla="val 6000"/>
             </a:avLst>
           </a:prstGeom>
           <a:solidFill>
-            <a:srgbClr val="141026"/>
+            <a:srgbClr val="F9F1E8"/>
           </a:solidFill>
           <a:ln>
             <a:noFill/>
@@ -9772,133 +11768,40 @@
       </p:sp>
       <p:sp>
         <p:nvSpPr>
-          <p:cNvPr id="6" name="Oval 5"/>
-          <p:cNvSpPr/>
-          <p:nvPr/>
-        </p:nvSpPr>
-        <p:spPr>
-          <a:xfrm>
-            <a:off x="1024128" y="2130552"/>
-            <a:ext cx="109728" cy="109728"/>
-          </a:xfrm>
-          <a:prstGeom prst="ellipse">
-            <a:avLst/>
-          </a:prstGeom>
-          <a:solidFill>
-            <a:srgbClr val="FF6459"/>
-          </a:solidFill>
-          <a:ln>
-            <a:noFill/>
-          </a:ln>
-          <a:effectLst/>
-        </p:spPr>
-        <p:style>
-          <a:lnRef idx="1">
-            <a:schemeClr val="accent1"/>
-          </a:lnRef>
-          <a:fillRef idx="3">
-            <a:schemeClr val="accent1"/>
-          </a:fillRef>
-          <a:effectRef idx="2">
-            <a:schemeClr val="accent1"/>
-          </a:effectRef>
-          <a:fontRef idx="minor">
-            <a:schemeClr val="lt1"/>
-          </a:fontRef>
-        </p:style>
-        <p:txBody>
-          <a:bodyPr rtlCol="0" anchor="ctr"/>
-          <a:lstStyle/>
-          <a:p>
-            <a:pPr algn="ctr"/>
-          </a:p>
-        </p:txBody>
-      </p:sp>
-      <p:sp>
-        <p:nvSpPr>
-          <p:cNvPr id="7" name="Oval 6"/>
-          <p:cNvSpPr/>
-          <p:nvPr/>
-        </p:nvSpPr>
-        <p:spPr>
-          <a:xfrm>
-            <a:off x="1225296" y="2130552"/>
-            <a:ext cx="109728" cy="109728"/>
-          </a:xfrm>
-          <a:prstGeom prst="ellipse">
-            <a:avLst/>
-          </a:prstGeom>
-          <a:solidFill>
-            <a:srgbClr val="FFC02E"/>
-          </a:solidFill>
-          <a:ln>
-            <a:noFill/>
-          </a:ln>
-          <a:effectLst/>
-        </p:spPr>
-        <p:style>
-          <a:lnRef idx="1">
-            <a:schemeClr val="accent1"/>
-          </a:lnRef>
-          <a:fillRef idx="3">
-            <a:schemeClr val="accent1"/>
-          </a:fillRef>
-          <a:effectRef idx="2">
-            <a:schemeClr val="accent1"/>
-          </a:effectRef>
-          <a:fontRef idx="minor">
-            <a:schemeClr val="lt1"/>
-          </a:fontRef>
-        </p:style>
-        <p:txBody>
-          <a:bodyPr rtlCol="0" anchor="ctr"/>
-          <a:lstStyle/>
-          <a:p>
-            <a:pPr algn="ctr"/>
-          </a:p>
-        </p:txBody>
-      </p:sp>
-      <p:sp>
-        <p:nvSpPr>
-          <p:cNvPr id="8" name="Oval 7"/>
-          <p:cNvSpPr/>
-          <p:nvPr/>
-        </p:nvSpPr>
-        <p:spPr>
-          <a:xfrm>
-            <a:off x="1426464" y="2130552"/>
-            <a:ext cx="109728" cy="109728"/>
-          </a:xfrm>
-          <a:prstGeom prst="ellipse">
-            <a:avLst/>
-          </a:prstGeom>
-          <a:solidFill>
-            <a:srgbClr val="28C93F"/>
-          </a:solidFill>
-          <a:ln>
-            <a:noFill/>
-          </a:ln>
-          <a:effectLst/>
-        </p:spPr>
-        <p:style>
-          <a:lnRef idx="1">
-            <a:schemeClr val="accent1"/>
-          </a:lnRef>
-          <a:fillRef idx="3">
-            <a:schemeClr val="accent1"/>
-          </a:fillRef>
-          <a:effectRef idx="2">
-            <a:schemeClr val="accent1"/>
-          </a:effectRef>
-          <a:fontRef idx="minor">
-            <a:schemeClr val="lt1"/>
-          </a:fontRef>
-        </p:style>
-        <p:txBody>
-          <a:bodyPr rtlCol="0" anchor="ctr"/>
-          <a:lstStyle/>
-          <a:p>
-            <a:pPr algn="ctr"/>
+          <p:cNvPr id="8" name="TextBox 7"/>
+          <p:cNvSpPr txBox="1"/>
+          <p:nvPr/>
+        </p:nvSpPr>
+        <p:spPr>
+          <a:xfrm>
+            <a:off x="1143000" y="4617720"/>
+            <a:ext cx="9875520" cy="320040"/>
+          </a:xfrm>
+          <a:prstGeom prst="rect">
+            <a:avLst/>
+          </a:prstGeom>
+          <a:noFill/>
+        </p:spPr>
+        <p:txBody>
+          <a:bodyPr wrap="square" anchor="t" lIns="0" rIns="0" tIns="0" bIns="0">
+            <a:spAutoFit/>
+          </a:bodyPr>
+          <a:lstStyle/>
+          <a:p>
+            <a:pPr algn="l">
+              <a:lnSpc>
+                <a:spcPct val="115000"/>
+              </a:lnSpc>
+            </a:pPr>
+            <a:r>
+              <a:rPr sz="1100" b="1" i="0">
+                <a:solidFill>
+                  <a:srgbClr val="C67A1E"/>
+                </a:solidFill>
+                <a:latin typeface="Calibri"/>
+              </a:rPr>
+              <a:t>EXAMPLE</a:t>
+            </a:r>
           </a:p>
         </p:txBody>
       </p:sp>
@@ -9910,8 +11813,8 @@
         </p:nvSpPr>
         <p:spPr>
           <a:xfrm>
-            <a:off x="1078992" y="2350008"/>
-            <a:ext cx="10003536" cy="3273552"/>
+            <a:off x="1143000" y="4956048"/>
+            <a:ext cx="9875520" cy="640080"/>
           </a:xfrm>
           <a:prstGeom prst="rect">
             <a:avLst/>
@@ -9926,147 +11829,17 @@
           <a:p>
             <a:pPr algn="l">
               <a:lnSpc>
-                <a:spcPct val="135000"/>
-              </a:lnSpc>
-            </a:pPr>
-            <a:r>
-              <a:rPr sz="1350" b="1">
-                <a:solidFill>
-                  <a:srgbClr val="9C93C9"/>
+                <a:spcPct val="130000"/>
+              </a:lnSpc>
+            </a:pPr>
+            <a:r>
+              <a:rPr sz="1400" b="0" i="0">
+                <a:solidFill>
+                  <a:srgbClr val="1C1730"/>
                 </a:solidFill>
                 <a:latin typeface="Consolas"/>
               </a:rPr>
-              <a:t>$ </a:t>
-            </a:r>
-            <a:r>
-              <a:rPr sz="1350" b="0">
-                <a:solidFill>
-                  <a:srgbClr val="EDE9F7"/>
-                </a:solidFill>
-                <a:latin typeface="Consolas"/>
-              </a:rPr>
-              <a:t>openssl ecparam -name secp256k1 -genkey -noout -out priv.pem</a:t>
-            </a:r>
-          </a:p>
-          <a:p>
-            <a:pPr algn="l">
-              <a:lnSpc>
-                <a:spcPct val="135000"/>
-              </a:lnSpc>
-            </a:pPr>
-            <a:r>
-              <a:rPr sz="1350" b="1">
-                <a:solidFill>
-                  <a:srgbClr val="9C93C9"/>
-                </a:solidFill>
-                <a:latin typeface="Consolas"/>
-              </a:rPr>
-              <a:t>$ </a:t>
-            </a:r>
-            <a:r>
-              <a:rPr sz="1350" b="0">
-                <a:solidFill>
-                  <a:srgbClr val="EDE9F7"/>
-                </a:solidFill>
-                <a:latin typeface="Consolas"/>
-              </a:rPr>
-              <a:t>openssl ec -in priv.pem -pubout -out pub.pem</a:t>
-            </a:r>
-          </a:p>
-          <a:p>
-            <a:pPr algn="l">
-              <a:lnSpc>
-                <a:spcPct val="135000"/>
-              </a:lnSpc>
-            </a:pPr>
-            <a:r>
-              <a:rPr sz="1350" b="0">
-                <a:solidFill>
-                  <a:srgbClr val="EDE9F7"/>
-                </a:solidFill>
-                <a:latin typeface="Consolas"/>
-              </a:rPr>
-              <a:t/>
-            </a:r>
-          </a:p>
-          <a:p>
-            <a:pPr algn="l">
-              <a:lnSpc>
-                <a:spcPct val="135000"/>
-              </a:lnSpc>
-            </a:pPr>
-            <a:r>
-              <a:rPr sz="1350" b="0">
-                <a:solidFill>
-                  <a:srgbClr val="8B84AD"/>
-                </a:solidFill>
-                <a:latin typeface="Consolas"/>
-              </a:rPr>
-              <a:t># private key (excerpt):</a:t>
-            </a:r>
-          </a:p>
-          <a:p>
-            <a:pPr algn="l">
-              <a:lnSpc>
-                <a:spcPct val="135000"/>
-              </a:lnSpc>
-            </a:pPr>
-            <a:r>
-              <a:rPr sz="1350" b="0">
-                <a:solidFill>
-                  <a:srgbClr val="7FE0C4"/>
-                </a:solidFill>
-                <a:latin typeface="Consolas"/>
-              </a:rPr>
-              <a:t>MHQCAQEEIHoNT3gUJYe9tBv7ZZoRYRGGIGkvCFmX60mY...</a:t>
-            </a:r>
-          </a:p>
-          <a:p>
-            <a:pPr algn="l">
-              <a:lnSpc>
-                <a:spcPct val="135000"/>
-              </a:lnSpc>
-            </a:pPr>
-            <a:r>
-              <a:rPr sz="1350" b="0">
-                <a:solidFill>
-                  <a:srgbClr val="EDE9F7"/>
-                </a:solidFill>
-                <a:latin typeface="Consolas"/>
-              </a:rPr>
-              <a:t/>
-            </a:r>
-          </a:p>
-          <a:p>
-            <a:pPr algn="l">
-              <a:lnSpc>
-                <a:spcPct val="135000"/>
-              </a:lnSpc>
-            </a:pPr>
-            <a:r>
-              <a:rPr sz="1350" b="0">
-                <a:solidFill>
-                  <a:srgbClr val="8B84AD"/>
-                </a:solidFill>
-                <a:latin typeface="Consolas"/>
-              </a:rPr>
-              <a:t># public key, derived one-way (excerpt):</a:t>
-            </a:r>
-          </a:p>
-          <a:p>
-            <a:pPr algn="l">
-              <a:lnSpc>
-                <a:spcPct val="135000"/>
-              </a:lnSpc>
-            </a:pPr>
-            <a:r>
-              <a:rPr sz="1350" b="0">
-                <a:solidFill>
-                  <a:srgbClr val="7FE0C4"/>
-                </a:solidFill>
-                <a:latin typeface="Consolas"/>
-              </a:rPr>
-              <a:t>MFYwEAYHKoZIzj0CAQYFK4EEAAoDQgAEjO0NYj4xwIE6...</a:t>
+              <a:t>Private key → (one-way math) → Public key</a:t>
             </a:r>
           </a:p>
         </p:txBody>
@@ -10074,45 +11847,6 @@
       <p:sp>
         <p:nvSpPr>
           <p:cNvPr id="10" name="TextBox 9"/>
-          <p:cNvSpPr txBox="1"/>
-          <p:nvPr/>
-        </p:nvSpPr>
-        <p:spPr>
-          <a:xfrm>
-            <a:off x="822960" y="6446520"/>
-            <a:ext cx="10058400" cy="320040"/>
-          </a:xfrm>
-          <a:prstGeom prst="rect">
-            <a:avLst/>
-          </a:prstGeom>
-          <a:noFill/>
-        </p:spPr>
-        <p:txBody>
-          <a:bodyPr wrap="square" anchor="t" lIns="0" rIns="0" tIns="0" bIns="0">
-            <a:spAutoFit/>
-          </a:bodyPr>
-          <a:lstStyle/>
-          <a:p>
-            <a:pPr algn="l">
-              <a:lnSpc>
-                <a:spcPct val="115000"/>
-              </a:lnSpc>
-            </a:pPr>
-            <a:r>
-              <a:rPr sz="1050" b="0" i="0">
-                <a:solidFill>
-                  <a:srgbClr val="5C576E"/>
-                </a:solidFill>
-                <a:latin typeface="Calibri"/>
-              </a:rPr>
-              <a:t>secp256k1 is the exact curve Ethereum and Bitcoin wallets actually use — not a simplified stand-in.</a:t>
-            </a:r>
-          </a:p>
-        </p:txBody>
-      </p:sp>
-      <p:sp>
-        <p:nvSpPr>
-          <p:cNvPr id="11" name="TextBox 10"/>
           <p:cNvSpPr txBox="1"/>
           <p:nvPr/>
         </p:nvSpPr>
@@ -10144,7 +11878,7 @@
                 </a:solidFill>
                 <a:latin typeface="Consolas"/>
               </a:rPr>
-              <a:t>08 / 15</a:t>
+              <a:t>08 / 18</a:t>
             </a:r>
           </a:p>
         </p:txBody>
@@ -10245,7 +11979,7 @@
                 </a:solidFill>
                 <a:latin typeface="Calibri"/>
               </a:rPr>
-              <a:t>WORKED EXAMPLE — PART 2</a:t>
+              <a:t>TOPIC 02 — PUBLIC / PRIVATE KEYS</a:t>
             </a:r>
           </a:p>
         </p:txBody>
@@ -10258,8 +11992,47 @@
         </p:nvSpPr>
         <p:spPr>
           <a:xfrm>
-            <a:off x="822960" y="1051560"/>
-            <a:ext cx="10332720" cy="1005840"/>
+            <a:off x="8503920" y="640080"/>
+            <a:ext cx="2834640" cy="365760"/>
+          </a:xfrm>
+          <a:prstGeom prst="rect">
+            <a:avLst/>
+          </a:prstGeom>
+          <a:noFill/>
+        </p:spPr>
+        <p:txBody>
+          <a:bodyPr wrap="square" anchor="t" lIns="0" rIns="0" tIns="0" bIns="0">
+            <a:spAutoFit/>
+          </a:bodyPr>
+          <a:lstStyle/>
+          <a:p>
+            <a:pPr algn="r">
+              <a:lnSpc>
+                <a:spcPct val="115000"/>
+              </a:lnSpc>
+            </a:pPr>
+            <a:r>
+              <a:rPr sz="1200" b="1" i="0">
+                <a:solidFill>
+                  <a:srgbClr val="5C576E"/>
+                </a:solidFill>
+                <a:latin typeface="Calibri"/>
+              </a:rPr>
+              <a:t>KEY IDEA 3 / 4</a:t>
+            </a:r>
+          </a:p>
+        </p:txBody>
+      </p:sp>
+      <p:sp>
+        <p:nvSpPr>
+          <p:cNvPr id="5" name="TextBox 4"/>
+          <p:cNvSpPr txBox="1"/>
+          <p:nvPr/>
+        </p:nvSpPr>
+        <p:spPr>
+          <a:xfrm>
+            <a:off x="822960" y="1097280"/>
+            <a:ext cx="9601200" cy="1005840"/>
           </a:xfrm>
           <a:prstGeom prst="rect">
             <a:avLst/>
@@ -10278,35 +12051,74 @@
               </a:lnSpc>
             </a:pPr>
             <a:r>
-              <a:rPr sz="2700" b="1" i="0">
+              <a:rPr sz="3200" b="1" i="0">
                 <a:solidFill>
                   <a:srgbClr val="1C1730"/>
                 </a:solidFill>
                 <a:latin typeface="Century Gothic"/>
               </a:rPr>
-              <a:t>Sign A Message, Verify It, Then Tamper With It</a:t>
-            </a:r>
-          </a:p>
-        </p:txBody>
-      </p:sp>
-      <p:sp>
-        <p:nvSpPr>
-          <p:cNvPr id="5" name="Rounded Rectangle 4"/>
+              <a:t>Signature</a:t>
+            </a:r>
+          </a:p>
+        </p:txBody>
+      </p:sp>
+      <p:sp>
+        <p:nvSpPr>
+          <p:cNvPr id="6" name="TextBox 5"/>
+          <p:cNvSpPr txBox="1"/>
+          <p:nvPr/>
+        </p:nvSpPr>
+        <p:spPr>
+          <a:xfrm>
+            <a:off x="822960" y="2148840"/>
+            <a:ext cx="9875520" cy="2011680"/>
+          </a:xfrm>
+          <a:prstGeom prst="rect">
+            <a:avLst/>
+          </a:prstGeom>
+          <a:noFill/>
+        </p:spPr>
+        <p:txBody>
+          <a:bodyPr wrap="square" anchor="t" lIns="0" rIns="0" tIns="0" bIns="0">
+            <a:spAutoFit/>
+          </a:bodyPr>
+          <a:lstStyle/>
+          <a:p>
+            <a:pPr algn="l">
+              <a:lnSpc>
+                <a:spcPct val="150000"/>
+              </a:lnSpc>
+            </a:pPr>
+            <a:r>
+              <a:rPr sz="1650" b="0" i="0">
+                <a:solidFill>
+                  <a:srgbClr val="1C1730"/>
+                </a:solidFill>
+                <a:latin typeface="Calibri"/>
+              </a:rPr>
+              <a:t>Produced using the private key, a signature proves you authorized a specific message — without ever revealing the key itself. Anyone can verify it using only your public key.</a:t>
+            </a:r>
+          </a:p>
+        </p:txBody>
+      </p:sp>
+      <p:sp>
+        <p:nvSpPr>
+          <p:cNvPr id="7" name="Rounded Rectangle 6"/>
           <p:cNvSpPr/>
           <p:nvPr/>
         </p:nvSpPr>
         <p:spPr>
           <a:xfrm>
-            <a:off x="822960" y="1965960"/>
-            <a:ext cx="10515600" cy="3840480"/>
+            <a:off x="822960" y="4434840"/>
+            <a:ext cx="10515600" cy="1280160"/>
           </a:xfrm>
           <a:prstGeom prst="roundRect">
             <a:avLst>
-              <a:gd name="adj" fmla="val 4500"/>
+              <a:gd name="adj" fmla="val 6000"/>
             </a:avLst>
           </a:prstGeom>
           <a:solidFill>
-            <a:srgbClr val="141026"/>
+            <a:srgbClr val="F9F1E8"/>
           </a:solidFill>
           <a:ln>
             <a:noFill/>
@@ -10337,133 +12149,40 @@
       </p:sp>
       <p:sp>
         <p:nvSpPr>
-          <p:cNvPr id="6" name="Oval 5"/>
-          <p:cNvSpPr/>
-          <p:nvPr/>
-        </p:nvSpPr>
-        <p:spPr>
-          <a:xfrm>
-            <a:off x="1024128" y="2130552"/>
-            <a:ext cx="109728" cy="109728"/>
-          </a:xfrm>
-          <a:prstGeom prst="ellipse">
-            <a:avLst/>
-          </a:prstGeom>
-          <a:solidFill>
-            <a:srgbClr val="FF6459"/>
-          </a:solidFill>
-          <a:ln>
-            <a:noFill/>
-          </a:ln>
-          <a:effectLst/>
-        </p:spPr>
-        <p:style>
-          <a:lnRef idx="1">
-            <a:schemeClr val="accent1"/>
-          </a:lnRef>
-          <a:fillRef idx="3">
-            <a:schemeClr val="accent1"/>
-          </a:fillRef>
-          <a:effectRef idx="2">
-            <a:schemeClr val="accent1"/>
-          </a:effectRef>
-          <a:fontRef idx="minor">
-            <a:schemeClr val="lt1"/>
-          </a:fontRef>
-        </p:style>
-        <p:txBody>
-          <a:bodyPr rtlCol="0" anchor="ctr"/>
-          <a:lstStyle/>
-          <a:p>
-            <a:pPr algn="ctr"/>
-          </a:p>
-        </p:txBody>
-      </p:sp>
-      <p:sp>
-        <p:nvSpPr>
-          <p:cNvPr id="7" name="Oval 6"/>
-          <p:cNvSpPr/>
-          <p:nvPr/>
-        </p:nvSpPr>
-        <p:spPr>
-          <a:xfrm>
-            <a:off x="1225296" y="2130552"/>
-            <a:ext cx="109728" cy="109728"/>
-          </a:xfrm>
-          <a:prstGeom prst="ellipse">
-            <a:avLst/>
-          </a:prstGeom>
-          <a:solidFill>
-            <a:srgbClr val="FFC02E"/>
-          </a:solidFill>
-          <a:ln>
-            <a:noFill/>
-          </a:ln>
-          <a:effectLst/>
-        </p:spPr>
-        <p:style>
-          <a:lnRef idx="1">
-            <a:schemeClr val="accent1"/>
-          </a:lnRef>
-          <a:fillRef idx="3">
-            <a:schemeClr val="accent1"/>
-          </a:fillRef>
-          <a:effectRef idx="2">
-            <a:schemeClr val="accent1"/>
-          </a:effectRef>
-          <a:fontRef idx="minor">
-            <a:schemeClr val="lt1"/>
-          </a:fontRef>
-        </p:style>
-        <p:txBody>
-          <a:bodyPr rtlCol="0" anchor="ctr"/>
-          <a:lstStyle/>
-          <a:p>
-            <a:pPr algn="ctr"/>
-          </a:p>
-        </p:txBody>
-      </p:sp>
-      <p:sp>
-        <p:nvSpPr>
-          <p:cNvPr id="8" name="Oval 7"/>
-          <p:cNvSpPr/>
-          <p:nvPr/>
-        </p:nvSpPr>
-        <p:spPr>
-          <a:xfrm>
-            <a:off x="1426464" y="2130552"/>
-            <a:ext cx="109728" cy="109728"/>
-          </a:xfrm>
-          <a:prstGeom prst="ellipse">
-            <a:avLst/>
-          </a:prstGeom>
-          <a:solidFill>
-            <a:srgbClr val="28C93F"/>
-          </a:solidFill>
-          <a:ln>
-            <a:noFill/>
-          </a:ln>
-          <a:effectLst/>
-        </p:spPr>
-        <p:style>
-          <a:lnRef idx="1">
-            <a:schemeClr val="accent1"/>
-          </a:lnRef>
-          <a:fillRef idx="3">
-            <a:schemeClr val="accent1"/>
-          </a:fillRef>
-          <a:effectRef idx="2">
-            <a:schemeClr val="accent1"/>
-          </a:effectRef>
-          <a:fontRef idx="minor">
-            <a:schemeClr val="lt1"/>
-          </a:fontRef>
-        </p:style>
-        <p:txBody>
-          <a:bodyPr rtlCol="0" anchor="ctr"/>
-          <a:lstStyle/>
-          <a:p>
-            <a:pPr algn="ctr"/>
+          <p:cNvPr id="8" name="TextBox 7"/>
+          <p:cNvSpPr txBox="1"/>
+          <p:nvPr/>
+        </p:nvSpPr>
+        <p:spPr>
+          <a:xfrm>
+            <a:off x="1143000" y="4617720"/>
+            <a:ext cx="9875520" cy="320040"/>
+          </a:xfrm>
+          <a:prstGeom prst="rect">
+            <a:avLst/>
+          </a:prstGeom>
+          <a:noFill/>
+        </p:spPr>
+        <p:txBody>
+          <a:bodyPr wrap="square" anchor="t" lIns="0" rIns="0" tIns="0" bIns="0">
+            <a:spAutoFit/>
+          </a:bodyPr>
+          <a:lstStyle/>
+          <a:p>
+            <a:pPr algn="l">
+              <a:lnSpc>
+                <a:spcPct val="115000"/>
+              </a:lnSpc>
+            </a:pPr>
+            <a:r>
+              <a:rPr sz="1100" b="1" i="0">
+                <a:solidFill>
+                  <a:srgbClr val="C67A1E"/>
+                </a:solidFill>
+                <a:latin typeface="Calibri"/>
+              </a:rPr>
+              <a:t>EXAMPLE</a:t>
+            </a:r>
           </a:p>
         </p:txBody>
       </p:sp>
@@ -10475,8 +12194,8 @@
         </p:nvSpPr>
         <p:spPr>
           <a:xfrm>
-            <a:off x="1078992" y="2350008"/>
-            <a:ext cx="10003536" cy="3273552"/>
+            <a:off x="1143000" y="4956048"/>
+            <a:ext cx="9875520" cy="640080"/>
           </a:xfrm>
           <a:prstGeom prst="rect">
             <a:avLst/>
@@ -10491,147 +12210,17 @@
           <a:p>
             <a:pPr algn="l">
               <a:lnSpc>
-                <a:spcPct val="135000"/>
-              </a:lnSpc>
-            </a:pPr>
-            <a:r>
-              <a:rPr sz="1350" b="1">
-                <a:solidFill>
-                  <a:srgbClr val="9C93C9"/>
+                <a:spcPct val="130000"/>
+              </a:lnSpc>
+            </a:pPr>
+            <a:r>
+              <a:rPr sz="1400" b="0" i="0">
+                <a:solidFill>
+                  <a:srgbClr val="1C1730"/>
                 </a:solidFill>
                 <a:latin typeface="Consolas"/>
               </a:rPr>
-              <a:t>$ </a:t>
-            </a:r>
-            <a:r>
-              <a:rPr sz="1350" b="0">
-                <a:solidFill>
-                  <a:srgbClr val="EDE9F7"/>
-                </a:solidFill>
-                <a:latin typeface="Consolas"/>
-              </a:rPr>
-              <a:t>openssl dgst -sha256 -verify pub.pem \</a:t>
-            </a:r>
-          </a:p>
-          <a:p>
-            <a:pPr algn="l">
-              <a:lnSpc>
-                <a:spcPct val="135000"/>
-              </a:lnSpc>
-            </a:pPr>
-            <a:r>
-              <a:rPr sz="1350" b="0">
-                <a:solidFill>
-                  <a:srgbClr val="EDE9F7"/>
-                </a:solidFill>
-                <a:latin typeface="Consolas"/>
-              </a:rPr>
-              <a:t>    -signature sig.bin message.txt</a:t>
-            </a:r>
-          </a:p>
-          <a:p>
-            <a:pPr algn="l">
-              <a:lnSpc>
-                <a:spcPct val="135000"/>
-              </a:lnSpc>
-            </a:pPr>
-            <a:r>
-              <a:rPr sz="1350" b="0">
-                <a:solidFill>
-                  <a:srgbClr val="7FE0C4"/>
-                </a:solidFill>
-                <a:latin typeface="Consolas"/>
-              </a:rPr>
-              <a:t>Verified OK</a:t>
-            </a:r>
-          </a:p>
-          <a:p>
-            <a:pPr algn="l">
-              <a:lnSpc>
-                <a:spcPct val="135000"/>
-              </a:lnSpc>
-            </a:pPr>
-            <a:r>
-              <a:rPr sz="1350" b="0">
-                <a:solidFill>
-                  <a:srgbClr val="EDE9F7"/>
-                </a:solidFill>
-                <a:latin typeface="Consolas"/>
-              </a:rPr>
-              <a:t/>
-            </a:r>
-          </a:p>
-          <a:p>
-            <a:pPr algn="l">
-              <a:lnSpc>
-                <a:spcPct val="135000"/>
-              </a:lnSpc>
-            </a:pPr>
-            <a:r>
-              <a:rPr sz="1350" b="0">
-                <a:solidFill>
-                  <a:srgbClr val="8B84AD"/>
-                </a:solidFill>
-                <a:latin typeface="Consolas"/>
-              </a:rPr>
-              <a:t># same signature, but the message text was changed:</a:t>
-            </a:r>
-          </a:p>
-          <a:p>
-            <a:pPr algn="l">
-              <a:lnSpc>
-                <a:spcPct val="135000"/>
-              </a:lnSpc>
-            </a:pPr>
-            <a:r>
-              <a:rPr sz="1350" b="1">
-                <a:solidFill>
-                  <a:srgbClr val="9C93C9"/>
-                </a:solidFill>
-                <a:latin typeface="Consolas"/>
-              </a:rPr>
-              <a:t>$ </a:t>
-            </a:r>
-            <a:r>
-              <a:rPr sz="1350" b="0">
-                <a:solidFill>
-                  <a:srgbClr val="EDE9F7"/>
-                </a:solidFill>
-                <a:latin typeface="Consolas"/>
-              </a:rPr>
-              <a:t>openssl dgst -sha256 -verify pub.pem \</a:t>
-            </a:r>
-          </a:p>
-          <a:p>
-            <a:pPr algn="l">
-              <a:lnSpc>
-                <a:spcPct val="135000"/>
-              </a:lnSpc>
-            </a:pPr>
-            <a:r>
-              <a:rPr sz="1350" b="0">
-                <a:solidFill>
-                  <a:srgbClr val="EDE9F7"/>
-                </a:solidFill>
-                <a:latin typeface="Consolas"/>
-              </a:rPr>
-              <a:t>    -signature sig.bin tampered.txt</a:t>
-            </a:r>
-          </a:p>
-          <a:p>
-            <a:pPr algn="l">
-              <a:lnSpc>
-                <a:spcPct val="135000"/>
-              </a:lnSpc>
-            </a:pPr>
-            <a:r>
-              <a:rPr sz="1350" b="0">
-                <a:solidFill>
-                  <a:srgbClr val="FF8E7D"/>
-                </a:solidFill>
-                <a:latin typeface="Consolas"/>
-              </a:rPr>
-              <a:t>Verification failure</a:t>
+              <a:t>sign(message, private key) → signature; verify(message, signature, public key) → true/false</a:t>
             </a:r>
           </a:p>
         </p:txBody>
@@ -10639,45 +12228,6 @@
       <p:sp>
         <p:nvSpPr>
           <p:cNvPr id="10" name="TextBox 9"/>
-          <p:cNvSpPr txBox="1"/>
-          <p:nvPr/>
-        </p:nvSpPr>
-        <p:spPr>
-          <a:xfrm>
-            <a:off x="822960" y="6446520"/>
-            <a:ext cx="10058400" cy="320040"/>
-          </a:xfrm>
-          <a:prstGeom prst="rect">
-            <a:avLst/>
-          </a:prstGeom>
-          <a:noFill/>
-        </p:spPr>
-        <p:txBody>
-          <a:bodyPr wrap="square" anchor="t" lIns="0" rIns="0" tIns="0" bIns="0">
-            <a:spAutoFit/>
-          </a:bodyPr>
-          <a:lstStyle/>
-          <a:p>
-            <a:pPr algn="l">
-              <a:lnSpc>
-                <a:spcPct val="115000"/>
-              </a:lnSpc>
-            </a:pPr>
-            <a:r>
-              <a:rPr sz="1050" b="0" i="0">
-                <a:solidFill>
-                  <a:srgbClr val="5C576E"/>
-                </a:solidFill>
-                <a:latin typeface="Calibri"/>
-              </a:rPr>
-              <a:t>An attacker can't change "1 ETH" to "100 ETH" without invalidating the signature — and can't forge a new one.</a:t>
-            </a:r>
-          </a:p>
-        </p:txBody>
-      </p:sp>
-      <p:sp>
-        <p:nvSpPr>
-          <p:cNvPr id="11" name="TextBox 10"/>
           <p:cNvSpPr txBox="1"/>
           <p:nvPr/>
         </p:nvSpPr>
@@ -10709,7 +12259,7 @@
                 </a:solidFill>
                 <a:latin typeface="Consolas"/>
               </a:rPr>
-              <a:t>09 / 15</a:t>
+              <a:t>09 / 18</a:t>
             </a:r>
           </a:p>
         </p:txBody>
